--- a/doc/AES_答辩PPT.pptx
+++ b/doc/AES_答辩PPT.pptx
@@ -3096,7 +3096,7 @@
     <p:bg>
       <p:bgPr>
         <a:solidFill>
-          <a:srgbClr val="6366F1"/>
+          <a:srgbClr val="1F3864"/>
         </a:solidFill>
         <a:effectLst/>
       </p:bgPr>
@@ -3131,26 +3131,26 @@
           <a:lstStyle/>
           <a:p>
             <a:pPr algn="ctr">
-              <a:defRPr sz="4200" b="1">
+              <a:defRPr sz="4400" b="1">
                 <a:solidFill>
                   <a:srgbClr val="FFFFFF"/>
                 </a:solidFill>
               </a:defRPr>
             </a:pPr>
             <a:r>
-              <a:t>基于深度学习的文本作业自动评分系统</a:t>
+              <a:t>中英文双语作文自动评分系统</a:t>
             </a:r>
           </a:p>
           <a:p>
             <a:pPr algn="ctr">
-              <a:defRPr sz="2400">
-                <a:solidFill>
-                  <a:srgbClr val="D1D5DB"/>
-                </a:solidFill>
-              </a:defRPr>
-            </a:pPr>
-            <a:r>
-              <a:t>Automated Essay Scoring with BERT</a:t>
+              <a:defRPr sz="2200">
+                <a:solidFill>
+                  <a:srgbClr val="D5E8F0"/>
+                </a:solidFill>
+              </a:defRPr>
+            </a:pPr>
+            <a:r>
+              <a:t>Automated Essay Scoring with BERT · Web + Android</a:t>
             </a:r>
           </a:p>
         </p:txBody>
@@ -3163,8 +3163,8 @@
         </p:nvSpPr>
         <p:spPr>
           <a:xfrm>
-            <a:off x="1371600" y="4114800"/>
-            <a:ext cx="9144000" cy="1828800"/>
+            <a:off x="1371600" y="4389120"/>
+            <a:ext cx="9144000" cy="1371600"/>
           </a:xfrm>
           <a:prstGeom prst="rect">
             <a:avLst/>
@@ -3186,28 +3186,7 @@
               </a:defRPr>
             </a:pPr>
             <a:r>
-              <a:t>中英文双语 · 多维度评分 · 智能反馈 · 批量处理</a:t>
-            </a:r>
-          </a:p>
-          <a:p>
-            <a:pPr algn="ctr">
-              <a:defRPr sz="1800">
-                <a:solidFill>
-                  <a:srgbClr val="FFFFFF"/>
-                </a:solidFill>
-              </a:defRPr>
-            </a:pPr>
-          </a:p>
-          <a:p>
-            <a:pPr algn="ctr">
-              <a:defRPr sz="1800">
-                <a:solidFill>
-                  <a:srgbClr val="FFFFFF"/>
-                </a:solidFill>
-              </a:defRPr>
-            </a:pPr>
-            <a:r>
-              <a:t>工程实践项目 | 苏州 | 2026</a:t>
+              <a:t>4 人团队  |  工程实践项目  |  苏州  |  2026</a:t>
             </a:r>
           </a:p>
         </p:txBody>
@@ -3253,7 +3232,7 @@
             <a:avLst/>
           </a:prstGeom>
           <a:solidFill>
-            <a:srgbClr val="6366F1"/>
+            <a:srgbClr val="1F3864"/>
           </a:solidFill>
           <a:ln>
             <a:noFill/>
@@ -3277,7 +3256,7 @@
           <a:bodyPr rtlCol="0" anchor="ctr" wrap="square" lIns="731520" tIns="274320"/>
           <a:lstStyle/>
           <a:p>
-            <a:pPr algn="l">
+            <a:pPr algn="ctr">
               <a:defRPr sz="3200" b="1">
                 <a:solidFill>
                   <a:srgbClr val="FFFFFF"/>
@@ -3285,11 +3264,11 @@
               </a:defRPr>
             </a:pPr>
             <a:r>
-              <a:t>演示场景</a:t>
-            </a:r>
-          </a:p>
-          <a:p>
-            <a:pPr algn="l">
+              <a:t>训练与评估</a:t>
+            </a:r>
+          </a:p>
+          <a:p>
+            <a:pPr>
               <a:defRPr sz="1600">
                 <a:solidFill>
                   <a:srgbClr val="D1D5DB"/>
@@ -3297,7 +3276,7 @@
               </a:defRPr>
             </a:pPr>
             <a:r>
-              <a:t>6个核心场景 · 约 8 分钟</a:t>
+              <a:t>QWK — 衡量人机评分一致性的主要指标</a:t>
             </a:r>
           </a:p>
         </p:txBody>
@@ -3332,21 +3311,271 @@
               </a:defRPr>
             </a:pPr>
             <a:r>
-              <a:t>AES 自动文本评分系统 | 工程实践项目答辩</a:t>
-            </a:r>
-          </a:p>
-        </p:txBody>
-      </p:sp>
-      <p:sp>
-        <p:nvSpPr>
-          <p:cNvPr id="4" name="Rectangle 3"/>
+              <a:t>AES 中英文双语作文评分系统  |  工程实践项目答辩  |  苏州 · 2026</a:t>
+            </a:r>
+          </a:p>
+        </p:txBody>
+      </p:sp>
+      <p:sp>
+        <p:nvSpPr>
+          <p:cNvPr id="4" name="TextBox 3"/>
+          <p:cNvSpPr txBox="1"/>
+          <p:nvPr/>
+        </p:nvSpPr>
+        <p:spPr>
+          <a:xfrm>
+            <a:off x="731520" y="1371600"/>
+            <a:ext cx="5029200" cy="2743200"/>
+          </a:xfrm>
+          <a:prstGeom prst="rect">
+            <a:avLst/>
+          </a:prstGeom>
+          <a:noFill/>
+        </p:spPr>
+        <p:txBody>
+          <a:bodyPr wrap="square">
+            <a:spAutoFit/>
+          </a:bodyPr>
+          <a:lstStyle/>
+          <a:p>
+            <a:pPr>
+              <a:spcAft>
+                <a:spcPts val="800"/>
+              </a:spcAft>
+              <a:defRPr sz="1600">
+                <a:solidFill>
+                  <a:srgbClr val="1F2937"/>
+                </a:solidFill>
+              </a:defRPr>
+            </a:pPr>
+            <a:r>
+              <a:t>▸ QWK (Quadratic Weighted Kappa)</a:t>
+            </a:r>
+          </a:p>
+          <a:p>
+            <a:pPr>
+              <a:spcAft>
+                <a:spcPts val="800"/>
+              </a:spcAft>
+              <a:defRPr sz="1600">
+                <a:solidFill>
+                  <a:srgbClr val="1F2937"/>
+                </a:solidFill>
+              </a:defRPr>
+            </a:pPr>
+            <a:r>
+              <a:t>    二次权重矩阵: w_ij = (i-j)^2</a:t>
+            </a:r>
+          </a:p>
+          <a:p>
+            <a:pPr>
+              <a:spcAft>
+                <a:spcPts val="800"/>
+              </a:spcAft>
+              <a:defRPr sz="1600">
+                <a:solidFill>
+                  <a:srgbClr val="1F2937"/>
+                </a:solidFill>
+              </a:defRPr>
+            </a:pPr>
+            <a:r>
+              <a:t>    评分偏差越大, 惩罚越重</a:t>
+            </a:r>
+          </a:p>
+          <a:p>
+            <a:pPr>
+              <a:spcAft>
+                <a:spcPts val="800"/>
+              </a:spcAft>
+              <a:defRPr sz="1600">
+                <a:solidFill>
+                  <a:srgbClr val="1F2937"/>
+                </a:solidFill>
+              </a:defRPr>
+            </a:pPr>
+            <a:r>
+              <a:t>    范围 [-1, 1], ≥0.70 为可接受水平</a:t>
+            </a:r>
+          </a:p>
+          <a:p>
+            <a:pPr>
+              <a:spcAft>
+                <a:spcPts val="800"/>
+              </a:spcAft>
+              <a:defRPr sz="1600">
+                <a:solidFill>
+                  <a:srgbClr val="1F2937"/>
+                </a:solidFill>
+              </a:defRPr>
+            </a:pPr>
+          </a:p>
+          <a:p>
+            <a:pPr>
+              <a:spcAft>
+                <a:spcPts val="800"/>
+              </a:spcAft>
+              <a:defRPr sz="1600">
+                <a:solidFill>
+                  <a:srgbClr val="1F2937"/>
+                </a:solidFill>
+              </a:defRPr>
+            </a:pPr>
+            <a:r>
+              <a:t>▸ 辅助指标: MAE (平均绝对误差)</a:t>
+            </a:r>
+          </a:p>
+          <a:p>
+            <a:pPr>
+              <a:spcAft>
+                <a:spcPts val="800"/>
+              </a:spcAft>
+              <a:defRPr sz="1600">
+                <a:solidFill>
+                  <a:srgbClr val="1F2937"/>
+                </a:solidFill>
+              </a:defRPr>
+            </a:pPr>
+            <a:r>
+              <a:t>    Pearson r (线性相关系数)</a:t>
+            </a:r>
+          </a:p>
+        </p:txBody>
+      </p:sp>
+      <p:sp>
+        <p:nvSpPr>
+          <p:cNvPr id="5" name="TextBox 4"/>
+          <p:cNvSpPr txBox="1"/>
+          <p:nvPr/>
+        </p:nvSpPr>
+        <p:spPr>
+          <a:xfrm>
+            <a:off x="731520" y="3840480"/>
+            <a:ext cx="5029200" cy="2286000"/>
+          </a:xfrm>
+          <a:prstGeom prst="rect">
+            <a:avLst/>
+          </a:prstGeom>
+          <a:noFill/>
+        </p:spPr>
+        <p:txBody>
+          <a:bodyPr wrap="square">
+            <a:spAutoFit/>
+          </a:bodyPr>
+          <a:lstStyle/>
+          <a:p>
+            <a:pPr>
+              <a:spcAft>
+                <a:spcPts val="800"/>
+              </a:spcAft>
+              <a:defRPr sz="1500">
+                <a:solidFill>
+                  <a:srgbClr val="1F2937"/>
+                </a:solidFill>
+              </a:defRPr>
+            </a:pPr>
+            <a:r>
+              <a:t> 模型             Val QWK   Test QWK</a:t>
+            </a:r>
+          </a:p>
+          <a:p>
+            <a:pPr>
+              <a:spcAft>
+                <a:spcPts val="800"/>
+              </a:spcAft>
+              <a:defRPr sz="1500">
+                <a:solidFill>
+                  <a:srgbClr val="1F2937"/>
+                </a:solidFill>
+              </a:defRPr>
+            </a:pPr>
+            <a:r>
+              <a:t> BERT-base EN       0.58        —</a:t>
+            </a:r>
+          </a:p>
+          <a:p>
+            <a:pPr>
+              <a:spcAft>
+                <a:spcPts val="800"/>
+              </a:spcAft>
+              <a:defRPr sz="1500">
+                <a:solidFill>
+                  <a:srgbClr val="1F2937"/>
+                </a:solidFill>
+              </a:defRPr>
+            </a:pPr>
+            <a:r>
+              <a:t> BERT-base ZH       0.79       0.76</a:t>
+            </a:r>
+          </a:p>
+          <a:p>
+            <a:pPr>
+              <a:spcAft>
+                <a:spcPts val="800"/>
+              </a:spcAft>
+              <a:defRPr sz="1500">
+                <a:solidFill>
+                  <a:srgbClr val="1F2937"/>
+                </a:solidFill>
+              </a:defRPr>
+            </a:pPr>
+            <a:r>
+              <a:t> RoBERTa EN         0.58        —</a:t>
+            </a:r>
+          </a:p>
+          <a:p>
+            <a:pPr>
+              <a:spcAft>
+                <a:spcPts val="800"/>
+              </a:spcAft>
+              <a:defRPr sz="1500">
+                <a:solidFill>
+                  <a:srgbClr val="1F2937"/>
+                </a:solidFill>
+              </a:defRPr>
+            </a:pPr>
+          </a:p>
+          <a:p>
+            <a:pPr>
+              <a:spcAft>
+                <a:spcPts val="800"/>
+              </a:spcAft>
+              <a:defRPr sz="1500">
+                <a:solidFill>
+                  <a:srgbClr val="1F2937"/>
+                </a:solidFill>
+              </a:defRPr>
+            </a:pPr>
+            <a:r>
+              <a:t> 英文 0.58 = 严格 Prompt 隔离下的真实泛化</a:t>
+            </a:r>
+          </a:p>
+          <a:p>
+            <a:pPr>
+              <a:spcAft>
+                <a:spcPts val="800"/>
+              </a:spcAft>
+              <a:defRPr sz="1500">
+                <a:solidFill>
+                  <a:srgbClr val="1F2937"/>
+                </a:solidFill>
+              </a:defRPr>
+            </a:pPr>
+            <a:r>
+              <a:t> 中文 0.79 = 翻译同源 + 随机划分 (虚高)</a:t>
+            </a:r>
+          </a:p>
+        </p:txBody>
+      </p:sp>
+      <p:sp>
+        <p:nvSpPr>
+          <p:cNvPr id="6" name="Rectangle 5"/>
           <p:cNvSpPr/>
           <p:nvPr/>
         </p:nvSpPr>
         <p:spPr>
           <a:xfrm>
-            <a:off x="1371600" y="1371600"/>
-            <a:ext cx="9418320" cy="685800"/>
+            <a:off x="6858000" y="1371600"/>
+            <a:ext cx="4572000" cy="5029200"/>
           </a:xfrm>
           <a:prstGeom prst="rect">
             <a:avLst/>
@@ -3354,9 +3583,9 @@
           <a:solidFill>
             <a:srgbClr val="FFFFFF"/>
           </a:solidFill>
-          <a:ln w="25400">
+          <a:ln w="12700">
             <a:solidFill>
-              <a:srgbClr val="6366F1"/>
+              <a:srgbClr val="E5E7EB"/>
             </a:solidFill>
           </a:ln>
         </p:spPr>
@@ -3375,360 +3604,177 @@
           </a:fontRef>
         </p:style>
         <p:txBody>
-          <a:bodyPr rtlCol="0" anchor="ctr" lIns="274320" tIns="91440"/>
+          <a:bodyPr rtlCol="0" anchor="ctr" wrap="square" lIns="274320" rIns="274320" tIns="182880"/>
           <a:lstStyle/>
           <a:p>
             <a:pPr algn="ctr">
               <a:defRPr sz="1800" b="1">
                 <a:solidFill>
-                  <a:srgbClr val="6366F1"/>
-                </a:solidFill>
-              </a:defRPr>
-            </a:pPr>
-            <a:r>
-              <a:t>场景 1: 英文作文评分</a:t>
-            </a:r>
-          </a:p>
-          <a:p>
-            <a:pPr>
-              <a:defRPr sz="1400">
-                <a:solidFill>
-                  <a:srgbClr val="6B7280"/>
-                </a:solidFill>
-              </a:defRPr>
-            </a:pPr>
-            <a:r>
-              <a:t>仪表盘 + 雷达图 + 英文反馈</a:t>
-            </a:r>
-          </a:p>
-        </p:txBody>
-      </p:sp>
-      <p:sp>
-        <p:nvSpPr>
-          <p:cNvPr id="5" name="Rectangle 4"/>
-          <p:cNvSpPr/>
-          <p:nvPr/>
-        </p:nvSpPr>
-        <p:spPr>
-          <a:xfrm>
-            <a:off x="1371600" y="2240280"/>
-            <a:ext cx="9418320" cy="685800"/>
-          </a:xfrm>
-          <a:prstGeom prst="rect">
-            <a:avLst/>
-          </a:prstGeom>
-          <a:solidFill>
-            <a:srgbClr val="FFFFFF"/>
-          </a:solidFill>
-          <a:ln w="25400">
-            <a:solidFill>
-              <a:srgbClr val="10B981"/>
-            </a:solidFill>
-          </a:ln>
-        </p:spPr>
-        <p:style>
-          <a:lnRef idx="1">
-            <a:schemeClr val="accent1"/>
-          </a:lnRef>
-          <a:fillRef idx="3">
-            <a:schemeClr val="accent1"/>
-          </a:fillRef>
-          <a:effectRef idx="2">
-            <a:schemeClr val="accent1"/>
-          </a:effectRef>
-          <a:fontRef idx="minor">
-            <a:schemeClr val="lt1"/>
-          </a:fontRef>
-        </p:style>
-        <p:txBody>
-          <a:bodyPr rtlCol="0" anchor="ctr" lIns="274320" tIns="91440"/>
-          <a:lstStyle/>
-          <a:p>
-            <a:pPr algn="ctr">
-              <a:defRPr sz="1800" b="1">
-                <a:solidFill>
                   <a:srgbClr val="10B981"/>
                 </a:solidFill>
               </a:defRPr>
             </a:pPr>
             <a:r>
-              <a:t>场景 2: 中文作文评分</a:t>
-            </a:r>
-          </a:p>
-          <a:p>
-            <a:pPr>
-              <a:defRPr sz="1400">
-                <a:solidFill>
-                  <a:srgbClr val="6B7280"/>
-                </a:solidFill>
-              </a:defRPr>
-            </a:pPr>
-            <a:r>
-              <a:t>自动检测 + 中文反馈</a:t>
-            </a:r>
-          </a:p>
-        </p:txBody>
-      </p:sp>
-      <p:sp>
-        <p:nvSpPr>
-          <p:cNvPr id="6" name="Rectangle 5"/>
-          <p:cNvSpPr/>
-          <p:nvPr/>
-        </p:nvSpPr>
-        <p:spPr>
-          <a:xfrm>
-            <a:off x="1371600" y="3108960"/>
-            <a:ext cx="9418320" cy="685800"/>
-          </a:xfrm>
-          <a:prstGeom prst="rect">
-            <a:avLst/>
-          </a:prstGeom>
-          <a:solidFill>
-            <a:srgbClr val="FFFFFF"/>
-          </a:solidFill>
-          <a:ln w="25400">
-            <a:solidFill>
-              <a:srgbClr val="3B82F6"/>
-            </a:solidFill>
-          </a:ln>
-        </p:spPr>
-        <p:style>
-          <a:lnRef idx="1">
-            <a:schemeClr val="accent1"/>
-          </a:lnRef>
-          <a:fillRef idx="3">
-            <a:schemeClr val="accent1"/>
-          </a:fillRef>
-          <a:effectRef idx="2">
-            <a:schemeClr val="accent1"/>
-          </a:effectRef>
-          <a:fontRef idx="minor">
-            <a:schemeClr val="lt1"/>
-          </a:fontRef>
-        </p:style>
-        <p:txBody>
-          <a:bodyPr rtlCol="0" anchor="ctr" lIns="274320" tIns="91440"/>
-          <a:lstStyle/>
-          <a:p>
-            <a:pPr algn="ctr">
-              <a:defRPr sz="1800" b="1">
-                <a:solidFill>
-                  <a:srgbClr val="3B82F6"/>
-                </a:solidFill>
-              </a:defRPr>
-            </a:pPr>
-            <a:r>
-              <a:t>场景 3: 批量评分</a:t>
-            </a:r>
-          </a:p>
-          <a:p>
-            <a:pPr>
-              <a:defRPr sz="1400">
-                <a:solidFill>
-                  <a:srgbClr val="6B7280"/>
-                </a:solidFill>
-              </a:defRPr>
-            </a:pPr>
-            <a:r>
-              <a:t>CSV 上传 → 结果表格 → 下载</a:t>
-            </a:r>
-          </a:p>
-        </p:txBody>
-      </p:sp>
-      <p:sp>
-        <p:nvSpPr>
-          <p:cNvPr id="7" name="Rectangle 6"/>
-          <p:cNvSpPr/>
-          <p:nvPr/>
-        </p:nvSpPr>
-        <p:spPr>
-          <a:xfrm>
-            <a:off x="1371600" y="3977639"/>
-            <a:ext cx="9418320" cy="685800"/>
-          </a:xfrm>
-          <a:prstGeom prst="rect">
-            <a:avLst/>
-          </a:prstGeom>
-          <a:solidFill>
-            <a:srgbClr val="FFFFFF"/>
-          </a:solidFill>
-          <a:ln w="25400">
-            <a:solidFill>
-              <a:srgbClr val="F59E0B"/>
-            </a:solidFill>
-          </a:ln>
-        </p:spPr>
-        <p:style>
-          <a:lnRef idx="1">
-            <a:schemeClr val="accent1"/>
-          </a:lnRef>
-          <a:fillRef idx="3">
-            <a:schemeClr val="accent1"/>
-          </a:fillRef>
-          <a:effectRef idx="2">
-            <a:schemeClr val="accent1"/>
-          </a:effectRef>
-          <a:fontRef idx="minor">
-            <a:schemeClr val="lt1"/>
-          </a:fontRef>
-        </p:style>
-        <p:txBody>
-          <a:bodyPr rtlCol="0" anchor="ctr" lIns="274320" tIns="91440"/>
-          <a:lstStyle/>
-          <a:p>
-            <a:pPr algn="ctr">
-              <a:defRPr sz="1800" b="1">
-                <a:solidFill>
-                  <a:srgbClr val="F59E0B"/>
-                </a:solidFill>
-              </a:defRPr>
-            </a:pPr>
-            <a:r>
-              <a:t>场景 4: 中英对比</a:t>
-            </a:r>
-          </a:p>
-          <a:p>
-            <a:pPr>
-              <a:defRPr sz="1400">
-                <a:solidFill>
-                  <a:srgbClr val="6B7280"/>
-                </a:solidFill>
-              </a:defRPr>
-            </a:pPr>
-            <a:r>
-              <a:t>同一文本双模型并排展示</a:t>
-            </a:r>
-          </a:p>
-        </p:txBody>
-      </p:sp>
-      <p:sp>
-        <p:nvSpPr>
-          <p:cNvPr id="8" name="Rectangle 7"/>
-          <p:cNvSpPr/>
-          <p:nvPr/>
-        </p:nvSpPr>
-        <p:spPr>
-          <a:xfrm>
-            <a:off x="1371600" y="4846320"/>
-            <a:ext cx="9418320" cy="685800"/>
-          </a:xfrm>
-          <a:prstGeom prst="rect">
-            <a:avLst/>
-          </a:prstGeom>
-          <a:solidFill>
-            <a:srgbClr val="FFFFFF"/>
-          </a:solidFill>
-          <a:ln w="25400">
-            <a:solidFill>
-              <a:srgbClr val="EF4444"/>
-            </a:solidFill>
-          </a:ln>
-        </p:spPr>
-        <p:style>
-          <a:lnRef idx="1">
-            <a:schemeClr val="accent1"/>
-          </a:lnRef>
-          <a:fillRef idx="3">
-            <a:schemeClr val="accent1"/>
-          </a:fillRef>
-          <a:effectRef idx="2">
-            <a:schemeClr val="accent1"/>
-          </a:effectRef>
-          <a:fontRef idx="minor">
-            <a:schemeClr val="lt1"/>
-          </a:fontRef>
-        </p:style>
-        <p:txBody>
-          <a:bodyPr rtlCol="0" anchor="ctr" lIns="274320" tIns="91440"/>
-          <a:lstStyle/>
-          <a:p>
-            <a:pPr algn="ctr">
-              <a:defRPr sz="1800" b="1">
-                <a:solidFill>
-                  <a:srgbClr val="EF4444"/>
-                </a:solidFill>
-              </a:defRPr>
-            </a:pPr>
-            <a:r>
-              <a:t>场景 5: 错误处理</a:t>
-            </a:r>
-          </a:p>
-          <a:p>
-            <a:pPr>
-              <a:defRPr sz="1400">
-                <a:solidFill>
-                  <a:srgbClr val="6B7280"/>
-                </a:solidFill>
-              </a:defRPr>
-            </a:pPr>
-            <a:r>
-              <a:t>空文本 / 超长 / 清除按钮</a:t>
-            </a:r>
-          </a:p>
-        </p:txBody>
-      </p:sp>
-      <p:sp>
-        <p:nvSpPr>
-          <p:cNvPr id="9" name="Rectangle 8"/>
-          <p:cNvSpPr/>
-          <p:nvPr/>
-        </p:nvSpPr>
-        <p:spPr>
-          <a:xfrm>
-            <a:off x="1371600" y="5715000"/>
-            <a:ext cx="9418320" cy="685800"/>
-          </a:xfrm>
-          <a:prstGeom prst="rect">
-            <a:avLst/>
-          </a:prstGeom>
-          <a:solidFill>
-            <a:srgbClr val="FFFFFF"/>
-          </a:solidFill>
-          <a:ln w="25400">
-            <a:solidFill>
-              <a:srgbClr val="1F2937"/>
-            </a:solidFill>
-          </a:ln>
-        </p:spPr>
-        <p:style>
-          <a:lnRef idx="1">
-            <a:schemeClr val="accent1"/>
-          </a:lnRef>
-          <a:fillRef idx="3">
-            <a:schemeClr val="accent1"/>
-          </a:fillRef>
-          <a:effectRef idx="2">
-            <a:schemeClr val="accent1"/>
-          </a:effectRef>
-          <a:fontRef idx="minor">
-            <a:schemeClr val="lt1"/>
-          </a:fontRef>
-        </p:style>
-        <p:txBody>
-          <a:bodyPr rtlCol="0" anchor="ctr" lIns="274320" tIns="91440"/>
-          <a:lstStyle/>
-          <a:p>
-            <a:pPr algn="ctr">
-              <a:defRPr sz="1800" b="1">
-                <a:solidFill>
-                  <a:srgbClr val="1F2937"/>
-                </a:solidFill>
-              </a:defRPr>
-            </a:pPr>
-            <a:r>
-              <a:t>场景 6: 工程总结</a:t>
-            </a:r>
-          </a:p>
-          <a:p>
-            <a:pPr>
-              <a:defRPr sz="1400">
-                <a:solidFill>
-                  <a:srgbClr val="6B7280"/>
-                </a:solidFill>
-              </a:defRPr>
-            </a:pPr>
-            <a:r>
-              <a:t>架构 + 指标 + 创新点</a:t>
+              <a:t>测试策略</a:t>
+            </a:r>
+          </a:p>
+          <a:p>
+            <a:pPr>
+              <a:spcAft>
+                <a:spcPts val="400"/>
+              </a:spcAft>
+              <a:defRPr sz="1400">
+                <a:solidFill>
+                  <a:srgbClr val="1F2937"/>
+                </a:solidFill>
+              </a:defRPr>
+            </a:pPr>
+            <a:r>
+              <a:t>Web 版单元测试 (pytest): 17 项</a:t>
+            </a:r>
+          </a:p>
+          <a:p>
+            <a:pPr>
+              <a:spcAft>
+                <a:spcPts val="400"/>
+              </a:spcAft>
+              <a:defRPr sz="1400">
+                <a:solidFill>
+                  <a:srgbClr val="1F2937"/>
+                </a:solidFill>
+              </a:defRPr>
+            </a:pPr>
+            <a:r>
+              <a:t>  数据预处理 · API 端点 · 评估指标</a:t>
+            </a:r>
+          </a:p>
+          <a:p>
+            <a:pPr>
+              <a:spcAft>
+                <a:spcPts val="400"/>
+              </a:spcAft>
+              <a:defRPr sz="1400">
+                <a:solidFill>
+                  <a:srgbClr val="1F2937"/>
+                </a:solidFill>
+              </a:defRPr>
+            </a:pPr>
+            <a:r>
+              <a:t>  文本清洗/归一化/QWK正确性</a:t>
+            </a:r>
+          </a:p>
+          <a:p>
+            <a:pPr>
+              <a:spcAft>
+                <a:spcPts val="400"/>
+              </a:spcAft>
+              <a:defRPr sz="1400">
+                <a:solidFill>
+                  <a:srgbClr val="1F2937"/>
+                </a:solidFill>
+              </a:defRPr>
+            </a:pPr>
+          </a:p>
+          <a:p>
+            <a:pPr>
+              <a:spcAft>
+                <a:spcPts val="400"/>
+              </a:spcAft>
+              <a:defRPr sz="1400">
+                <a:solidFill>
+                  <a:srgbClr val="1F2937"/>
+                </a:solidFill>
+              </a:defRPr>
+            </a:pPr>
+            <a:r>
+              <a:t>Web 版 E2E 测试 (Playwright): 41 项</a:t>
+            </a:r>
+          </a:p>
+          <a:p>
+            <a:pPr>
+              <a:spcAft>
+                <a:spcPts val="400"/>
+              </a:spcAft>
+              <a:defRPr sz="1400">
+                <a:solidFill>
+                  <a:srgbClr val="1F2937"/>
+                </a:solidFill>
+              </a:defRPr>
+            </a:pPr>
+            <a:r>
+              <a:t>  API 全端点: Health/Score/Batch/404</a:t>
+            </a:r>
+          </a:p>
+          <a:p>
+            <a:pPr>
+              <a:spcAft>
+                <a:spcPts val="400"/>
+              </a:spcAft>
+              <a:defRPr sz="1400">
+                <a:solidFill>
+                  <a:srgbClr val="1F2937"/>
+                </a:solidFill>
+              </a:defRPr>
+            </a:pPr>
+            <a:r>
+              <a:t>  UI 全页面: 评分/批量/对比/设置</a:t>
+            </a:r>
+          </a:p>
+          <a:p>
+            <a:pPr>
+              <a:spcAft>
+                <a:spcPts val="400"/>
+              </a:spcAft>
+              <a:defRPr sz="1400">
+                <a:solidFill>
+                  <a:srgbClr val="1F2937"/>
+                </a:solidFill>
+              </a:defRPr>
+            </a:pPr>
+            <a:r>
+              <a:t>  范文验证: 中英文高分范文评分</a:t>
+            </a:r>
+          </a:p>
+          <a:p>
+            <a:pPr>
+              <a:spcAft>
+                <a:spcPts val="400"/>
+              </a:spcAft>
+              <a:defRPr sz="1400">
+                <a:solidFill>
+                  <a:srgbClr val="1F2937"/>
+                </a:solidFill>
+              </a:defRPr>
+            </a:pPr>
+            <a:r>
+              <a:t>  错误路径: 空提交/超长/格式错误</a:t>
+            </a:r>
+          </a:p>
+          <a:p>
+            <a:pPr>
+              <a:spcAft>
+                <a:spcPts val="400"/>
+              </a:spcAft>
+              <a:defRPr sz="1400">
+                <a:solidFill>
+                  <a:srgbClr val="1F2937"/>
+                </a:solidFill>
+              </a:defRPr>
+            </a:pPr>
+          </a:p>
+          <a:p>
+            <a:pPr>
+              <a:spcAft>
+                <a:spcPts val="400"/>
+              </a:spcAft>
+              <a:defRPr sz="1400">
+                <a:solidFill>
+                  <a:srgbClr val="1F2937"/>
+                </a:solidFill>
+              </a:defRPr>
+            </a:pPr>
+            <a:r>
+              <a:t>Android 版: 手动测试 (本地演示)</a:t>
             </a:r>
           </a:p>
         </p:txBody>
@@ -3774,7 +3820,7 @@
             <a:avLst/>
           </a:prstGeom>
           <a:solidFill>
-            <a:srgbClr val="6366F1"/>
+            <a:srgbClr val="1F3864"/>
           </a:solidFill>
           <a:ln>
             <a:noFill/>
@@ -3798,7 +3844,7 @@
           <a:bodyPr rtlCol="0" anchor="ctr" wrap="square" lIns="731520" tIns="274320"/>
           <a:lstStyle/>
           <a:p>
-            <a:pPr algn="l">
+            <a:pPr algn="ctr">
               <a:defRPr sz="3200" b="1">
                 <a:solidFill>
                   <a:srgbClr val="FFFFFF"/>
@@ -3807,6 +3853,18 @@
             </a:pPr>
             <a:r>
               <a:t>关键技术决策</a:t>
+            </a:r>
+          </a:p>
+          <a:p>
+            <a:pPr>
+              <a:defRPr sz="1600">
+                <a:solidFill>
+                  <a:srgbClr val="D1D5DB"/>
+                </a:solidFill>
+              </a:defRPr>
+            </a:pPr>
+            <a:r>
+              <a:t>10 个架构决策及其理由</a:t>
             </a:r>
           </a:p>
         </p:txBody>
@@ -3841,7 +3899,7 @@
               </a:defRPr>
             </a:pPr>
             <a:r>
-              <a:t>AES 自动文本评分系统 | 工程实践项目答辩</a:t>
+              <a:t>AES 中英文双语作文评分系统  |  工程实践项目答辩  |  苏州 · 2026</a:t>
             </a:r>
           </a:p>
         </p:txBody>
@@ -3855,7 +3913,7 @@
         <p:spPr>
           <a:xfrm>
             <a:off x="1371600" y="1371600"/>
-            <a:ext cx="9418320" cy="685800"/>
+            <a:ext cx="9418320" cy="411480"/>
           </a:xfrm>
           <a:prstGeom prst="rect">
             <a:avLst/>
@@ -3884,30 +3942,30 @@
           </a:fontRef>
         </p:style>
         <p:txBody>
-          <a:bodyPr rtlCol="0" anchor="ctr" lIns="274320" tIns="91440"/>
+          <a:bodyPr rtlCol="0" anchor="ctr" lIns="274320"/>
           <a:lstStyle/>
           <a:p>
             <a:pPr algn="ctr">
-              <a:defRPr sz="1700" b="1">
-                <a:solidFill>
-                  <a:srgbClr val="1F2937"/>
-                </a:solidFill>
-              </a:defRPr>
-            </a:pPr>
-            <a:r>
-              <a:t>▸ BERT-base 为主模型</a:t>
-            </a:r>
-          </a:p>
-          <a:p>
-            <a:pPr>
-              <a:defRPr sz="1400">
+              <a:defRPr sz="1500" b="1">
+                <a:solidFill>
+                  <a:srgbClr val="6366F1"/>
+                </a:solidFill>
+              </a:defRPr>
+            </a:pPr>
+            <a:r>
+              <a:t>▸ BERT-base 优先</a:t>
+            </a:r>
+          </a:p>
+          <a:p>
+            <a:pPr>
+              <a:defRPr sz="1200">
                 <a:solidFill>
                   <a:srgbClr val="6B7280"/>
                 </a:solidFill>
               </a:defRPr>
             </a:pPr>
             <a:r>
-              <a:t>8GB 显存稳定运行，生态成熟，训练推理效率高</a:t>
+              <a:t>8GB 显存稳定, 生态成熟</a:t>
             </a:r>
           </a:p>
         </p:txBody>
@@ -3920,8 +3978,140 @@
         </p:nvSpPr>
         <p:spPr>
           <a:xfrm>
-            <a:off x="1371600" y="2240280"/>
-            <a:ext cx="9418320" cy="685800"/>
+            <a:off x="1371600" y="1874519"/>
+            <a:ext cx="9418320" cy="411480"/>
+          </a:xfrm>
+          <a:prstGeom prst="rect">
+            <a:avLst/>
+          </a:prstGeom>
+          <a:solidFill>
+            <a:srgbClr val="FFFFFF"/>
+          </a:solidFill>
+          <a:ln w="12700">
+            <a:solidFill>
+              <a:srgbClr val="2E75B6"/>
+            </a:solidFill>
+          </a:ln>
+        </p:spPr>
+        <p:style>
+          <a:lnRef idx="1">
+            <a:schemeClr val="accent1"/>
+          </a:lnRef>
+          <a:fillRef idx="3">
+            <a:schemeClr val="accent1"/>
+          </a:fillRef>
+          <a:effectRef idx="2">
+            <a:schemeClr val="accent1"/>
+          </a:effectRef>
+          <a:fontRef idx="minor">
+            <a:schemeClr val="lt1"/>
+          </a:fontRef>
+        </p:style>
+        <p:txBody>
+          <a:bodyPr rtlCol="0" anchor="ctr" lIns="274320"/>
+          <a:lstStyle/>
+          <a:p>
+            <a:pPr algn="ctr">
+              <a:defRPr sz="1500" b="1">
+                <a:solidFill>
+                  <a:srgbClr val="2E75B6"/>
+                </a:solidFill>
+              </a:defRPr>
+            </a:pPr>
+            <a:r>
+              <a:t>▸ Prompt 隔离划分</a:t>
+            </a:r>
+          </a:p>
+          <a:p>
+            <a:pPr>
+              <a:defRPr sz="1200">
+                <a:solidFill>
+                  <a:srgbClr val="6B7280"/>
+                </a:solidFill>
+              </a:defRPr>
+            </a:pPr>
+            <a:r>
+              <a:t>防止题目级数据泄露, 评估更真实</a:t>
+            </a:r>
+          </a:p>
+        </p:txBody>
+      </p:sp>
+      <p:sp>
+        <p:nvSpPr>
+          <p:cNvPr id="6" name="Rectangle 5"/>
+          <p:cNvSpPr/>
+          <p:nvPr/>
+        </p:nvSpPr>
+        <p:spPr>
+          <a:xfrm>
+            <a:off x="1371600" y="2377440"/>
+            <a:ext cx="9418320" cy="411480"/>
+          </a:xfrm>
+          <a:prstGeom prst="rect">
+            <a:avLst/>
+          </a:prstGeom>
+          <a:solidFill>
+            <a:srgbClr val="FFFFFF"/>
+          </a:solidFill>
+          <a:ln w="12700">
+            <a:solidFill>
+              <a:srgbClr val="10B981"/>
+            </a:solidFill>
+          </a:ln>
+        </p:spPr>
+        <p:style>
+          <a:lnRef idx="1">
+            <a:schemeClr val="accent1"/>
+          </a:lnRef>
+          <a:fillRef idx="3">
+            <a:schemeClr val="accent1"/>
+          </a:fillRef>
+          <a:effectRef idx="2">
+            <a:schemeClr val="accent1"/>
+          </a:effectRef>
+          <a:fontRef idx="minor">
+            <a:schemeClr val="lt1"/>
+          </a:fontRef>
+        </p:style>
+        <p:txBody>
+          <a:bodyPr rtlCol="0" anchor="ctr" lIns="274320"/>
+          <a:lstStyle/>
+          <a:p>
+            <a:pPr algn="ctr">
+              <a:defRPr sz="1500" b="1">
+                <a:solidFill>
+                  <a:srgbClr val="10B981"/>
+                </a:solidFill>
+              </a:defRPr>
+            </a:pPr>
+            <a:r>
+              <a:t>▸ 中文翻译数据</a:t>
+            </a:r>
+          </a:p>
+          <a:p>
+            <a:pPr>
+              <a:defRPr sz="1200">
+                <a:solidFill>
+                  <a:srgbClr val="6B7280"/>
+                </a:solidFill>
+              </a:defRPr>
+            </a:pPr>
+            <a:r>
+              <a:t>快速概念验证, 绕过数据获取瓶颈</a:t>
+            </a:r>
+          </a:p>
+        </p:txBody>
+      </p:sp>
+      <p:sp>
+        <p:nvSpPr>
+          <p:cNvPr id="7" name="Rectangle 6"/>
+          <p:cNvSpPr/>
+          <p:nvPr/>
+        </p:nvSpPr>
+        <p:spPr>
+          <a:xfrm>
+            <a:off x="1371600" y="2880360"/>
+            <a:ext cx="9418320" cy="411480"/>
           </a:xfrm>
           <a:prstGeom prst="rect">
             <a:avLst/>
@@ -3950,44 +4140,176 @@
           </a:fontRef>
         </p:style>
         <p:txBody>
-          <a:bodyPr rtlCol="0" anchor="ctr" lIns="274320" tIns="91440"/>
+          <a:bodyPr rtlCol="0" anchor="ctr" lIns="274320"/>
           <a:lstStyle/>
           <a:p>
             <a:pPr algn="ctr">
-              <a:defRPr sz="1700" b="1">
-                <a:solidFill>
-                  <a:srgbClr val="1F2937"/>
-                </a:solidFill>
-              </a:defRPr>
-            </a:pPr>
-            <a:r>
-              <a:t>▸ Prompt 隔离划分</a:t>
-            </a:r>
-          </a:p>
-          <a:p>
-            <a:pPr>
-              <a:defRPr sz="1400">
+              <a:defRPr sz="1500" b="1">
+                <a:solidFill>
+                  <a:srgbClr val="6366F1"/>
+                </a:solidFill>
+              </a:defRPr>
+            </a:pPr>
+            <a:r>
+              <a:t>▸ Flask + Streamlit</a:t>
+            </a:r>
+          </a:p>
+          <a:p>
+            <a:pPr>
+              <a:defRPr sz="1200">
                 <a:solidFill>
                   <a:srgbClr val="6B7280"/>
                 </a:solidFill>
               </a:defRPr>
             </a:pPr>
             <a:r>
-              <a:t>防止题目级别数据泄露，评估更真实</a:t>
-            </a:r>
-          </a:p>
-        </p:txBody>
-      </p:sp>
-      <p:sp>
-        <p:nvSpPr>
-          <p:cNvPr id="6" name="Rectangle 5"/>
+              <a:t>团队技能 Python 全栈, 快速迭代</a:t>
+            </a:r>
+          </a:p>
+        </p:txBody>
+      </p:sp>
+      <p:sp>
+        <p:nvSpPr>
+          <p:cNvPr id="8" name="Rectangle 7"/>
           <p:cNvSpPr/>
           <p:nvPr/>
         </p:nvSpPr>
         <p:spPr>
           <a:xfrm>
-            <a:off x="1371600" y="3108960"/>
-            <a:ext cx="9418320" cy="685800"/>
+            <a:off x="1371600" y="3383280"/>
+            <a:ext cx="9418320" cy="411480"/>
+          </a:xfrm>
+          <a:prstGeom prst="rect">
+            <a:avLst/>
+          </a:prstGeom>
+          <a:solidFill>
+            <a:srgbClr val="FFFFFF"/>
+          </a:solidFill>
+          <a:ln w="12700">
+            <a:solidFill>
+              <a:srgbClr val="10B981"/>
+            </a:solidFill>
+          </a:ln>
+        </p:spPr>
+        <p:style>
+          <a:lnRef idx="1">
+            <a:schemeClr val="accent1"/>
+          </a:lnRef>
+          <a:fillRef idx="3">
+            <a:schemeClr val="accent1"/>
+          </a:fillRef>
+          <a:effectRef idx="2">
+            <a:schemeClr val="accent1"/>
+          </a:effectRef>
+          <a:fontRef idx="minor">
+            <a:schemeClr val="lt1"/>
+          </a:fontRef>
+        </p:style>
+        <p:txBody>
+          <a:bodyPr rtlCol="0" anchor="ctr" lIns="274320"/>
+          <a:lstStyle/>
+          <a:p>
+            <a:pPr algn="ctr">
+              <a:defRPr sz="1500" b="1">
+                <a:solidFill>
+                  <a:srgbClr val="10B981"/>
+                </a:solidFill>
+              </a:defRPr>
+            </a:pPr>
+            <a:r>
+              <a:t>▸ PyTorch Mobile</a:t>
+            </a:r>
+          </a:p>
+          <a:p>
+            <a:pPr>
+              <a:defRPr sz="1200">
+                <a:solidFill>
+                  <a:srgbClr val="6B7280"/>
+                </a:solidFill>
+              </a:defRPr>
+            </a:pPr>
+            <a:r>
+              <a:t>Android 本地推理, 离线可用</a:t>
+            </a:r>
+          </a:p>
+        </p:txBody>
+      </p:sp>
+      <p:sp>
+        <p:nvSpPr>
+          <p:cNvPr id="9" name="Rectangle 8"/>
+          <p:cNvSpPr/>
+          <p:nvPr/>
+        </p:nvSpPr>
+        <p:spPr>
+          <a:xfrm>
+            <a:off x="1371600" y="3886200"/>
+            <a:ext cx="9418320" cy="411480"/>
+          </a:xfrm>
+          <a:prstGeom prst="rect">
+            <a:avLst/>
+          </a:prstGeom>
+          <a:solidFill>
+            <a:srgbClr val="FFFFFF"/>
+          </a:solidFill>
+          <a:ln w="12700">
+            <a:solidFill>
+              <a:srgbClr val="F59E0B"/>
+            </a:solidFill>
+          </a:ln>
+        </p:spPr>
+        <p:style>
+          <a:lnRef idx="1">
+            <a:schemeClr val="accent1"/>
+          </a:lnRef>
+          <a:fillRef idx="3">
+            <a:schemeClr val="accent1"/>
+          </a:fillRef>
+          <a:effectRef idx="2">
+            <a:schemeClr val="accent1"/>
+          </a:effectRef>
+          <a:fontRef idx="minor">
+            <a:schemeClr val="lt1"/>
+          </a:fontRef>
+        </p:style>
+        <p:txBody>
+          <a:bodyPr rtlCol="0" anchor="ctr" lIns="274320"/>
+          <a:lstStyle/>
+          <a:p>
+            <a:pPr algn="ctr">
+              <a:defRPr sz="1500" b="1">
+                <a:solidFill>
+                  <a:srgbClr val="F59E0B"/>
+                </a:solidFill>
+              </a:defRPr>
+            </a:pPr>
+            <a:r>
+              <a:t>▸ Kotlin 分词器</a:t>
+            </a:r>
+          </a:p>
+          <a:p>
+            <a:pPr>
+              <a:defRPr sz="1200">
+                <a:solidFill>
+                  <a:srgbClr val="6B7280"/>
+                </a:solidFill>
+              </a:defRPr>
+            </a:pPr>
+            <a:r>
+              <a:t>避免 Java NLP 库依赖, 100行可控</a:t>
+            </a:r>
+          </a:p>
+        </p:txBody>
+      </p:sp>
+      <p:sp>
+        <p:nvSpPr>
+          <p:cNvPr id="10" name="Rectangle 9"/>
+          <p:cNvSpPr/>
+          <p:nvPr/>
+        </p:nvSpPr>
+        <p:spPr>
+          <a:xfrm>
+            <a:off x="1371600" y="4389120"/>
+            <a:ext cx="9418320" cy="411480"/>
           </a:xfrm>
           <a:prstGeom prst="rect">
             <a:avLst/>
@@ -4016,44 +4338,44 @@
           </a:fontRef>
         </p:style>
         <p:txBody>
-          <a:bodyPr rtlCol="0" anchor="ctr" lIns="274320" tIns="91440"/>
+          <a:bodyPr rtlCol="0" anchor="ctr" lIns="274320"/>
           <a:lstStyle/>
           <a:p>
             <a:pPr algn="ctr">
-              <a:defRPr sz="1700" b="1">
-                <a:solidFill>
-                  <a:srgbClr val="1F2937"/>
-                </a:solidFill>
-              </a:defRPr>
-            </a:pPr>
-            <a:r>
-              <a:t>▸ 翻译数据 + 中文模型</a:t>
-            </a:r>
-          </a:p>
-          <a:p>
-            <a:pPr>
-              <a:defRPr sz="1400">
+              <a:defRPr sz="1500" b="1">
+                <a:solidFill>
+                  <a:srgbClr val="6366F1"/>
+                </a:solidFill>
+              </a:defRPr>
+            </a:pPr>
+            <a:r>
+              <a:t>▸ Canvas 雷达图</a:t>
+            </a:r>
+          </a:p>
+          <a:p>
+            <a:pPr>
+              <a:defRPr sz="1200">
                 <a:solidFill>
                   <a:srgbClr val="6B7280"/>
                 </a:solidFill>
               </a:defRPr>
             </a:pPr>
             <a:r>
-              <a:t>快速启动中文能力，绕过数据获取瓶颈</a:t>
-            </a:r>
-          </a:p>
-        </p:txBody>
-      </p:sp>
-      <p:sp>
-        <p:nvSpPr>
-          <p:cNvPr id="7" name="Rectangle 6"/>
+              <a:t>无第三方图表库, Android 原生渲染</a:t>
+            </a:r>
+          </a:p>
+        </p:txBody>
+      </p:sp>
+      <p:sp>
+        <p:nvSpPr>
+          <p:cNvPr id="11" name="Rectangle 10"/>
           <p:cNvSpPr/>
           <p:nvPr/>
         </p:nvSpPr>
         <p:spPr>
           <a:xfrm>
-            <a:off x="1371600" y="3977639"/>
-            <a:ext cx="9418320" cy="685800"/>
+            <a:off x="1371600" y="4892040"/>
+            <a:ext cx="9418320" cy="411480"/>
           </a:xfrm>
           <a:prstGeom prst="rect">
             <a:avLst/>
@@ -4063,7 +4385,7 @@
           </a:solidFill>
           <a:ln w="12700">
             <a:solidFill>
-              <a:srgbClr val="6366F1"/>
+              <a:srgbClr val="2E75B6"/>
             </a:solidFill>
           </a:ln>
         </p:spPr>
@@ -4082,44 +4404,44 @@
           </a:fontRef>
         </p:style>
         <p:txBody>
-          <a:bodyPr rtlCol="0" anchor="ctr" lIns="274320" tIns="91440"/>
+          <a:bodyPr rtlCol="0" anchor="ctr" lIns="274320"/>
           <a:lstStyle/>
           <a:p>
             <a:pPr algn="ctr">
-              <a:defRPr sz="1700" b="1">
-                <a:solidFill>
-                  <a:srgbClr val="1F2937"/>
-                </a:solidFill>
-              </a:defRPr>
-            </a:pPr>
-            <a:r>
-              <a:t>▸ Flask + Streamlit</a:t>
-            </a:r>
-          </a:p>
-          <a:p>
-            <a:pPr>
-              <a:defRPr sz="1400">
+              <a:defRPr sz="1500" b="1">
+                <a:solidFill>
+                  <a:srgbClr val="2E75B6"/>
+                </a:solidFill>
+              </a:defRPr>
+            </a:pPr>
+            <a:r>
+              <a:t>▸ 无 DB/Docker/认证</a:t>
+            </a:r>
+          </a:p>
+          <a:p>
+            <a:pPr>
+              <a:defRPr sz="1200">
                 <a:solidFill>
                   <a:srgbClr val="6B7280"/>
                 </a:solidFill>
               </a:defRPr>
             </a:pPr>
             <a:r>
-              <a:t>Python 全栈，团队技能匹配，快速迭代</a:t>
-            </a:r>
-          </a:p>
-        </p:txBody>
-      </p:sp>
-      <p:sp>
-        <p:nvSpPr>
-          <p:cNvPr id="8" name="Rectangle 7"/>
+              <a:t>控制工程实践复杂度边界</a:t>
+            </a:r>
+          </a:p>
+        </p:txBody>
+      </p:sp>
+      <p:sp>
+        <p:nvSpPr>
+          <p:cNvPr id="12" name="Rectangle 11"/>
           <p:cNvSpPr/>
           <p:nvPr/>
         </p:nvSpPr>
         <p:spPr>
           <a:xfrm>
-            <a:off x="1371600" y="4846320"/>
-            <a:ext cx="9418320" cy="685800"/>
+            <a:off x="1371600" y="5394960"/>
+            <a:ext cx="9418320" cy="411480"/>
           </a:xfrm>
           <a:prstGeom prst="rect">
             <a:avLst/>
@@ -4129,7 +4451,7 @@
           </a:solidFill>
           <a:ln w="12700">
             <a:solidFill>
-              <a:srgbClr val="6366F1"/>
+              <a:srgbClr val="10B981"/>
             </a:solidFill>
           </a:ln>
         </p:spPr>
@@ -4148,44 +4470,44 @@
           </a:fontRef>
         </p:style>
         <p:txBody>
-          <a:bodyPr rtlCol="0" anchor="ctr" lIns="274320" tIns="91440"/>
+          <a:bodyPr rtlCol="0" anchor="ctr" lIns="274320"/>
           <a:lstStyle/>
           <a:p>
             <a:pPr algn="ctr">
-              <a:defRPr sz="1700" b="1">
-                <a:solidFill>
-                  <a:srgbClr val="1F2937"/>
-                </a:solidFill>
-              </a:defRPr>
-            </a:pPr>
-            <a:r>
-              <a:t>▸ 不引入数据库/认证/Docker</a:t>
-            </a:r>
-          </a:p>
-          <a:p>
-            <a:pPr>
-              <a:defRPr sz="1400">
+              <a:defRPr sz="1500" b="1">
+                <a:solidFill>
+                  <a:srgbClr val="10B981"/>
+                </a:solidFill>
+              </a:defRPr>
+            </a:pPr>
+            <a:r>
+              <a:t>▸ MSE + Sigmoid</a:t>
+            </a:r>
+          </a:p>
+          <a:p>
+            <a:pPr>
+              <a:defRPr sz="1200">
                 <a:solidFill>
                   <a:srgbClr val="6B7280"/>
                 </a:solidFill>
               </a:defRPr>
             </a:pPr>
             <a:r>
-              <a:t>控制工程实践复杂度边界，聚焦核心价值</a:t>
-            </a:r>
-          </a:p>
-        </p:txBody>
-      </p:sp>
-      <p:sp>
-        <p:nvSpPr>
-          <p:cNvPr id="9" name="Rectangle 8"/>
+              <a:t>训练稳定, 梯度有上界, 输出天然 [0,1]</a:t>
+            </a:r>
+          </a:p>
+        </p:txBody>
+      </p:sp>
+      <p:sp>
+        <p:nvSpPr>
+          <p:cNvPr id="13" name="Rectangle 12"/>
           <p:cNvSpPr/>
           <p:nvPr/>
         </p:nvSpPr>
         <p:spPr>
           <a:xfrm>
-            <a:off x="1371600" y="5715000"/>
-            <a:ext cx="9418320" cy="685800"/>
+            <a:off x="1371600" y="5897880"/>
+            <a:ext cx="9418320" cy="411480"/>
           </a:xfrm>
           <a:prstGeom prst="rect">
             <a:avLst/>
@@ -4195,7 +4517,7 @@
           </a:solidFill>
           <a:ln w="12700">
             <a:solidFill>
-              <a:srgbClr val="6366F1"/>
+              <a:srgbClr val="F59E0B"/>
             </a:solidFill>
           </a:ln>
         </p:spPr>
@@ -4214,30 +4536,30 @@
           </a:fontRef>
         </p:style>
         <p:txBody>
-          <a:bodyPr rtlCol="0" anchor="ctr" lIns="274320" tIns="91440"/>
+          <a:bodyPr rtlCol="0" anchor="ctr" lIns="274320"/>
           <a:lstStyle/>
           <a:p>
             <a:pPr algn="ctr">
-              <a:defRPr sz="1700" b="1">
-                <a:solidFill>
-                  <a:srgbClr val="1F2937"/>
-                </a:solidFill>
-              </a:defRPr>
-            </a:pPr>
-            <a:r>
-              <a:t>▸ MSE 损失 + Sigmoid 输出</a:t>
-            </a:r>
-          </a:p>
-          <a:p>
-            <a:pPr>
-              <a:defRPr sz="1400">
+              <a:defRPr sz="1500" b="1">
+                <a:solidFill>
+                  <a:srgbClr val="F59E0B"/>
+                </a:solidFill>
+              </a:defRPr>
+            </a:pPr>
+            <a:r>
+              <a:t>▸ 字符规则语言检测</a:t>
+            </a:r>
+          </a:p>
+          <a:p>
+            <a:pPr>
+              <a:defRPr sz="1200">
                 <a:solidFill>
                   <a:srgbClr val="6B7280"/>
                 </a:solidFill>
               </a:defRPr>
             </a:pPr>
             <a:r>
-              <a:t>训练稳定，回归任务经典方案</a:t>
+              <a:t>Android 端零依赖, 准确率足够 (&gt;95%)</a:t>
             </a:r>
           </a:p>
         </p:txBody>
@@ -4283,7 +4605,7 @@
             <a:avLst/>
           </a:prstGeom>
           <a:solidFill>
-            <a:srgbClr val="6366F1"/>
+            <a:srgbClr val="1F3864"/>
           </a:solidFill>
           <a:ln>
             <a:noFill/>
@@ -4307,7 +4629,7 @@
           <a:bodyPr rtlCol="0" anchor="ctr" wrap="square" lIns="731520" tIns="274320"/>
           <a:lstStyle/>
           <a:p>
-            <a:pPr algn="l">
+            <a:pPr algn="ctr">
               <a:defRPr sz="3200" b="1">
                 <a:solidFill>
                   <a:srgbClr val="FFFFFF"/>
@@ -4315,7 +4637,7 @@
               </a:defRPr>
             </a:pPr>
             <a:r>
-              <a:t>项目总结与展望</a:t>
+              <a:t>项目成果总结</a:t>
             </a:r>
           </a:p>
         </p:txBody>
@@ -4350,7 +4672,7 @@
               </a:defRPr>
             </a:pPr>
             <a:r>
-              <a:t>AES 自动文本评分系统 | 工程实践项目答辩</a:t>
+              <a:t>AES 中英文双语作文评分系统  |  工程实践项目答辩  |  苏州 · 2026</a:t>
             </a:r>
           </a:p>
         </p:txBody>
@@ -4363,8 +4685,8 @@
         </p:nvSpPr>
         <p:spPr>
           <a:xfrm>
-            <a:off x="731520" y="1371600"/>
-            <a:ext cx="5029200" cy="3200400"/>
+            <a:off x="457200" y="1371600"/>
+            <a:ext cx="5486400" cy="3200400"/>
           </a:xfrm>
           <a:prstGeom prst="rect">
             <a:avLst/>
@@ -4404,127 +4726,127 @@
               </a:defRPr>
             </a:pPr>
             <a:r>
-              <a:t>✅ 已完成</a:t>
-            </a:r>
-          </a:p>
-          <a:p>
-            <a:pPr>
-              <a:spcAft>
-                <a:spcPts val="400"/>
-              </a:spcAft>
-              <a:defRPr sz="1400">
-                <a:solidFill>
-                  <a:srgbClr val="1F2937"/>
-                </a:solidFill>
-              </a:defRPr>
-            </a:pPr>
-            <a:r>
-              <a:t>• 中英文双语评分系统 (BERT双模型)</a:t>
-            </a:r>
-          </a:p>
-          <a:p>
-            <a:pPr>
-              <a:spcAft>
-                <a:spcPts val="400"/>
-              </a:spcAft>
-              <a:defRPr sz="1400">
-                <a:solidFill>
-                  <a:srgbClr val="1F2937"/>
-                </a:solidFill>
-              </a:defRPr>
-            </a:pPr>
-            <a:r>
-              <a:t>• 多维度评分 + 智能反馈生成</a:t>
-            </a:r>
-          </a:p>
-          <a:p>
-            <a:pPr>
-              <a:spcAft>
-                <a:spcPts val="400"/>
-              </a:spcAft>
-              <a:defRPr sz="1400">
-                <a:solidFill>
-                  <a:srgbClr val="1F2937"/>
-                </a:solidFill>
-              </a:defRPr>
-            </a:pPr>
-            <a:r>
-              <a:t>• RESTful API (4个端点)</a:t>
-            </a:r>
-          </a:p>
-          <a:p>
-            <a:pPr>
-              <a:spcAft>
-                <a:spcPts val="400"/>
-              </a:spcAft>
-              <a:defRPr sz="1400">
-                <a:solidFill>
-                  <a:srgbClr val="1F2937"/>
-                </a:solidFill>
-              </a:defRPr>
-            </a:pPr>
-            <a:r>
-              <a:t>• Streamlit 多页面 Web 界面</a:t>
-            </a:r>
-          </a:p>
-          <a:p>
-            <a:pPr>
-              <a:spcAft>
-                <a:spcPts val="400"/>
-              </a:spcAft>
-              <a:defRPr sz="1400">
-                <a:solidFill>
-                  <a:srgbClr val="1F2937"/>
-                </a:solidFill>
-              </a:defRPr>
-            </a:pPr>
-            <a:r>
-              <a:t>• 批量评分 CSV 流水线</a:t>
-            </a:r>
-          </a:p>
-          <a:p>
-            <a:pPr>
-              <a:spcAft>
-                <a:spcPts val="400"/>
-              </a:spcAft>
-              <a:defRPr sz="1400">
-                <a:solidFill>
-                  <a:srgbClr val="1F2937"/>
-                </a:solidFill>
-              </a:defRPr>
-            </a:pPr>
-            <a:r>
-              <a:t>• 双语界面完整切换 (i18n)</a:t>
-            </a:r>
-          </a:p>
-          <a:p>
-            <a:pPr>
-              <a:spcAft>
-                <a:spcPts val="400"/>
-              </a:spcAft>
-              <a:defRPr sz="1400">
-                <a:solidFill>
-                  <a:srgbClr val="1F2937"/>
-                </a:solidFill>
-              </a:defRPr>
-            </a:pPr>
-            <a:r>
-              <a:t>• 41 项 E2E 测试 + 17 项单元测试</a:t>
-            </a:r>
-          </a:p>
-          <a:p>
-            <a:pPr>
-              <a:spcAft>
-                <a:spcPts val="400"/>
-              </a:spcAft>
-              <a:defRPr sz="1400">
-                <a:solidFill>
-                  <a:srgbClr val="1F2937"/>
-                </a:solidFill>
-              </a:defRPr>
-            </a:pPr>
-            <a:r>
-              <a:t>• 完整项目文档 + 答辩材料</a:t>
+              <a:t>已完成</a:t>
+            </a:r>
+          </a:p>
+          <a:p>
+            <a:pPr>
+              <a:spcAft>
+                <a:spcPts val="400"/>
+              </a:spcAft>
+              <a:defRPr sz="1400">
+                <a:solidFill>
+                  <a:srgbClr val="1F2937"/>
+                </a:solidFill>
+              </a:defRPr>
+            </a:pPr>
+            <a:r>
+              <a:t>✅ 中英文双语 BERT 评分 (双模型)</a:t>
+            </a:r>
+          </a:p>
+          <a:p>
+            <a:pPr>
+              <a:spcAft>
+                <a:spcPts val="400"/>
+              </a:spcAft>
+              <a:defRPr sz="1400">
+                <a:solidFill>
+                  <a:srgbClr val="1F2937"/>
+                </a:solidFill>
+              </a:defRPr>
+            </a:pPr>
+            <a:r>
+              <a:t>✅ 多维度评分 + 雷达图 + 评语反馈</a:t>
+            </a:r>
+          </a:p>
+          <a:p>
+            <a:pPr>
+              <a:spcAft>
+                <a:spcPts val="400"/>
+              </a:spcAft>
+              <a:defRPr sz="1400">
+                <a:solidFill>
+                  <a:srgbClr val="1F2937"/>
+                </a:solidFill>
+              </a:defRPr>
+            </a:pPr>
+            <a:r>
+              <a:t>✅ Web 版: Flask API + Streamlit UI</a:t>
+            </a:r>
+          </a:p>
+          <a:p>
+            <a:pPr>
+              <a:spcAft>
+                <a:spcPts val="400"/>
+              </a:spcAft>
+              <a:defRPr sz="1400">
+                <a:solidFill>
+                  <a:srgbClr val="1F2937"/>
+                </a:solidFill>
+              </a:defRPr>
+            </a:pPr>
+            <a:r>
+              <a:t>✅ Android 版: Compose + PyTorch Mobile</a:t>
+            </a:r>
+          </a:p>
+          <a:p>
+            <a:pPr>
+              <a:spcAft>
+                <a:spcPts val="400"/>
+              </a:spcAft>
+              <a:defRPr sz="1400">
+                <a:solidFill>
+                  <a:srgbClr val="1F2937"/>
+                </a:solidFill>
+              </a:defRPr>
+            </a:pPr>
+            <a:r>
+              <a:t>✅ Kotlin 自实现 BERT 分词器</a:t>
+            </a:r>
+          </a:p>
+          <a:p>
+            <a:pPr>
+              <a:spcAft>
+                <a:spcPts val="400"/>
+              </a:spcAft>
+              <a:defRPr sz="1400">
+                <a:solidFill>
+                  <a:srgbClr val="1F2937"/>
+                </a:solidFill>
+              </a:defRPr>
+            </a:pPr>
+            <a:r>
+              <a:t>✅ Android 完全离线本地推理</a:t>
+            </a:r>
+          </a:p>
+          <a:p>
+            <a:pPr>
+              <a:spcAft>
+                <a:spcPts val="400"/>
+              </a:spcAft>
+              <a:defRPr sz="1400">
+                <a:solidFill>
+                  <a:srgbClr val="1F2937"/>
+                </a:solidFill>
+              </a:defRPr>
+            </a:pPr>
+            <a:r>
+              <a:t>✅ 批量评分 CSV 流水线</a:t>
+            </a:r>
+          </a:p>
+          <a:p>
+            <a:pPr>
+              <a:spcAft>
+                <a:spcPts val="400"/>
+              </a:spcAft>
+              <a:defRPr sz="1400">
+                <a:solidFill>
+                  <a:srgbClr val="1F2937"/>
+                </a:solidFill>
+              </a:defRPr>
+            </a:pPr>
+            <a:r>
+              <a:t>✅ 17 单元测试 + 41 E2E 测试</a:t>
             </a:r>
           </a:p>
         </p:txBody>
@@ -4538,7 +4860,7 @@
         <p:spPr>
           <a:xfrm>
             <a:off x="6217920" y="1371600"/>
-            <a:ext cx="5029200" cy="3200400"/>
+            <a:ext cx="5486400" cy="3200400"/>
           </a:xfrm>
           <a:prstGeom prst="rect">
             <a:avLst/>
@@ -4578,97 +4900,127 @@
               </a:defRPr>
             </a:pPr>
             <a:r>
-              <a:t>🔮 后续改进</a:t>
-            </a:r>
-          </a:p>
-          <a:p>
-            <a:pPr>
-              <a:spcAft>
-                <a:spcPts val="400"/>
-              </a:spcAft>
-              <a:defRPr sz="1400">
-                <a:solidFill>
-                  <a:srgbClr val="1F2937"/>
-                </a:solidFill>
-              </a:defRPr>
-            </a:pPr>
-            <a:r>
-              <a:t>• DeBERTa-v3 多任务模型 (提升 QWK)</a:t>
-            </a:r>
-          </a:p>
-          <a:p>
-            <a:pPr>
-              <a:spcAft>
-                <a:spcPts val="400"/>
-              </a:spcAft>
-              <a:defRPr sz="1400">
-                <a:solidFill>
-                  <a:srgbClr val="1F2937"/>
-                </a:solidFill>
-              </a:defRPr>
-            </a:pPr>
-            <a:r>
-              <a:t>• 收集真实中文作文数据</a:t>
-            </a:r>
-          </a:p>
-          <a:p>
-            <a:pPr>
-              <a:spcAft>
-                <a:spcPts val="400"/>
-              </a:spcAft>
-              <a:defRPr sz="1400">
-                <a:solidFill>
-                  <a:srgbClr val="1F2937"/>
-                </a:solidFill>
-              </a:defRPr>
-            </a:pPr>
-            <a:r>
-              <a:t>• 模型集成 (加权平均)</a:t>
-            </a:r>
-          </a:p>
-          <a:p>
-            <a:pPr>
-              <a:spcAft>
-                <a:spcPts val="400"/>
-              </a:spcAft>
-              <a:defRPr sz="1400">
-                <a:solidFill>
-                  <a:srgbClr val="1F2937"/>
-                </a:solidFill>
-              </a:defRPr>
-            </a:pPr>
-            <a:r>
-              <a:t>• Longformer 长文本支持</a:t>
-            </a:r>
-          </a:p>
-          <a:p>
-            <a:pPr>
-              <a:spcAft>
-                <a:spcPts val="400"/>
-              </a:spcAft>
-              <a:defRPr sz="1400">
-                <a:solidFill>
-                  <a:srgbClr val="1F2937"/>
-                </a:solidFill>
-              </a:defRPr>
-            </a:pPr>
-            <a:r>
-              <a:t>• 教师/学生角色系统</a:t>
-            </a:r>
-          </a:p>
-          <a:p>
-            <a:pPr>
-              <a:spcAft>
-                <a:spcPts val="400"/>
-              </a:spcAft>
-              <a:defRPr sz="1400">
-                <a:solidFill>
-                  <a:srgbClr val="1F2937"/>
-                </a:solidFill>
-              </a:defRPr>
-            </a:pPr>
-            <a:r>
-              <a:t>• 数据库持久化</a:t>
+              <a:t>后续改进</a:t>
+            </a:r>
+          </a:p>
+          <a:p>
+            <a:pPr>
+              <a:spcAft>
+                <a:spcPts val="400"/>
+              </a:spcAft>
+              <a:defRPr sz="1400">
+                <a:solidFill>
+                  <a:srgbClr val="1F2937"/>
+                </a:solidFill>
+              </a:defRPr>
+            </a:pPr>
+            <a:r>
+              <a:t>🔮 真实中文作文数据训练</a:t>
+            </a:r>
+          </a:p>
+          <a:p>
+            <a:pPr>
+              <a:spcAft>
+                <a:spcPts val="400"/>
+              </a:spcAft>
+              <a:defRPr sz="1400">
+                <a:solidFill>
+                  <a:srgbClr val="1F2937"/>
+                </a:solidFill>
+              </a:defRPr>
+            </a:pPr>
+            <a:r>
+              <a:t>🔮 多任务 DeBERTa-v3 部署</a:t>
+            </a:r>
+          </a:p>
+          <a:p>
+            <a:pPr>
+              <a:spcAft>
+                <a:spcPts val="400"/>
+              </a:spcAft>
+              <a:defRPr sz="1400">
+                <a:solidFill>
+                  <a:srgbClr val="1F2937"/>
+                </a:solidFill>
+              </a:defRPr>
+            </a:pPr>
+            <a:r>
+              <a:t>🔮 Longformer 长文本支持</a:t>
+            </a:r>
+          </a:p>
+          <a:p>
+            <a:pPr>
+              <a:spcAft>
+                <a:spcPts val="400"/>
+              </a:spcAft>
+              <a:defRPr sz="1400">
+                <a:solidFill>
+                  <a:srgbClr val="1F2937"/>
+                </a:solidFill>
+              </a:defRPr>
+            </a:pPr>
+            <a:r>
+              <a:t>🔮 LLM 个性化评语生成</a:t>
+            </a:r>
+          </a:p>
+          <a:p>
+            <a:pPr>
+              <a:spcAft>
+                <a:spcPts val="400"/>
+              </a:spcAft>
+              <a:defRPr sz="1400">
+                <a:solidFill>
+                  <a:srgbClr val="1F2937"/>
+                </a:solidFill>
+              </a:defRPr>
+            </a:pPr>
+            <a:r>
+              <a:t>🔮 模型版本管理 + 持续评估</a:t>
+            </a:r>
+          </a:p>
+          <a:p>
+            <a:pPr>
+              <a:spcAft>
+                <a:spcPts val="400"/>
+              </a:spcAft>
+              <a:defRPr sz="1400">
+                <a:solidFill>
+                  <a:srgbClr val="1F2937"/>
+                </a:solidFill>
+              </a:defRPr>
+            </a:pPr>
+            <a:r>
+              <a:t>🔮 Android APK 体积优化 (按需下载)</a:t>
+            </a:r>
+          </a:p>
+          <a:p>
+            <a:pPr>
+              <a:spcAft>
+                <a:spcPts val="400"/>
+              </a:spcAft>
+              <a:defRPr sz="1400">
+                <a:solidFill>
+                  <a:srgbClr val="1F2937"/>
+                </a:solidFill>
+              </a:defRPr>
+            </a:pPr>
+            <a:r>
+              <a:t>🔮 用户认证 + 历史记录</a:t>
+            </a:r>
+          </a:p>
+          <a:p>
+            <a:pPr>
+              <a:spcAft>
+                <a:spcPts val="400"/>
+              </a:spcAft>
+              <a:defRPr sz="1400">
+                <a:solidFill>
+                  <a:srgbClr val="1F2937"/>
+                </a:solidFill>
+              </a:defRPr>
+            </a:pPr>
+            <a:r>
+              <a:t>🔮 iOS 版 (Swift + CoreML)</a:t>
             </a:r>
           </a:p>
         </p:txBody>
@@ -4681,8 +5033,8 @@
         </p:nvSpPr>
         <p:spPr>
           <a:xfrm>
-            <a:off x="731520" y="4846320"/>
-            <a:ext cx="10698480" cy="1645920"/>
+            <a:off x="457200" y="4846320"/>
+            <a:ext cx="10972800" cy="1645920"/>
           </a:xfrm>
           <a:prstGeom prst="rect">
             <a:avLst/>
@@ -4717,27 +5069,42 @@
             <a:pPr algn="ctr">
               <a:defRPr sz="1800" b="1">
                 <a:solidFill>
-                  <a:srgbClr val="6366F1"/>
-                </a:solidFill>
-              </a:defRPr>
-            </a:pPr>
-            <a:r>
-              <a:t>💡 核心创新点</a:t>
-            </a:r>
-          </a:p>
-          <a:p>
-            <a:pPr>
-              <a:spcAft>
-                <a:spcPts val="400"/>
-              </a:spcAft>
-              <a:defRPr sz="1400">
-                <a:solidFill>
-                  <a:srgbClr val="1F2937"/>
-                </a:solidFill>
-              </a:defRPr>
-            </a:pPr>
-            <a:r>
-              <a:t>• 中英文双模型无缝切换  •  多维评分 + 反馈一体化  •  完整批量评分流水线  •  严格 prompt 隔离评估  •  42项自动化测试覆盖</a:t>
+                  <a:srgbClr val="1F3864"/>
+                </a:solidFill>
+              </a:defRPr>
+            </a:pPr>
+            <a:r>
+              <a:t>核心创新</a:t>
+            </a:r>
+          </a:p>
+          <a:p>
+            <a:pPr>
+              <a:spcAft>
+                <a:spcPts val="400"/>
+              </a:spcAft>
+              <a:defRPr sz="1400">
+                <a:solidFill>
+                  <a:srgbClr val="1F2937"/>
+                </a:solidFill>
+              </a:defRPr>
+            </a:pPr>
+            <a:r>
+              <a:t>中英文双模型 + 双平台 (Web+Android)  |  Kotlin 自主实现 BERT 分词器  |  Android 完全离线推理</a:t>
+            </a:r>
+          </a:p>
+          <a:p>
+            <a:pPr>
+              <a:spcAft>
+                <a:spcPts val="400"/>
+              </a:spcAft>
+              <a:defRPr sz="1400">
+                <a:solidFill>
+                  <a:srgbClr val="1F2937"/>
+                </a:solidFill>
+              </a:defRPr>
+            </a:pPr>
+            <a:r>
+              <a:t>Compose Canvas 自绘雷达图  |  Prompt 隔离严格评估  |  58 项自动化测试覆盖</a:t>
             </a:r>
           </a:p>
         </p:txBody>
@@ -4756,7 +5123,7 @@
     <p:bg>
       <p:bgPr>
         <a:solidFill>
-          <a:srgbClr val="6366F1"/>
+          <a:srgbClr val="1F3864"/>
         </a:solidFill>
         <a:effectLst/>
       </p:bgPr>
@@ -4776,8 +5143,8 @@
         </p:nvSpPr>
         <p:spPr>
           <a:xfrm>
-            <a:off x="1371600" y="2286000"/>
-            <a:ext cx="9144000" cy="2743200"/>
+            <a:off x="1371600" y="2011680"/>
+            <a:ext cx="9144000" cy="1828800"/>
           </a:xfrm>
           <a:prstGeom prst="rect">
             <a:avLst/>
@@ -4791,26 +5158,26 @@
           <a:lstStyle/>
           <a:p>
             <a:pPr algn="ctr">
-              <a:defRPr sz="5200" b="1">
+              <a:defRPr sz="4800" b="1">
                 <a:solidFill>
                   <a:srgbClr val="FFFFFF"/>
                 </a:solidFill>
               </a:defRPr>
             </a:pPr>
             <a:r>
-              <a:t>感谢聆听</a:t>
+              <a:t>谢谢！欢迎提问</a:t>
             </a:r>
           </a:p>
           <a:p>
             <a:pPr algn="ctr">
-              <a:defRPr sz="3200">
-                <a:solidFill>
-                  <a:srgbClr val="D1D5DB"/>
-                </a:solidFill>
-              </a:defRPr>
-            </a:pPr>
-            <a:r>
-              <a:t>Thank You</a:t>
+              <a:defRPr sz="2400">
+                <a:solidFill>
+                  <a:srgbClr val="D5E8F0"/>
+                </a:solidFill>
+              </a:defRPr>
+            </a:pPr>
+            <a:r>
+              <a:t>Thank You · Questions Welcome</a:t>
             </a:r>
           </a:p>
         </p:txBody>
@@ -4839,38 +5206,38 @@
           <a:p/>
           <a:p>
             <a:pPr algn="ctr">
-              <a:defRPr sz="1800">
+              <a:defRPr sz="1600">
                 <a:solidFill>
                   <a:srgbClr val="FFFFFF"/>
                 </a:solidFill>
               </a:defRPr>
             </a:pPr>
             <a:r>
-              <a:t>自动文本评分系统 (AES)</a:t>
+              <a:t>中英文双语作文自动评分系统 (AES)</a:t>
             </a:r>
           </a:p>
           <a:p>
             <a:pPr algn="ctr">
-              <a:defRPr sz="1800">
+              <a:defRPr sz="1600">
                 <a:solidFill>
                   <a:srgbClr val="FFFFFF"/>
                 </a:solidFill>
               </a:defRPr>
             </a:pPr>
             <a:r>
-              <a:t>基于 BERT 深度学习 · 中英文双语</a:t>
+              <a:t>BERT + PyTorch Mobile · Web + Android</a:t>
             </a:r>
           </a:p>
           <a:p>
             <a:pPr algn="ctr">
-              <a:defRPr sz="1800">
+              <a:defRPr sz="1600">
                 <a:solidFill>
                   <a:srgbClr val="FFFFFF"/>
                 </a:solidFill>
               </a:defRPr>
             </a:pPr>
             <a:r>
-              <a:t>苏州 · 2026</a:t>
+              <a:t>工程实践项目 · 苏州 · 2026</a:t>
             </a:r>
           </a:p>
         </p:txBody>
@@ -4916,7 +5283,7 @@
             <a:avLst/>
           </a:prstGeom>
           <a:solidFill>
-            <a:srgbClr val="6366F1"/>
+            <a:srgbClr val="1F3864"/>
           </a:solidFill>
           <a:ln>
             <a:noFill/>
@@ -4940,7 +5307,7 @@
           <a:bodyPr rtlCol="0" anchor="ctr" wrap="square" lIns="731520" tIns="274320"/>
           <a:lstStyle/>
           <a:p>
-            <a:pPr algn="l">
+            <a:pPr algn="ctr">
               <a:defRPr sz="3200" b="1">
                 <a:solidFill>
                   <a:srgbClr val="FFFFFF"/>
@@ -4948,7 +5315,19 @@
               </a:defRPr>
             </a:pPr>
             <a:r>
-              <a:t>项目背景与目标</a:t>
+              <a:t>问题背景</a:t>
+            </a:r>
+          </a:p>
+          <a:p>
+            <a:pPr>
+              <a:defRPr sz="1600">
+                <a:solidFill>
+                  <a:srgbClr val="D1D5DB"/>
+                </a:solidFill>
+              </a:defRPr>
+            </a:pPr>
+            <a:r>
+              <a:t>为什么需要自动作文评分？</a:t>
             </a:r>
           </a:p>
         </p:txBody>
@@ -4983,7 +5362,7 @@
               </a:defRPr>
             </a:pPr>
             <a:r>
-              <a:t>AES 自动文本评分系统 | 工程实践项目答辩</a:t>
+              <a:t>AES 中英文双语作文评分系统  |  工程实践项目答辩  |  苏州 · 2026</a:t>
             </a:r>
           </a:p>
         </p:txBody>
@@ -4997,7 +5376,7 @@
         <p:spPr>
           <a:xfrm>
             <a:off x="731520" y="1463040"/>
-            <a:ext cx="5029200" cy="4572000"/>
+            <a:ext cx="10058400" cy="5029200"/>
           </a:xfrm>
           <a:prstGeom prst="rect">
             <a:avLst/>
@@ -5014,14 +5393,14 @@
               <a:spcAft>
                 <a:spcPts val="800"/>
               </a:spcAft>
-              <a:defRPr sz="1600">
-                <a:solidFill>
-                  <a:srgbClr val="1F2937"/>
-                </a:solidFill>
-              </a:defRPr>
-            </a:pPr>
-            <a:r>
-              <a:t>📌 项目背景</a:t>
+              <a:defRPr sz="1800">
+                <a:solidFill>
+                  <a:srgbClr val="1F2937"/>
+                </a:solidFill>
+              </a:defRPr>
+            </a:pPr>
+            <a:r>
+              <a:t>▸ 教师批改痛点：4 个班 × 50 篇 = 200 篇作文，每篇 10 分钟 = 33 小时工作量</a:t>
             </a:r>
           </a:p>
           <a:p>
@@ -5029,14 +5408,14 @@
               <a:spcAft>
                 <a:spcPts val="800"/>
               </a:spcAft>
-              <a:defRPr sz="1600">
-                <a:solidFill>
-                  <a:srgbClr val="1F2937"/>
-                </a:solidFill>
-              </a:defRPr>
-            </a:pPr>
-            <a:r>
-              <a:t>• 传统作文评分依赖人工，效率低、一致性差</a:t>
+              <a:defRPr sz="1800">
+                <a:solidFill>
+                  <a:srgbClr val="1F2937"/>
+                </a:solidFill>
+              </a:defRPr>
+            </a:pPr>
+            <a:r>
+              <a:t>▸ 评分一致性：疲劳导致前 30 篇精批细改，后面越批越潦草</a:t>
             </a:r>
           </a:p>
           <a:p>
@@ -5044,14 +5423,14 @@
               <a:spcAft>
                 <a:spcPts val="800"/>
               </a:spcAft>
-              <a:defRPr sz="1600">
-                <a:solidFill>
-                  <a:srgbClr val="1F2937"/>
-                </a:solidFill>
-              </a:defRPr>
-            </a:pPr>
-            <a:r>
-              <a:t>• 深度学习技术在 NLP 领域取得突破性进展</a:t>
+              <a:defRPr sz="1800">
+                <a:solidFill>
+                  <a:srgbClr val="1F2937"/>
+                </a:solidFill>
+              </a:defRPr>
+            </a:pPr>
+            <a:r>
+              <a:t>▸ 缺乏分项反馈：学生只知道总分，不知道内容/结构/语言哪个弱</a:t>
             </a:r>
           </a:p>
           <a:p>
@@ -5059,14 +5438,14 @@
               <a:spcAft>
                 <a:spcPts val="800"/>
               </a:spcAft>
-              <a:defRPr sz="1600">
-                <a:solidFill>
-                  <a:srgbClr val="1F2937"/>
-                </a:solidFill>
-              </a:defRPr>
-            </a:pPr>
-            <a:r>
-              <a:t>• 预训练模型（BERT）为自动评分提供了技术基础</a:t>
+              <a:defRPr sz="1800">
+                <a:solidFill>
+                  <a:srgbClr val="1F2937"/>
+                </a:solidFill>
+              </a:defRPr>
+            </a:pPr>
+            <a:r>
+              <a:t>▸ 商业方案昂贵：ETS e-rater 等闭源，不适用于中文教学场景</a:t>
             </a:r>
           </a:p>
           <a:p>
@@ -5074,7 +5453,7 @@
               <a:spcAft>
                 <a:spcPts val="800"/>
               </a:spcAft>
-              <a:defRPr sz="1600">
+              <a:defRPr sz="1800">
                 <a:solidFill>
                   <a:srgbClr val="1F2937"/>
                 </a:solidFill>
@@ -5086,14 +5465,14 @@
               <a:spcAft>
                 <a:spcPts val="800"/>
               </a:spcAft>
-              <a:defRPr sz="1600">
-                <a:solidFill>
-                  <a:srgbClr val="1F2937"/>
-                </a:solidFill>
-              </a:defRPr>
-            </a:pPr>
-            <a:r>
-              <a:t>🎯 项目目标</a:t>
+              <a:defRPr sz="1800">
+                <a:solidFill>
+                  <a:srgbClr val="1F2937"/>
+                </a:solidFill>
+              </a:defRPr>
+            </a:pPr>
+            <a:r>
+              <a:t>→ 目标：开源、中英双语、Web + Android 双平台的自动评分系统，</a:t>
             </a:r>
           </a:p>
           <a:p>
@@ -5101,203 +5480,14 @@
               <a:spcAft>
                 <a:spcPts val="800"/>
               </a:spcAft>
-              <a:defRPr sz="1600">
-                <a:solidFill>
-                  <a:srgbClr val="1F2937"/>
-                </a:solidFill>
-              </a:defRPr>
-            </a:pPr>
-            <a:r>
-              <a:t>• 构建支持中英文双语的自动作文评分系统</a:t>
-            </a:r>
-          </a:p>
-          <a:p>
-            <a:pPr>
-              <a:spcAft>
-                <a:spcPts val="800"/>
-              </a:spcAft>
-              <a:defRPr sz="1600">
-                <a:solidFill>
-                  <a:srgbClr val="1F2937"/>
-                </a:solidFill>
-              </a:defRPr>
-            </a:pPr>
-            <a:r>
-              <a:t>• 提供多维度评分（总评分 + 内容/结构/语言）</a:t>
-            </a:r>
-          </a:p>
-          <a:p>
-            <a:pPr>
-              <a:spcAft>
-                <a:spcPts val="800"/>
-              </a:spcAft>
-              <a:defRPr sz="1600">
-                <a:solidFill>
-                  <a:srgbClr val="1F2937"/>
-                </a:solidFill>
-              </a:defRPr>
-            </a:pPr>
-            <a:r>
-              <a:t>• 生成可读的文字评语反馈</a:t>
-            </a:r>
-          </a:p>
-          <a:p>
-            <a:pPr>
-              <a:spcAft>
-                <a:spcPts val="800"/>
-              </a:spcAft>
-              <a:defRPr sz="1600">
-                <a:solidFill>
-                  <a:srgbClr val="1F2937"/>
-                </a:solidFill>
-              </a:defRPr>
-            </a:pPr>
-            <a:r>
-              <a:t>• 通过 Web 界面实现便捷交互</a:t>
-            </a:r>
-          </a:p>
-        </p:txBody>
-      </p:sp>
-      <p:sp>
-        <p:nvSpPr>
-          <p:cNvPr id="5" name="Rectangle 4"/>
-          <p:cNvSpPr/>
-          <p:nvPr/>
-        </p:nvSpPr>
-        <p:spPr>
-          <a:xfrm>
-            <a:off x="6858000" y="1463040"/>
-            <a:ext cx="4572000" cy="3657600"/>
-          </a:xfrm>
-          <a:prstGeom prst="rect">
-            <a:avLst/>
-          </a:prstGeom>
-          <a:solidFill>
-            <a:srgbClr val="FFFFFF"/>
-          </a:solidFill>
-          <a:ln w="12700">
-            <a:solidFill>
-              <a:srgbClr val="E5E7EB"/>
-            </a:solidFill>
-          </a:ln>
-        </p:spPr>
-        <p:style>
-          <a:lnRef idx="1">
-            <a:schemeClr val="accent1"/>
-          </a:lnRef>
-          <a:fillRef idx="3">
-            <a:schemeClr val="accent1"/>
-          </a:fillRef>
-          <a:effectRef idx="2">
-            <a:schemeClr val="accent1"/>
-          </a:effectRef>
-          <a:fontRef idx="minor">
-            <a:schemeClr val="lt1"/>
-          </a:fontRef>
-        </p:style>
-        <p:txBody>
-          <a:bodyPr rtlCol="0" anchor="ctr" wrap="square" lIns="274320" rIns="274320" tIns="182880"/>
-          <a:lstStyle/>
-          <a:p>
-            <a:pPr algn="ctr">
-              <a:defRPr sz="1800" b="1">
-                <a:solidFill>
-                  <a:srgbClr val="10B981"/>
-                </a:solidFill>
-              </a:defRPr>
-            </a:pPr>
-            <a:r>
-              <a:t>🎯 成功标准</a:t>
-            </a:r>
-          </a:p>
-          <a:p>
-            <a:pPr>
-              <a:spcAft>
-                <a:spcPts val="400"/>
-              </a:spcAft>
-              <a:defRPr sz="1400">
-                <a:solidFill>
-                  <a:srgbClr val="1F2937"/>
-                </a:solidFill>
-              </a:defRPr>
-            </a:pPr>
-            <a:r>
-              <a:t>✅ 英文 ASAP 数据集 QWK ≥ 0.70</a:t>
-            </a:r>
-          </a:p>
-          <a:p>
-            <a:pPr>
-              <a:spcAft>
-                <a:spcPts val="400"/>
-              </a:spcAft>
-              <a:defRPr sz="1400">
-                <a:solidFill>
-                  <a:srgbClr val="1F2937"/>
-                </a:solidFill>
-              </a:defRPr>
-            </a:pPr>
-            <a:r>
-              <a:t>✅ 中文模型 QWK ≥ 0.70</a:t>
-            </a:r>
-          </a:p>
-          <a:p>
-            <a:pPr>
-              <a:spcAft>
-                <a:spcPts val="400"/>
-              </a:spcAft>
-              <a:defRPr sz="1400">
-                <a:solidFill>
-                  <a:srgbClr val="1F2937"/>
-                </a:solidFill>
-              </a:defRPr>
-            </a:pPr>
-            <a:r>
-              <a:t>✅ API 单篇评分响应 &lt; 5 秒</a:t>
-            </a:r>
-          </a:p>
-          <a:p>
-            <a:pPr>
-              <a:spcAft>
-                <a:spcPts val="400"/>
-              </a:spcAft>
-              <a:defRPr sz="1400">
-                <a:solidFill>
-                  <a:srgbClr val="1F2937"/>
-                </a:solidFill>
-              </a:defRPr>
-            </a:pPr>
-            <a:r>
-              <a:t>✅ 中英文双语界面完整切换</a:t>
-            </a:r>
-          </a:p>
-          <a:p>
-            <a:pPr>
-              <a:spcAft>
-                <a:spcPts val="400"/>
-              </a:spcAft>
-              <a:defRPr sz="1400">
-                <a:solidFill>
-                  <a:srgbClr val="1F2937"/>
-                </a:solidFill>
-              </a:defRPr>
-            </a:pPr>
-            <a:r>
-              <a:t>✅ 批量评分 CSV 支持</a:t>
-            </a:r>
-          </a:p>
-          <a:p>
-            <a:pPr>
-              <a:spcAft>
-                <a:spcPts val="400"/>
-              </a:spcAft>
-              <a:defRPr sz="1400">
-                <a:solidFill>
-                  <a:srgbClr val="1F2937"/>
-                </a:solidFill>
-              </a:defRPr>
-            </a:pPr>
-            <a:r>
-              <a:t>✅ E2E 测试 41 项全部通过</a:t>
+              <a:defRPr sz="1800">
+                <a:solidFill>
+                  <a:srgbClr val="1F2937"/>
+                </a:solidFill>
+              </a:defRPr>
+            </a:pPr>
+            <a:r>
+              <a:t>   让教师和学生都能随时随地获取即时评分和反馈</a:t>
             </a:r>
           </a:p>
         </p:txBody>
@@ -5343,7 +5533,7 @@
             <a:avLst/>
           </a:prstGeom>
           <a:solidFill>
-            <a:srgbClr val="6366F1"/>
+            <a:srgbClr val="1F3864"/>
           </a:solidFill>
           <a:ln>
             <a:noFill/>
@@ -5367,7 +5557,7 @@
           <a:bodyPr rtlCol="0" anchor="ctr" wrap="square" lIns="731520" tIns="274320"/>
           <a:lstStyle/>
           <a:p>
-            <a:pPr algn="l">
+            <a:pPr algn="ctr">
               <a:defRPr sz="3200" b="1">
                 <a:solidFill>
                   <a:srgbClr val="FFFFFF"/>
@@ -5375,7 +5565,7 @@
               </a:defRPr>
             </a:pPr>
             <a:r>
-              <a:t>系统架构</a:t>
+              <a:t>系统功能概览</a:t>
             </a:r>
           </a:p>
         </p:txBody>
@@ -5410,7 +5600,7 @@
               </a:defRPr>
             </a:pPr>
             <a:r>
-              <a:t>AES 自动文本评分系统 | 工程实践项目答辩</a:t>
+              <a:t>AES 中英文双语作文评分系统  |  工程实践项目答辩  |  苏州 · 2026</a:t>
             </a:r>
           </a:p>
         </p:txBody>
@@ -5423,8 +5613,8 @@
         </p:nvSpPr>
         <p:spPr>
           <a:xfrm>
-            <a:off x="1371600" y="1463040"/>
-            <a:ext cx="9418320" cy="1005840"/>
+            <a:off x="457200" y="1371600"/>
+            <a:ext cx="3474720" cy="2286000"/>
           </a:xfrm>
           <a:prstGeom prst="rect">
             <a:avLst/>
@@ -5432,9 +5622,9 @@
           <a:solidFill>
             <a:srgbClr val="FFFFFF"/>
           </a:solidFill>
-          <a:ln w="25400">
+          <a:ln w="12700">
             <a:solidFill>
-              <a:srgbClr val="6366F1"/>
+              <a:srgbClr val="E5E7EB"/>
             </a:solidFill>
           </a:ln>
         </p:spPr>
@@ -5453,7 +5643,7 @@
           </a:fontRef>
         </p:style>
         <p:txBody>
-          <a:bodyPr rtlCol="0" anchor="ctr" lIns="274320" tIns="91440"/>
+          <a:bodyPr rtlCol="0" anchor="ctr" wrap="square" lIns="274320" rIns="274320" tIns="182880"/>
           <a:lstStyle/>
           <a:p>
             <a:pPr algn="ctr">
@@ -5464,19 +5654,67 @@
               </a:defRPr>
             </a:pPr>
             <a:r>
-              <a:t>Streamlit UI</a:t>
-            </a:r>
-          </a:p>
-          <a:p>
-            <a:pPr>
-              <a:defRPr sz="1400">
-                <a:solidFill>
-                  <a:srgbClr val="6B7280"/>
-                </a:solidFill>
-              </a:defRPr>
-            </a:pPr>
-            <a:r>
-              <a:t>评分页面 | 批量页面 | 中英对比 | 双语切换 | 仪表盘+雷达图+反馈卡片</a:t>
+              <a:t>单篇评分</a:t>
+            </a:r>
+          </a:p>
+          <a:p>
+            <a:pPr>
+              <a:spcAft>
+                <a:spcPts val="400"/>
+              </a:spcAft>
+              <a:defRPr sz="1400">
+                <a:solidFill>
+                  <a:srgbClr val="1F2937"/>
+                </a:solidFill>
+              </a:defRPr>
+            </a:pPr>
+            <a:r>
+              <a:t>中英文自动检测</a:t>
+            </a:r>
+          </a:p>
+          <a:p>
+            <a:pPr>
+              <a:spcAft>
+                <a:spcPts val="400"/>
+              </a:spcAft>
+              <a:defRPr sz="1400">
+                <a:solidFill>
+                  <a:srgbClr val="1F2937"/>
+                </a:solidFill>
+              </a:defRPr>
+            </a:pPr>
+            <a:r>
+              <a:t>语言手动切换</a:t>
+            </a:r>
+          </a:p>
+          <a:p>
+            <a:pPr>
+              <a:spcAft>
+                <a:spcPts val="400"/>
+              </a:spcAft>
+              <a:defRPr sz="1400">
+                <a:solidFill>
+                  <a:srgbClr val="1F2937"/>
+                </a:solidFill>
+              </a:defRPr>
+            </a:pPr>
+            <a:r>
+              <a:t>总分仪表盘 + 维度雷达图</a:t>
+            </a:r>
+          </a:p>
+          <a:p>
+            <a:pPr>
+              <a:spcAft>
+                <a:spcPts val="400"/>
+              </a:spcAft>
+              <a:defRPr sz="1400">
+                <a:solidFill>
+                  <a:srgbClr val="1F2937"/>
+                </a:solidFill>
+              </a:defRPr>
+            </a:pPr>
+            <a:r>
+              <a:t>模板化评语反馈</a:t>
             </a:r>
           </a:p>
         </p:txBody>
@@ -5489,8 +5727,8 @@
         </p:nvSpPr>
         <p:spPr>
           <a:xfrm>
-            <a:off x="1371600" y="2697480"/>
-            <a:ext cx="9418320" cy="1005840"/>
+            <a:off x="4206240" y="1371600"/>
+            <a:ext cx="3474720" cy="2286000"/>
           </a:xfrm>
           <a:prstGeom prst="rect">
             <a:avLst/>
@@ -5498,9 +5736,9 @@
           <a:solidFill>
             <a:srgbClr val="FFFFFF"/>
           </a:solidFill>
-          <a:ln w="25400">
+          <a:ln w="12700">
             <a:solidFill>
-              <a:srgbClr val="3B82F6"/>
+              <a:srgbClr val="E5E7EB"/>
             </a:solidFill>
           </a:ln>
         </p:spPr>
@@ -5519,30 +5757,78 @@
           </a:fontRef>
         </p:style>
         <p:txBody>
-          <a:bodyPr rtlCol="0" anchor="ctr" lIns="274320" tIns="91440"/>
+          <a:bodyPr rtlCol="0" anchor="ctr" wrap="square" lIns="274320" rIns="274320" tIns="182880"/>
           <a:lstStyle/>
           <a:p>
             <a:pPr algn="ctr">
               <a:defRPr sz="1800" b="1">
                 <a:solidFill>
-                  <a:srgbClr val="3B82F6"/>
-                </a:solidFill>
-              </a:defRPr>
-            </a:pPr>
-            <a:r>
-              <a:t>Flask REST API</a:t>
-            </a:r>
-          </a:p>
-          <a:p>
-            <a:pPr>
-              <a:defRPr sz="1400">
-                <a:solidFill>
-                  <a:srgbClr val="6B7280"/>
-                </a:solidFill>
-              </a:defRPr>
-            </a:pPr>
-            <a:r>
-              <a:t>POST /score | POST /batch | GET /health | GET /models | 参数校验+错误处理</a:t>
+                  <a:srgbClr val="2E75B6"/>
+                </a:solidFill>
+              </a:defRPr>
+            </a:pPr>
+            <a:r>
+              <a:t>批量评分</a:t>
+            </a:r>
+          </a:p>
+          <a:p>
+            <a:pPr>
+              <a:spcAft>
+                <a:spcPts val="400"/>
+              </a:spcAft>
+              <a:defRPr sz="1400">
+                <a:solidFill>
+                  <a:srgbClr val="1F2937"/>
+                </a:solidFill>
+              </a:defRPr>
+            </a:pPr>
+            <a:r>
+              <a:t>CSV 文件导入</a:t>
+            </a:r>
+          </a:p>
+          <a:p>
+            <a:pPr>
+              <a:spcAft>
+                <a:spcPts val="400"/>
+              </a:spcAft>
+              <a:defRPr sz="1400">
+                <a:solidFill>
+                  <a:srgbClr val="1F2937"/>
+                </a:solidFill>
+              </a:defRPr>
+            </a:pPr>
+            <a:r>
+              <a:t>逐篇推理 + 进度展示</a:t>
+            </a:r>
+          </a:p>
+          <a:p>
+            <a:pPr>
+              <a:spcAft>
+                <a:spcPts val="400"/>
+              </a:spcAft>
+              <a:defRPr sz="1400">
+                <a:solidFill>
+                  <a:srgbClr val="1F2937"/>
+                </a:solidFill>
+              </a:defRPr>
+            </a:pPr>
+            <a:r>
+              <a:t>结果列表 + 下载导出</a:t>
+            </a:r>
+          </a:p>
+          <a:p>
+            <a:pPr>
+              <a:spcAft>
+                <a:spcPts val="400"/>
+              </a:spcAft>
+              <a:defRPr sz="1400">
+                <a:solidFill>
+                  <a:srgbClr val="1F2937"/>
+                </a:solidFill>
+              </a:defRPr>
+            </a:pPr>
+            <a:r>
+              <a:t>最多 100 篇</a:t>
             </a:r>
           </a:p>
         </p:txBody>
@@ -5555,8 +5841,8 @@
         </p:nvSpPr>
         <p:spPr>
           <a:xfrm>
-            <a:off x="1371600" y="3931920"/>
-            <a:ext cx="9418320" cy="1005840"/>
+            <a:off x="7955279" y="1371600"/>
+            <a:ext cx="3474720" cy="2286000"/>
           </a:xfrm>
           <a:prstGeom prst="rect">
             <a:avLst/>
@@ -5564,9 +5850,9 @@
           <a:solidFill>
             <a:srgbClr val="FFFFFF"/>
           </a:solidFill>
-          <a:ln w="25400">
+          <a:ln w="12700">
             <a:solidFill>
-              <a:srgbClr val="10B981"/>
+              <a:srgbClr val="E5E7EB"/>
             </a:solidFill>
           </a:ln>
         </p:spPr>
@@ -5585,7 +5871,7 @@
           </a:fontRef>
         </p:style>
         <p:txBody>
-          <a:bodyPr rtlCol="0" anchor="ctr" lIns="274320" tIns="91440"/>
+          <a:bodyPr rtlCol="0" anchor="ctr" wrap="square" lIns="274320" rIns="274320" tIns="182880"/>
           <a:lstStyle/>
           <a:p>
             <a:pPr algn="ctr">
@@ -5596,19 +5882,67 @@
               </a:defRPr>
             </a:pPr>
             <a:r>
-              <a:t>推理引擎</a:t>
-            </a:r>
-          </a:p>
-          <a:p>
-            <a:pPr>
-              <a:defRPr sz="1400">
-                <a:solidFill>
-                  <a:srgbClr val="6B7280"/>
-                </a:solidFill>
-              </a:defRPr>
-            </a:pPr>
-            <a:r>
-              <a:t>语言检测 → 文本预处理 → 模型路由 → 推理 → 反馈生成</a:t>
+              <a:t>中英对比</a:t>
+            </a:r>
+          </a:p>
+          <a:p>
+            <a:pPr>
+              <a:spcAft>
+                <a:spcPts val="400"/>
+              </a:spcAft>
+              <a:defRPr sz="1400">
+                <a:solidFill>
+                  <a:srgbClr val="1F2937"/>
+                </a:solidFill>
+              </a:defRPr>
+            </a:pPr>
+            <a:r>
+              <a:t>同一文本双模型评分</a:t>
+            </a:r>
+          </a:p>
+          <a:p>
+            <a:pPr>
+              <a:spcAft>
+                <a:spcPts val="400"/>
+              </a:spcAft>
+              <a:defRPr sz="1400">
+                <a:solidFill>
+                  <a:srgbClr val="1F2937"/>
+                </a:solidFill>
+              </a:defRPr>
+            </a:pPr>
+            <a:r>
+              <a:t>中英模型并排展示</a:t>
+            </a:r>
+          </a:p>
+          <a:p>
+            <a:pPr>
+              <a:spcAft>
+                <a:spcPts val="400"/>
+              </a:spcAft>
+              <a:defRPr sz="1400">
+                <a:solidFill>
+                  <a:srgbClr val="1F2937"/>
+                </a:solidFill>
+              </a:defRPr>
+            </a:pPr>
+            <a:r>
+              <a:t>维度分差直观对比</a:t>
+            </a:r>
+          </a:p>
+          <a:p>
+            <a:pPr>
+              <a:spcAft>
+                <a:spcPts val="400"/>
+              </a:spcAft>
+              <a:defRPr sz="1400">
+                <a:solidFill>
+                  <a:srgbClr val="1F2937"/>
+                </a:solidFill>
+              </a:defRPr>
+            </a:pPr>
+            <a:r>
+              <a:t>Web + Android 双端</a:t>
             </a:r>
           </a:p>
         </p:txBody>
@@ -5621,8 +5955,8 @@
         </p:nvSpPr>
         <p:spPr>
           <a:xfrm>
-            <a:off x="1371600" y="5166360"/>
-            <a:ext cx="9418320" cy="1005840"/>
+            <a:off x="457200" y="3931920"/>
+            <a:ext cx="3474720" cy="2560320"/>
           </a:xfrm>
           <a:prstGeom prst="rect">
             <a:avLst/>
@@ -5630,9 +5964,9 @@
           <a:solidFill>
             <a:srgbClr val="FFFFFF"/>
           </a:solidFill>
-          <a:ln w="25400">
+          <a:ln w="12700">
             <a:solidFill>
-              <a:srgbClr val="F59E0B"/>
+              <a:srgbClr val="E5E7EB"/>
             </a:solidFill>
           </a:ln>
         </p:spPr>
@@ -5651,7 +5985,7 @@
           </a:fontRef>
         </p:style>
         <p:txBody>
-          <a:bodyPr rtlCol="0" anchor="ctr" lIns="274320" tIns="91440"/>
+          <a:bodyPr rtlCol="0" anchor="ctr" wrap="square" lIns="274320" rIns="274320" tIns="182880"/>
           <a:lstStyle/>
           <a:p>
             <a:pPr algn="ctr">
@@ -5662,124 +5996,166 @@
               </a:defRPr>
             </a:pPr>
             <a:r>
-              <a:t>模型层</a:t>
-            </a:r>
-          </a:p>
-          <a:p>
-            <a:pPr>
-              <a:defRPr sz="1400">
-                <a:solidFill>
-                  <a:srgbClr val="6B7280"/>
-                </a:solidFill>
-              </a:defRPr>
-            </a:pPr>
-            <a:r>
-              <a:t>BERT-base-uncased (英文) | BERT-base-chinese (中文) | jieba 中文分词</a:t>
-            </a:r>
-          </a:p>
-        </p:txBody>
-      </p:sp>
-      <p:sp>
-        <p:nvSpPr>
-          <p:cNvPr id="8" name="TextBox 7"/>
-          <p:cNvSpPr txBox="1"/>
+              <a:t>双平台</a:t>
+            </a:r>
+          </a:p>
+          <a:p>
+            <a:pPr>
+              <a:spcAft>
+                <a:spcPts val="400"/>
+              </a:spcAft>
+              <a:defRPr sz="1400">
+                <a:solidFill>
+                  <a:srgbClr val="1F2937"/>
+                </a:solidFill>
+              </a:defRPr>
+            </a:pPr>
+            <a:r>
+              <a:t>Web: Flask + Streamlit</a:t>
+            </a:r>
+          </a:p>
+          <a:p>
+            <a:pPr>
+              <a:spcAft>
+                <a:spcPts val="400"/>
+              </a:spcAft>
+              <a:defRPr sz="1400">
+                <a:solidFill>
+                  <a:srgbClr val="1F2937"/>
+                </a:solidFill>
+              </a:defRPr>
+            </a:pPr>
+            <a:r>
+              <a:t>Android: Kotlin + Compose</a:t>
+            </a:r>
+          </a:p>
+          <a:p>
+            <a:pPr>
+              <a:spcAft>
+                <a:spcPts val="400"/>
+              </a:spcAft>
+              <a:defRPr sz="1400">
+                <a:solidFill>
+                  <a:srgbClr val="1F2937"/>
+                </a:solidFill>
+              </a:defRPr>
+            </a:pPr>
+            <a:r>
+              <a:t>Android 完全本地推理</a:t>
+            </a:r>
+          </a:p>
+          <a:p>
+            <a:pPr>
+              <a:spcAft>
+                <a:spcPts val="400"/>
+              </a:spcAft>
+              <a:defRPr sz="1400">
+                <a:solidFill>
+                  <a:srgbClr val="1F2937"/>
+                </a:solidFill>
+              </a:defRPr>
+            </a:pPr>
+            <a:r>
+              <a:t>PyTorch Mobile · 离线可用</a:t>
+            </a:r>
+          </a:p>
+        </p:txBody>
+      </p:sp>
+      <p:sp>
+        <p:nvSpPr>
+          <p:cNvPr id="8" name="Rectangle 7"/>
+          <p:cNvSpPr/>
           <p:nvPr/>
         </p:nvSpPr>
         <p:spPr>
           <a:xfrm>
-            <a:off x="5669280" y="2468880"/>
-            <a:ext cx="914400" cy="274320"/>
+            <a:off x="4206240" y="3931920"/>
+            <a:ext cx="7223760" cy="2560320"/>
           </a:xfrm>
           <a:prstGeom prst="rect">
             <a:avLst/>
           </a:prstGeom>
-          <a:noFill/>
+          <a:solidFill>
+            <a:srgbClr val="FFFFFF"/>
+          </a:solidFill>
+          <a:ln w="12700">
+            <a:solidFill>
+              <a:srgbClr val="E5E7EB"/>
+            </a:solidFill>
+          </a:ln>
         </p:spPr>
-        <p:txBody>
-          <a:bodyPr wrap="none">
-            <a:spAutoFit/>
-          </a:bodyPr>
+        <p:style>
+          <a:lnRef idx="1">
+            <a:schemeClr val="accent1"/>
+          </a:lnRef>
+          <a:fillRef idx="3">
+            <a:schemeClr val="accent1"/>
+          </a:fillRef>
+          <a:effectRef idx="2">
+            <a:schemeClr val="accent1"/>
+          </a:effectRef>
+          <a:fontRef idx="minor">
+            <a:schemeClr val="lt1"/>
+          </a:fontRef>
+        </p:style>
+        <p:txBody>
+          <a:bodyPr rtlCol="0" anchor="ctr" wrap="square" lIns="274320" rIns="274320" tIns="182880"/>
           <a:lstStyle/>
           <a:p>
             <a:pPr algn="ctr">
-              <a:defRPr sz="1600">
-                <a:solidFill>
-                  <a:srgbClr val="6B7280"/>
-                </a:solidFill>
-              </a:defRPr>
-            </a:pPr>
-            <a:r>
-              <a:t>▼</a:t>
-            </a:r>
-          </a:p>
-        </p:txBody>
-      </p:sp>
-      <p:sp>
-        <p:nvSpPr>
-          <p:cNvPr id="9" name="TextBox 8"/>
-          <p:cNvSpPr txBox="1"/>
-          <p:nvPr/>
-        </p:nvSpPr>
-        <p:spPr>
-          <a:xfrm>
-            <a:off x="5669280" y="3703320"/>
-            <a:ext cx="914400" cy="274320"/>
-          </a:xfrm>
-          <a:prstGeom prst="rect">
-            <a:avLst/>
-          </a:prstGeom>
-          <a:noFill/>
-        </p:spPr>
-        <p:txBody>
-          <a:bodyPr wrap="none">
-            <a:spAutoFit/>
-          </a:bodyPr>
-          <a:lstStyle/>
-          <a:p>
-            <a:pPr algn="ctr">
-              <a:defRPr sz="1600">
-                <a:solidFill>
-                  <a:srgbClr val="6B7280"/>
-                </a:solidFill>
-              </a:defRPr>
-            </a:pPr>
-            <a:r>
-              <a:t>▼</a:t>
-            </a:r>
-          </a:p>
-        </p:txBody>
-      </p:sp>
-      <p:sp>
-        <p:nvSpPr>
-          <p:cNvPr id="10" name="TextBox 9"/>
-          <p:cNvSpPr txBox="1"/>
-          <p:nvPr/>
-        </p:nvSpPr>
-        <p:spPr>
-          <a:xfrm>
-            <a:off x="5669280" y="4937760"/>
-            <a:ext cx="914400" cy="274320"/>
-          </a:xfrm>
-          <a:prstGeom prst="rect">
-            <a:avLst/>
-          </a:prstGeom>
-          <a:noFill/>
-        </p:spPr>
-        <p:txBody>
-          <a:bodyPr wrap="none">
-            <a:spAutoFit/>
-          </a:bodyPr>
-          <a:lstStyle/>
-          <a:p>
-            <a:pPr algn="ctr">
-              <a:defRPr sz="1600">
-                <a:solidFill>
-                  <a:srgbClr val="6B7280"/>
-                </a:solidFill>
-              </a:defRPr>
-            </a:pPr>
-            <a:r>
-              <a:t>▼</a:t>
+              <a:defRPr sz="1800" b="1">
+                <a:solidFill>
+                  <a:srgbClr val="1F3864"/>
+                </a:solidFill>
+              </a:defRPr>
+            </a:pPr>
+            <a:r>
+              <a:t>核心技术栈</a:t>
+            </a:r>
+          </a:p>
+          <a:p>
+            <a:pPr>
+              <a:spcAft>
+                <a:spcPts val="400"/>
+              </a:spcAft>
+              <a:defRPr sz="1400">
+                <a:solidFill>
+                  <a:srgbClr val="1F2937"/>
+                </a:solidFill>
+              </a:defRPr>
+            </a:pPr>
+            <a:r>
+              <a:t>Python / Kotlin    |    BERT 双模型    |    MSE + AdamW + fp16</a:t>
+            </a:r>
+          </a:p>
+          <a:p>
+            <a:pPr>
+              <a:spcAft>
+                <a:spcPts val="400"/>
+              </a:spcAft>
+              <a:defRPr sz="1400">
+                <a:solidFill>
+                  <a:srgbClr val="1F2937"/>
+                </a:solidFill>
+              </a:defRPr>
+            </a:pPr>
+            <a:r>
+              <a:t>Flask REST API    |    Streamlit + Plotly    |    Jetpack Compose + Canvas</a:t>
+            </a:r>
+          </a:p>
+          <a:p>
+            <a:pPr>
+              <a:spcAft>
+                <a:spcPts val="400"/>
+              </a:spcAft>
+              <a:defRPr sz="1400">
+                <a:solidFill>
+                  <a:srgbClr val="1F2937"/>
+                </a:solidFill>
+              </a:defRPr>
+            </a:pPr>
+            <a:r>
+              <a:t>PyTorch Mobile Lite    |    Kotlin WordPiece 分词器    |    pytest + Playwright</a:t>
             </a:r>
           </a:p>
         </p:txBody>
@@ -5825,7 +6201,7 @@
             <a:avLst/>
           </a:prstGeom>
           <a:solidFill>
-            <a:srgbClr val="6366F1"/>
+            <a:srgbClr val="1F3864"/>
           </a:solidFill>
           <a:ln>
             <a:noFill/>
@@ -5849,7 +6225,7 @@
           <a:bodyPr rtlCol="0" anchor="ctr" wrap="square" lIns="731520" tIns="274320"/>
           <a:lstStyle/>
           <a:p>
-            <a:pPr algn="l">
+            <a:pPr algn="ctr">
               <a:defRPr sz="3200" b="1">
                 <a:solidFill>
                   <a:srgbClr val="FFFFFF"/>
@@ -5857,11 +6233,11 @@
               </a:defRPr>
             </a:pPr>
             <a:r>
-              <a:t>模型架构</a:t>
-            </a:r>
-          </a:p>
-          <a:p>
-            <a:pPr algn="l">
+              <a:t>系统架构</a:t>
+            </a:r>
+          </a:p>
+          <a:p>
+            <a:pPr>
               <a:defRPr sz="1600">
                 <a:solidFill>
                   <a:srgbClr val="D1D5DB"/>
@@ -5869,7 +6245,7 @@
               </a:defRPr>
             </a:pPr>
             <a:r>
-              <a:t>BERT + 回归头</a:t>
+              <a:t>分层设计 · Web + Android 双端共享模型</a:t>
             </a:r>
           </a:p>
         </p:txBody>
@@ -5904,7 +6280,7 @@
               </a:defRPr>
             </a:pPr>
             <a:r>
-              <a:t>AES 自动文本评分系统 | 工程实践项目答辩</a:t>
+              <a:t>AES 中英文双语作文评分系统  |  工程实践项目答辩  |  苏州 · 2026</a:t>
             </a:r>
           </a:p>
         </p:txBody>
@@ -5917,8 +6293,8 @@
         </p:nvSpPr>
         <p:spPr>
           <a:xfrm>
-            <a:off x="731520" y="1371600"/>
-            <a:ext cx="5029200" cy="2743200"/>
+            <a:off x="731520" y="1280160"/>
+            <a:ext cx="5029200" cy="5029200"/>
           </a:xfrm>
           <a:prstGeom prst="rect">
             <a:avLst/>
@@ -5942,7 +6318,7 @@
               </a:defRPr>
             </a:pPr>
             <a:r>
-              <a:t>🧠 英文模型：BERT-base-uncased</a:t>
+              <a:t>▸ 数据层</a:t>
             </a:r>
           </a:p>
           <a:p>
@@ -5957,7 +6333,7 @@
               </a:defRPr>
             </a:pPr>
             <a:r>
-              <a:t>• 12 层 Transformer，110M 参数，768 维隐藏层</a:t>
+              <a:t>    ASAP 英文 12,979 篇 + Google 翻译中文 3,950 篇</a:t>
             </a:r>
           </a:p>
           <a:p>
@@ -5972,7 +6348,7 @@
               </a:defRPr>
             </a:pPr>
             <a:r>
-              <a:t>• 输入：英文文本 → BERT Tokenizer → [CLS] 向量</a:t>
+              <a:t>    按 essay_set 级 Prompt 隔离划分训练/测试集</a:t>
             </a:r>
           </a:p>
           <a:p>
@@ -5986,9 +6362,6 @@
                 </a:solidFill>
               </a:defRPr>
             </a:pPr>
-            <a:r>
-              <a:t>• 输出：Dropout(0.1) → Linear → Sigmoid → [0,1]</a:t>
-            </a:r>
           </a:p>
           <a:p>
             <a:pPr>
@@ -6002,7 +6375,7 @@
               </a:defRPr>
             </a:pPr>
             <a:r>
-              <a:t>• 训练：ASAP 12,976 篇，fp16，5 epoch</a:t>
+              <a:t>▸ 模型层</a:t>
             </a:r>
           </a:p>
           <a:p>
@@ -6016,6 +6389,9 @@
                 </a:solidFill>
               </a:defRPr>
             </a:pPr>
+            <a:r>
+              <a:t>    BERT-base-uncased (EN) + BERT-base-chinese (ZH)</a:t>
+            </a:r>
           </a:p>
           <a:p>
             <a:pPr>
@@ -6029,7 +6405,7 @@
               </a:defRPr>
             </a:pPr>
             <a:r>
-              <a:t>🇨🇳 中文模型：BERT-base-chinese</a:t>
+              <a:t>    [CLS] → Dropout → Linear → Sigmoid → [0,1]</a:t>
             </a:r>
           </a:p>
           <a:p>
@@ -6044,7 +6420,7 @@
               </a:defRPr>
             </a:pPr>
             <a:r>
-              <a:t>• 同架构，21128 中文词表</a:t>
+              <a:t>    多任务变体：DeBERTa + 4 回归头（已实现）</a:t>
             </a:r>
           </a:p>
           <a:p>
@@ -6058,9 +6434,6 @@
                 </a:solidFill>
               </a:defRPr>
             </a:pPr>
-            <a:r>
-              <a:t>• 预处理：全半角转换 → jieba 分词 → BERT Tokenizer</a:t>
-            </a:r>
           </a:p>
           <a:p>
             <a:pPr>
@@ -6074,7 +6447,94 @@
               </a:defRPr>
             </a:pPr>
             <a:r>
-              <a:t>• 训练：翻译数据 3,950 篇，5 epoch</a:t>
+              <a:t>▸ 推理引擎层</a:t>
+            </a:r>
+          </a:p>
+          <a:p>
+            <a:pPr>
+              <a:spcAft>
+                <a:spcPts val="800"/>
+              </a:spcAft>
+              <a:defRPr sz="1600">
+                <a:solidFill>
+                  <a:srgbClr val="1F2937"/>
+                </a:solidFill>
+              </a:defRPr>
+            </a:pPr>
+            <a:r>
+              <a:t>    语言检测 → 分词 → 模型路由 → 推理 → 反馈</a:t>
+            </a:r>
+          </a:p>
+          <a:p>
+            <a:pPr>
+              <a:spcAft>
+                <a:spcPts val="800"/>
+              </a:spcAft>
+              <a:defRPr sz="1600">
+                <a:solidFill>
+                  <a:srgbClr val="1F2937"/>
+                </a:solidFill>
+              </a:defRPr>
+            </a:pPr>
+            <a:r>
+              <a:t>    Android: Kotlin 全自主实现（零 NLP 库依赖）</a:t>
+            </a:r>
+          </a:p>
+          <a:p>
+            <a:pPr>
+              <a:spcAft>
+                <a:spcPts val="800"/>
+              </a:spcAft>
+              <a:defRPr sz="1600">
+                <a:solidFill>
+                  <a:srgbClr val="1F2937"/>
+                </a:solidFill>
+              </a:defRPr>
+            </a:pPr>
+          </a:p>
+          <a:p>
+            <a:pPr>
+              <a:spcAft>
+                <a:spcPts val="800"/>
+              </a:spcAft>
+              <a:defRPr sz="1600">
+                <a:solidFill>
+                  <a:srgbClr val="1F2937"/>
+                </a:solidFill>
+              </a:defRPr>
+            </a:pPr>
+            <a:r>
+              <a:t>▸ 应用层</a:t>
+            </a:r>
+          </a:p>
+          <a:p>
+            <a:pPr>
+              <a:spcAft>
+                <a:spcPts val="800"/>
+              </a:spcAft>
+              <a:defRPr sz="1600">
+                <a:solidFill>
+                  <a:srgbClr val="1F2937"/>
+                </a:solidFill>
+              </a:defRPr>
+            </a:pPr>
+            <a:r>
+              <a:t>    Web: Flask API + Streamlit UI (4 页面)</a:t>
+            </a:r>
+          </a:p>
+          <a:p>
+            <a:pPr>
+              <a:spcAft>
+                <a:spcPts val="800"/>
+              </a:spcAft>
+              <a:defRPr sz="1600">
+                <a:solidFill>
+                  <a:srgbClr val="1F2937"/>
+                </a:solidFill>
+              </a:defRPr>
+            </a:pPr>
+            <a:r>
+              <a:t>    Android: Compose + Bottom Nav (4 Tab)</a:t>
             </a:r>
           </a:p>
         </p:txBody>
@@ -6087,8 +6547,8 @@
         </p:nvSpPr>
         <p:spPr>
           <a:xfrm>
-            <a:off x="6858000" y="1371600"/>
-            <a:ext cx="4572000" cy="2286000"/>
+            <a:off x="6675120" y="1371600"/>
+            <a:ext cx="4754880" cy="777240"/>
           </a:xfrm>
           <a:prstGeom prst="rect">
             <a:avLst/>
@@ -6096,9 +6556,9 @@
           <a:solidFill>
             <a:srgbClr val="FFFFFF"/>
           </a:solidFill>
-          <a:ln w="12700">
+          <a:ln w="25400">
             <a:solidFill>
-              <a:srgbClr val="E5E7EB"/>
+              <a:srgbClr val="6366F1"/>
             </a:solidFill>
           </a:ln>
         </p:spPr>
@@ -6117,63 +6577,30 @@
           </a:fontRef>
         </p:style>
         <p:txBody>
-          <a:bodyPr rtlCol="0" anchor="ctr" wrap="square" lIns="274320" rIns="274320" tIns="182880"/>
+          <a:bodyPr rtlCol="0" anchor="ctr" lIns="274320" tIns="91440"/>
           <a:lstStyle/>
           <a:p>
             <a:pPr algn="ctr">
-              <a:defRPr sz="1800" b="1">
+              <a:defRPr sz="1600" b="1">
                 <a:solidFill>
                   <a:srgbClr val="6366F1"/>
                 </a:solidFill>
               </a:defRPr>
             </a:pPr>
             <a:r>
-              <a:t>📊 模型表现</a:t>
-            </a:r>
-          </a:p>
-          <a:p>
-            <a:pPr>
-              <a:spcAft>
-                <a:spcPts val="400"/>
-              </a:spcAft>
-              <a:defRPr sz="1400">
-                <a:solidFill>
-                  <a:srgbClr val="1F2937"/>
-                </a:solidFill>
-              </a:defRPr>
-            </a:pPr>
-            <a:r>
-              <a:t>英文 BERT: Val QWK 0.58 (prompt隔离)</a:t>
-            </a:r>
-          </a:p>
-          <a:p>
-            <a:pPr>
-              <a:spcAft>
-                <a:spcPts val="400"/>
-              </a:spcAft>
-              <a:defRPr sz="1400">
-                <a:solidFill>
-                  <a:srgbClr val="1F2937"/>
-                </a:solidFill>
-              </a:defRPr>
-            </a:pPr>
-            <a:r>
-              <a:t>中文 BERT: Val QWK 0.79, Test 0.76</a:t>
-            </a:r>
-          </a:p>
-          <a:p>
-            <a:pPr>
-              <a:spcAft>
-                <a:spcPts val="400"/>
-              </a:spcAft>
-              <a:defRPr sz="1400">
-                <a:solidFill>
-                  <a:srgbClr val="1F2937"/>
-                </a:solidFill>
-              </a:defRPr>
-            </a:pPr>
-            <a:r>
-              <a:t>RoBERTa-base 备选模型已训练</a:t>
+              <a:t>Web 版</a:t>
+            </a:r>
+          </a:p>
+          <a:p>
+            <a:pPr>
+              <a:defRPr sz="1200">
+                <a:solidFill>
+                  <a:srgbClr val="6B7280"/>
+                </a:solidFill>
+              </a:defRPr>
+            </a:pPr>
+            <a:r>
+              <a:t>Flask API → GPU 推理 → ~200ms/篇</a:t>
             </a:r>
           </a:p>
         </p:txBody>
@@ -6186,8 +6613,8 @@
         </p:nvSpPr>
         <p:spPr>
           <a:xfrm>
-            <a:off x="6858000" y="3931920"/>
-            <a:ext cx="4572000" cy="2560320"/>
+            <a:off x="6675120" y="2377440"/>
+            <a:ext cx="4754880" cy="777240"/>
           </a:xfrm>
           <a:prstGeom prst="rect">
             <a:avLst/>
@@ -6195,9 +6622,9 @@
           <a:solidFill>
             <a:srgbClr val="FFFFFF"/>
           </a:solidFill>
-          <a:ln w="12700">
+          <a:ln w="25400">
             <a:solidFill>
-              <a:srgbClr val="E5E7EB"/>
+              <a:srgbClr val="10B981"/>
             </a:solidFill>
           </a:ln>
         </p:spPr>
@@ -6216,78 +6643,179 @@
           </a:fontRef>
         </p:style>
         <p:txBody>
-          <a:bodyPr rtlCol="0" anchor="ctr" wrap="square" lIns="274320" rIns="274320" tIns="182880"/>
+          <a:bodyPr rtlCol="0" anchor="ctr" lIns="274320" tIns="91440"/>
           <a:lstStyle/>
           <a:p>
             <a:pPr algn="ctr">
-              <a:defRPr sz="1800" b="1">
+              <a:defRPr sz="1600" b="1">
+                <a:solidFill>
+                  <a:srgbClr val="10B981"/>
+                </a:solidFill>
+              </a:defRPr>
+            </a:pPr>
+            <a:r>
+              <a:t>Android 版</a:t>
+            </a:r>
+          </a:p>
+          <a:p>
+            <a:pPr>
+              <a:defRPr sz="1200">
+                <a:solidFill>
+                  <a:srgbClr val="6B7280"/>
+                </a:solidFill>
+              </a:defRPr>
+            </a:pPr>
+            <a:r>
+              <a:t>PyTorch Mobile → CPU 推理 → ~1-5s/篇</a:t>
+            </a:r>
+          </a:p>
+        </p:txBody>
+      </p:sp>
+      <p:sp>
+        <p:nvSpPr>
+          <p:cNvPr id="7" name="Rectangle 6"/>
+          <p:cNvSpPr/>
+          <p:nvPr/>
+        </p:nvSpPr>
+        <p:spPr>
+          <a:xfrm>
+            <a:off x="6675120" y="3383280"/>
+            <a:ext cx="4754880" cy="777240"/>
+          </a:xfrm>
+          <a:prstGeom prst="rect">
+            <a:avLst/>
+          </a:prstGeom>
+          <a:solidFill>
+            <a:srgbClr val="FFFFFF"/>
+          </a:solidFill>
+          <a:ln w="25400">
+            <a:solidFill>
+              <a:srgbClr val="F59E0B"/>
+            </a:solidFill>
+          </a:ln>
+        </p:spPr>
+        <p:style>
+          <a:lnRef idx="1">
+            <a:schemeClr val="accent1"/>
+          </a:lnRef>
+          <a:fillRef idx="3">
+            <a:schemeClr val="accent1"/>
+          </a:fillRef>
+          <a:effectRef idx="2">
+            <a:schemeClr val="accent1"/>
+          </a:effectRef>
+          <a:fontRef idx="minor">
+            <a:schemeClr val="lt1"/>
+          </a:fontRef>
+        </p:style>
+        <p:txBody>
+          <a:bodyPr rtlCol="0" anchor="ctr" lIns="274320" tIns="91440"/>
+          <a:lstStyle/>
+          <a:p>
+            <a:pPr algn="ctr">
+              <a:defRPr sz="1600" b="1">
                 <a:solidFill>
                   <a:srgbClr val="F59E0B"/>
                 </a:solidFill>
               </a:defRPr>
             </a:pPr>
             <a:r>
-              <a:t>🔮 多任务扩展（已设计）</a:t>
-            </a:r>
-          </a:p>
-          <a:p>
-            <a:pPr>
-              <a:spcAft>
-                <a:spcPts val="400"/>
-              </a:spcAft>
-              <a:defRPr sz="1400">
-                <a:solidFill>
-                  <a:srgbClr val="1F2937"/>
-                </a:solidFill>
-              </a:defRPr>
-            </a:pPr>
-            <a:r>
-              <a:t>共享编码器 + 4 个独立回归头</a:t>
-            </a:r>
-          </a:p>
-          <a:p>
-            <a:pPr>
-              <a:spcAft>
-                <a:spcPts val="400"/>
-              </a:spcAft>
-              <a:defRPr sz="1400">
-                <a:solidFill>
-                  <a:srgbClr val="1F2937"/>
-                </a:solidFill>
-              </a:defRPr>
-            </a:pPr>
-            <a:r>
-              <a:t>Head 0: 总评分 | Head 1: 内容</a:t>
-            </a:r>
-          </a:p>
-          <a:p>
-            <a:pPr>
-              <a:spcAft>
-                <a:spcPts val="400"/>
-              </a:spcAft>
-              <a:defRPr sz="1400">
-                <a:solidFill>
-                  <a:srgbClr val="1F2937"/>
-                </a:solidFill>
-              </a:defRPr>
-            </a:pPr>
-            <a:r>
-              <a:t>Head 2: 结构 | Head 3: 语言</a:t>
-            </a:r>
-          </a:p>
-          <a:p>
-            <a:pPr>
-              <a:spcAft>
-                <a:spcPts val="400"/>
-              </a:spcAft>
-              <a:defRPr sz="1400">
-                <a:solidFill>
-                  <a:srgbClr val="1F2937"/>
-                </a:solidFill>
-              </a:defRPr>
-            </a:pPr>
-            <a:r>
-              <a:t>当前版本：启发式拆分近似实现</a:t>
+              <a:t>共 享</a:t>
+            </a:r>
+          </a:p>
+          <a:p>
+            <a:pPr>
+              <a:defRPr sz="1200">
+                <a:solidFill>
+                  <a:srgbClr val="6B7280"/>
+                </a:solidFill>
+              </a:defRPr>
+            </a:pPr>
+            <a:r>
+              <a:t>同一套 .pt 模型权重，双平台部署</a:t>
+            </a:r>
+          </a:p>
+        </p:txBody>
+      </p:sp>
+      <p:sp>
+        <p:nvSpPr>
+          <p:cNvPr id="8" name="TextBox 7"/>
+          <p:cNvSpPr txBox="1"/>
+          <p:nvPr/>
+        </p:nvSpPr>
+        <p:spPr>
+          <a:xfrm>
+            <a:off x="6675120" y="4297680"/>
+            <a:ext cx="4754880" cy="2286000"/>
+          </a:xfrm>
+          <a:prstGeom prst="rect">
+            <a:avLst/>
+          </a:prstGeom>
+          <a:noFill/>
+        </p:spPr>
+        <p:txBody>
+          <a:bodyPr wrap="square">
+            <a:spAutoFit/>
+          </a:bodyPr>
+          <a:lstStyle/>
+          <a:p>
+            <a:pPr>
+              <a:spcAft>
+                <a:spcPts val="800"/>
+              </a:spcAft>
+              <a:defRPr sz="1300">
+                <a:solidFill>
+                  <a:srgbClr val="1F2937"/>
+                </a:solidFill>
+              </a:defRPr>
+            </a:pPr>
+            <a:r>
+              <a:t>  Web: 分词 HuggingFace / 语言 langdetect</a:t>
+            </a:r>
+          </a:p>
+          <a:p>
+            <a:pPr>
+              <a:spcAft>
+                <a:spcPts val="800"/>
+              </a:spcAft>
+              <a:defRPr sz="1300">
+                <a:solidFill>
+                  <a:srgbClr val="1F2937"/>
+                </a:solidFill>
+              </a:defRPr>
+            </a:pPr>
+            <a:r>
+              <a:t>  Android: 分词 Kotlin 自实现 / 语言字符规则</a:t>
+            </a:r>
+          </a:p>
+          <a:p>
+            <a:pPr>
+              <a:spcAft>
+                <a:spcPts val="800"/>
+              </a:spcAft>
+              <a:defRPr sz="1300">
+                <a:solidFill>
+                  <a:srgbClr val="1F2937"/>
+                </a:solidFill>
+              </a:defRPr>
+            </a:pPr>
+            <a:r>
+              <a:t>  Web: GPU fp16 / Android: CPU fp32</a:t>
+            </a:r>
+          </a:p>
+          <a:p>
+            <a:pPr>
+              <a:spcAft>
+                <a:spcPts val="800"/>
+              </a:spcAft>
+              <a:defRPr sz="1300">
+                <a:solidFill>
+                  <a:srgbClr val="1F2937"/>
+                </a:solidFill>
+              </a:defRPr>
+            </a:pPr>
+            <a:r>
+              <a:t>  Web: 需要网络 / Android: 完全离线</a:t>
             </a:r>
           </a:p>
         </p:txBody>
@@ -6333,7 +6861,7 @@
             <a:avLst/>
           </a:prstGeom>
           <a:solidFill>
-            <a:srgbClr val="6366F1"/>
+            <a:srgbClr val="1F3864"/>
           </a:solidFill>
           <a:ln>
             <a:noFill/>
@@ -6357,7 +6885,7 @@
           <a:bodyPr rtlCol="0" anchor="ctr" wrap="square" lIns="731520" tIns="274320"/>
           <a:lstStyle/>
           <a:p>
-            <a:pPr algn="l">
+            <a:pPr algn="ctr">
               <a:defRPr sz="3200" b="1">
                 <a:solidFill>
                   <a:srgbClr val="FFFFFF"/>
@@ -6365,7 +6893,19 @@
               </a:defRPr>
             </a:pPr>
             <a:r>
-              <a:t>数据处理流水线</a:t>
+              <a:t>BERT 回归模型</a:t>
+            </a:r>
+          </a:p>
+          <a:p>
+            <a:pPr>
+              <a:defRPr sz="1600">
+                <a:solidFill>
+                  <a:srgbClr val="D1D5DB"/>
+                </a:solidFill>
+              </a:defRPr>
+            </a:pPr>
+            <a:r>
+              <a:t>[CLS] → Dropout → Linear → Sigmoid</a:t>
             </a:r>
           </a:p>
         </p:txBody>
@@ -6400,21 +6940,233 @@
               </a:defRPr>
             </a:pPr>
             <a:r>
-              <a:t>AES 自动文本评分系统 | 工程实践项目答辩</a:t>
-            </a:r>
-          </a:p>
-        </p:txBody>
-      </p:sp>
-      <p:sp>
-        <p:nvSpPr>
-          <p:cNvPr id="4" name="Rectangle 3"/>
-          <p:cNvSpPr/>
+              <a:t>AES 中英文双语作文评分系统  |  工程实践项目答辩  |  苏州 · 2026</a:t>
+            </a:r>
+          </a:p>
+        </p:txBody>
+      </p:sp>
+      <p:sp>
+        <p:nvSpPr>
+          <p:cNvPr id="4" name="TextBox 3"/>
+          <p:cNvSpPr txBox="1"/>
           <p:nvPr/>
         </p:nvSpPr>
         <p:spPr>
           <a:xfrm>
             <a:off x="731520" y="1371600"/>
-            <a:ext cx="5029200" cy="4754880"/>
+            <a:ext cx="5029200" cy="4572000"/>
+          </a:xfrm>
+          <a:prstGeom prst="rect">
+            <a:avLst/>
+          </a:prstGeom>
+          <a:noFill/>
+        </p:spPr>
+        <p:txBody>
+          <a:bodyPr wrap="square">
+            <a:spAutoFit/>
+          </a:bodyPr>
+          <a:lstStyle/>
+          <a:p>
+            <a:pPr>
+              <a:spcAft>
+                <a:spcPts val="800"/>
+              </a:spcAft>
+              <a:defRPr sz="1600">
+                <a:solidFill>
+                  <a:srgbClr val="1F2937"/>
+                </a:solidFill>
+              </a:defRPr>
+            </a:pPr>
+            <a:r>
+              <a:t>▸ 英文模型: bert-base-uncased</a:t>
+            </a:r>
+          </a:p>
+          <a:p>
+            <a:pPr>
+              <a:spcAft>
+                <a:spcPts val="800"/>
+              </a:spcAft>
+              <a:defRPr sz="1600">
+                <a:solidFill>
+                  <a:srgbClr val="1F2937"/>
+                </a:solidFill>
+              </a:defRPr>
+            </a:pPr>
+            <a:r>
+              <a:t>   12 层 Transformer, 768 维, 110M 参数</a:t>
+            </a:r>
+          </a:p>
+          <a:p>
+            <a:pPr>
+              <a:spcAft>
+                <a:spcPts val="800"/>
+              </a:spcAft>
+              <a:defRPr sz="1600">
+                <a:solidFill>
+                  <a:srgbClr val="1F2937"/>
+                </a:solidFill>
+              </a:defRPr>
+            </a:pPr>
+            <a:r>
+              <a:t>   WordPiece 词表 30,522 tokens</a:t>
+            </a:r>
+          </a:p>
+          <a:p>
+            <a:pPr>
+              <a:spcAft>
+                <a:spcPts val="800"/>
+              </a:spcAft>
+              <a:defRPr sz="1600">
+                <a:solidFill>
+                  <a:srgbClr val="1F2937"/>
+                </a:solidFill>
+              </a:defRPr>
+            </a:pPr>
+            <a:r>
+              <a:t>   fp16 混合精度训练, batch_size=16</a:t>
+            </a:r>
+          </a:p>
+          <a:p>
+            <a:pPr>
+              <a:spcAft>
+                <a:spcPts val="800"/>
+              </a:spcAft>
+              <a:defRPr sz="1600">
+                <a:solidFill>
+                  <a:srgbClr val="1F2937"/>
+                </a:solidFill>
+              </a:defRPr>
+            </a:pPr>
+          </a:p>
+          <a:p>
+            <a:pPr>
+              <a:spcAft>
+                <a:spcPts val="800"/>
+              </a:spcAft>
+              <a:defRPr sz="1600">
+                <a:solidFill>
+                  <a:srgbClr val="1F2937"/>
+                </a:solidFill>
+              </a:defRPr>
+            </a:pPr>
+            <a:r>
+              <a:t>▸ 中文模型: bert-base-chinese</a:t>
+            </a:r>
+          </a:p>
+          <a:p>
+            <a:pPr>
+              <a:spcAft>
+                <a:spcPts val="800"/>
+              </a:spcAft>
+              <a:defRPr sz="1600">
+                <a:solidFill>
+                  <a:srgbClr val="1F2937"/>
+                </a:solidFill>
+              </a:defRPr>
+            </a:pPr>
+            <a:r>
+              <a:t>   同架构, 词表 21,128 tokens</a:t>
+            </a:r>
+          </a:p>
+          <a:p>
+            <a:pPr>
+              <a:spcAft>
+                <a:spcPts val="800"/>
+              </a:spcAft>
+              <a:defRPr sz="1600">
+                <a:solidFill>
+                  <a:srgbClr val="1F2937"/>
+                </a:solidFill>
+              </a:defRPr>
+            </a:pPr>
+            <a:r>
+              <a:t>   jieba 预分词 + 全角转半角</a:t>
+            </a:r>
+          </a:p>
+          <a:p>
+            <a:pPr>
+              <a:spcAft>
+                <a:spcPts val="800"/>
+              </a:spcAft>
+              <a:defRPr sz="1600">
+                <a:solidFill>
+                  <a:srgbClr val="1F2937"/>
+                </a:solidFill>
+              </a:defRPr>
+            </a:pPr>
+            <a:r>
+              <a:t>   翻译数据 3,950 篇, batch_size=8</a:t>
+            </a:r>
+          </a:p>
+          <a:p>
+            <a:pPr>
+              <a:spcAft>
+                <a:spcPts val="800"/>
+              </a:spcAft>
+              <a:defRPr sz="1600">
+                <a:solidFill>
+                  <a:srgbClr val="1F2937"/>
+                </a:solidFill>
+              </a:defRPr>
+            </a:pPr>
+          </a:p>
+          <a:p>
+            <a:pPr>
+              <a:spcAft>
+                <a:spcPts val="800"/>
+              </a:spcAft>
+              <a:defRPr sz="1600">
+                <a:solidFill>
+                  <a:srgbClr val="1F2937"/>
+                </a:solidFill>
+              </a:defRPr>
+            </a:pPr>
+            <a:r>
+              <a:t>▸ 训练配置</a:t>
+            </a:r>
+          </a:p>
+          <a:p>
+            <a:pPr>
+              <a:spcAft>
+                <a:spcPts val="800"/>
+              </a:spcAft>
+              <a:defRPr sz="1600">
+                <a:solidFill>
+                  <a:srgbClr val="1F2937"/>
+                </a:solidFill>
+              </a:defRPr>
+            </a:pPr>
+            <a:r>
+              <a:t>   AdamW lr=2e-5 | Warmup 10% | 早停 patience=3</a:t>
+            </a:r>
+          </a:p>
+          <a:p>
+            <a:pPr>
+              <a:spcAft>
+                <a:spcPts val="800"/>
+              </a:spcAft>
+              <a:defRPr sz="1600">
+                <a:solidFill>
+                  <a:srgbClr val="1F2937"/>
+                </a:solidFill>
+              </a:defRPr>
+            </a:pPr>
+            <a:r>
+              <a:t>   MSE Loss | 5 epochs | English fp16, Chinese fp32</a:t>
+            </a:r>
+          </a:p>
+        </p:txBody>
+      </p:sp>
+      <p:sp>
+        <p:nvSpPr>
+          <p:cNvPr id="5" name="Rectangle 4"/>
+          <p:cNvSpPr/>
+          <p:nvPr/>
+        </p:nvSpPr>
+        <p:spPr>
+          <a:xfrm>
+            <a:off x="6858000" y="1371600"/>
+            <a:ext cx="4572000" cy="2286000"/>
           </a:xfrm>
           <a:prstGeom prst="rect">
             <a:avLst/>
@@ -6454,111 +7206,108 @@
               </a:defRPr>
             </a:pPr>
             <a:r>
-              <a:t>🇬🇧 英文数据处理</a:t>
-            </a:r>
-          </a:p>
-          <a:p>
-            <a:pPr>
-              <a:spcAft>
-                <a:spcPts val="400"/>
-              </a:spcAft>
-              <a:defRPr sz="1400">
-                <a:solidFill>
-                  <a:srgbClr val="1F2937"/>
-                </a:solidFill>
-              </a:defRPr>
-            </a:pPr>
-            <a:r>
-              <a:t>① ASAP 原始 CSV (12,976 篇)</a:t>
-            </a:r>
-          </a:p>
-          <a:p>
-            <a:pPr>
-              <a:spcAft>
-                <a:spcPts val="400"/>
-              </a:spcAft>
-              <a:defRPr sz="1400">
-                <a:solidFill>
-                  <a:srgbClr val="1F2937"/>
-                </a:solidFill>
-              </a:defRPr>
-            </a:pPr>
-            <a:r>
-              <a:t>② 文本清洗: HTML unescape / URL移除 / 空白规范</a:t>
-            </a:r>
-          </a:p>
-          <a:p>
-            <a:pPr>
-              <a:spcAft>
-                <a:spcPts val="400"/>
-              </a:spcAft>
-              <a:defRPr sz="1400">
-                <a:solidFill>
-                  <a:srgbClr val="1F2937"/>
-                </a:solidFill>
-              </a:defRPr>
-            </a:pPr>
-            <a:r>
-              <a:t>③ 按 essay_set 归一化分数 (min-max → [0,1])</a:t>
-            </a:r>
-          </a:p>
-          <a:p>
-            <a:pPr>
-              <a:spcAft>
-                <a:spcPts val="400"/>
-              </a:spcAft>
-              <a:defRPr sz="1400">
-                <a:solidFill>
-                  <a:srgbClr val="1F2937"/>
-                </a:solidFill>
-              </a:defRPr>
-            </a:pPr>
-            <a:r>
-              <a:t>④ BERT 分词 (max_length=512)</a:t>
-            </a:r>
-          </a:p>
-          <a:p>
-            <a:pPr>
-              <a:spcAft>
-                <a:spcPts val="400"/>
-              </a:spcAft>
-              <a:defRPr sz="1400">
-                <a:solidFill>
-                  <a:srgbClr val="1F2937"/>
-                </a:solidFill>
-              </a:defRPr>
-            </a:pPr>
-            <a:r>
-              <a:t>⑤ Prompt 隔离划分 (train/val/test)</a:t>
-            </a:r>
-          </a:p>
-          <a:p>
-            <a:pPr>
-              <a:spcAft>
-                <a:spcPts val="400"/>
-              </a:spcAft>
-              <a:defRPr sz="1400">
-                <a:solidFill>
-                  <a:srgbClr val="1F2937"/>
-                </a:solidFill>
-              </a:defRPr>
-            </a:pPr>
-            <a:r>
-              <a:t>⑥ 5 折 GroupKFold 交叉验证</a:t>
-            </a:r>
-          </a:p>
-        </p:txBody>
-      </p:sp>
-      <p:sp>
-        <p:nvSpPr>
-          <p:cNvPr id="5" name="Rectangle 4"/>
+              <a:t>模型表现</a:t>
+            </a:r>
+          </a:p>
+          <a:p>
+            <a:pPr>
+              <a:spcAft>
+                <a:spcPts val="400"/>
+              </a:spcAft>
+              <a:defRPr sz="1400">
+                <a:solidFill>
+                  <a:srgbClr val="1F2937"/>
+                </a:solidFill>
+              </a:defRPr>
+            </a:pPr>
+            <a:r>
+              <a:t>BERT-base 英文: Val QWK 0.58</a:t>
+            </a:r>
+          </a:p>
+          <a:p>
+            <a:pPr>
+              <a:spcAft>
+                <a:spcPts val="400"/>
+              </a:spcAft>
+              <a:defRPr sz="1400">
+                <a:solidFill>
+                  <a:srgbClr val="1F2937"/>
+                </a:solidFill>
+              </a:defRPr>
+            </a:pPr>
+            <a:r>
+              <a:t>BERT-base 中文: Val QWK 0.79, Test 0.76</a:t>
+            </a:r>
+          </a:p>
+          <a:p>
+            <a:pPr>
+              <a:spcAft>
+                <a:spcPts val="400"/>
+              </a:spcAft>
+              <a:defRPr sz="1400">
+                <a:solidFill>
+                  <a:srgbClr val="1F2937"/>
+                </a:solidFill>
+              </a:defRPr>
+            </a:pPr>
+            <a:r>
+              <a:t>RoBERTa-base: Val QWK 0.58 (备选)</a:t>
+            </a:r>
+          </a:p>
+          <a:p>
+            <a:pPr>
+              <a:spcAft>
+                <a:spcPts val="400"/>
+              </a:spcAft>
+              <a:defRPr sz="1400">
+                <a:solidFill>
+                  <a:srgbClr val="1F2937"/>
+                </a:solidFill>
+              </a:defRPr>
+            </a:pPr>
+          </a:p>
+          <a:p>
+            <a:pPr>
+              <a:spcAft>
+                <a:spcPts val="400"/>
+              </a:spcAft>
+              <a:defRPr sz="1400">
+                <a:solidFill>
+                  <a:srgbClr val="1F2937"/>
+                </a:solidFill>
+              </a:defRPr>
+            </a:pPr>
+            <a:r>
+              <a:t>英文 QWK 低 = 严格的 Prompt 隔离评估</a:t>
+            </a:r>
+          </a:p>
+          <a:p>
+            <a:pPr>
+              <a:spcAft>
+                <a:spcPts val="400"/>
+              </a:spcAft>
+              <a:defRPr sz="1400">
+                <a:solidFill>
+                  <a:srgbClr val="1F2937"/>
+                </a:solidFill>
+              </a:defRPr>
+            </a:pPr>
+            <a:r>
+              <a:t>中文 QWK 高 = 翻译同源 + 随机划分</a:t>
+            </a:r>
+          </a:p>
+        </p:txBody>
+      </p:sp>
+      <p:sp>
+        <p:nvSpPr>
+          <p:cNvPr id="6" name="Rectangle 5"/>
           <p:cNvSpPr/>
           <p:nvPr/>
         </p:nvSpPr>
         <p:spPr>
           <a:xfrm>
-            <a:off x="6858000" y="1371600"/>
-            <a:ext cx="5029200" cy="4754880"/>
+            <a:off x="6858000" y="3931920"/>
+            <a:ext cx="4572000" cy="2560320"/>
           </a:xfrm>
           <a:prstGeom prst="rect">
             <a:avLst/>
@@ -6593,102 +7342,102 @@
             <a:pPr algn="ctr">
               <a:defRPr sz="1800" b="1">
                 <a:solidFill>
-                  <a:srgbClr val="10B981"/>
-                </a:solidFill>
-              </a:defRPr>
-            </a:pPr>
-            <a:r>
-              <a:t>🇨🇳 中文数据处理</a:t>
-            </a:r>
-          </a:p>
-          <a:p>
-            <a:pPr>
-              <a:spcAft>
-                <a:spcPts val="400"/>
-              </a:spcAft>
-              <a:defRPr sz="1400">
-                <a:solidFill>
-                  <a:srgbClr val="1F2937"/>
-                </a:solidFill>
-              </a:defRPr>
-            </a:pPr>
-            <a:r>
-              <a:t>① ASAP 英文 → Google Translate (3,950 篇)</a:t>
-            </a:r>
-          </a:p>
-          <a:p>
-            <a:pPr>
-              <a:spcAft>
-                <a:spcPts val="400"/>
-              </a:spcAft>
-              <a:defRPr sz="1400">
-                <a:solidFill>
-                  <a:srgbClr val="1F2937"/>
-                </a:solidFill>
-              </a:defRPr>
-            </a:pPr>
-            <a:r>
-              <a:t>② 中文清洗: 全角转半角 / 控制字符移除</a:t>
-            </a:r>
-          </a:p>
-          <a:p>
-            <a:pPr>
-              <a:spcAft>
-                <a:spcPts val="400"/>
-              </a:spcAft>
-              <a:defRPr sz="1400">
-                <a:solidFill>
-                  <a:srgbClr val="1F2937"/>
-                </a:solidFill>
-              </a:defRPr>
-            </a:pPr>
-            <a:r>
-              <a:t>③ jieba 分词 (词间加空格，适配 BERT)</a:t>
-            </a:r>
-          </a:p>
-          <a:p>
-            <a:pPr>
-              <a:spcAft>
-                <a:spcPts val="400"/>
-              </a:spcAft>
-              <a:defRPr sz="1400">
-                <a:solidFill>
-                  <a:srgbClr val="1F2937"/>
-                </a:solidFill>
-              </a:defRPr>
-            </a:pPr>
-            <a:r>
-              <a:t>④ 按 essay_set 归一化分数</a:t>
-            </a:r>
-          </a:p>
-          <a:p>
-            <a:pPr>
-              <a:spcAft>
-                <a:spcPts val="400"/>
-              </a:spcAft>
-              <a:defRPr sz="1400">
-                <a:solidFill>
-                  <a:srgbClr val="1F2937"/>
-                </a:solidFill>
-              </a:defRPr>
-            </a:pPr>
-            <a:r>
-              <a:t>⑤ BERT 分词 (bert-base-chinese)</a:t>
-            </a:r>
-          </a:p>
-          <a:p>
-            <a:pPr>
-              <a:spcAft>
-                <a:spcPts val="400"/>
-              </a:spcAft>
-              <a:defRPr sz="1400">
-                <a:solidFill>
-                  <a:srgbClr val="1F2937"/>
-                </a:solidFill>
-              </a:defRPr>
-            </a:pPr>
-            <a:r>
-              <a:t>⑥ 随机划分 (翻译数据同源，无需 prompt 隔离)</a:t>
+                  <a:srgbClr val="F59E0B"/>
+                </a:solidFill>
+              </a:defRPr>
+            </a:pPr>
+            <a:r>
+              <a:t>多任务扩展 (已实现)</a:t>
+            </a:r>
+          </a:p>
+          <a:p>
+            <a:pPr>
+              <a:spcAft>
+                <a:spcPts val="400"/>
+              </a:spcAft>
+              <a:defRPr sz="1400">
+                <a:solidFill>
+                  <a:srgbClr val="1F2937"/>
+                </a:solidFill>
+              </a:defRPr>
+            </a:pPr>
+            <a:r>
+              <a:t>DeBERTa-v3 + 4 个独立回归头</a:t>
+            </a:r>
+          </a:p>
+          <a:p>
+            <a:pPr>
+              <a:spcAft>
+                <a:spcPts val="400"/>
+              </a:spcAft>
+              <a:defRPr sz="1400">
+                <a:solidFill>
+                  <a:srgbClr val="1F2937"/>
+                </a:solidFill>
+              </a:defRPr>
+            </a:pPr>
+            <a:r>
+              <a:t>Head 0: 总评分    Head 2: 结构</a:t>
+            </a:r>
+          </a:p>
+          <a:p>
+            <a:pPr>
+              <a:spcAft>
+                <a:spcPts val="400"/>
+              </a:spcAft>
+              <a:defRPr sz="1400">
+                <a:solidFill>
+                  <a:srgbClr val="1F2937"/>
+                </a:solidFill>
+              </a:defRPr>
+            </a:pPr>
+            <a:r>
+              <a:t>Head 1: 内容       Head 3: 语言</a:t>
+            </a:r>
+          </a:p>
+          <a:p>
+            <a:pPr>
+              <a:spcAft>
+                <a:spcPts val="400"/>
+              </a:spcAft>
+              <a:defRPr sz="1400">
+                <a:solidFill>
+                  <a:srgbClr val="1F2937"/>
+                </a:solidFill>
+              </a:defRPr>
+            </a:pPr>
+            <a:r>
+              <a:t>训练策略: 总评分权重 1.0</a:t>
+            </a:r>
+          </a:p>
+          <a:p>
+            <a:pPr>
+              <a:spcAft>
+                <a:spcPts val="400"/>
+              </a:spcAft>
+              <a:defRPr sz="1400">
+                <a:solidFill>
+                  <a:srgbClr val="1F2937"/>
+                </a:solidFill>
+              </a:defRPr>
+            </a:pPr>
+            <a:r>
+              <a:t>         维度权重各 0.5</a:t>
+            </a:r>
+          </a:p>
+          <a:p>
+            <a:pPr>
+              <a:spcAft>
+                <a:spcPts val="400"/>
+              </a:spcAft>
+              <a:defRPr sz="1400">
+                <a:solidFill>
+                  <a:srgbClr val="1F2937"/>
+                </a:solidFill>
+              </a:defRPr>
+            </a:pPr>
+            <a:r>
+              <a:t>额外显存 &lt; 1MB, 待部署</a:t>
             </a:r>
           </a:p>
         </p:txBody>
@@ -6734,7 +7483,7 @@
             <a:avLst/>
           </a:prstGeom>
           <a:solidFill>
-            <a:srgbClr val="6366F1"/>
+            <a:srgbClr val="1F3864"/>
           </a:solidFill>
           <a:ln>
             <a:noFill/>
@@ -6758,7 +7507,7 @@
           <a:bodyPr rtlCol="0" anchor="ctr" wrap="square" lIns="731520" tIns="274320"/>
           <a:lstStyle/>
           <a:p>
-            <a:pPr algn="l">
+            <a:pPr algn="ctr">
               <a:defRPr sz="3200" b="1">
                 <a:solidFill>
                   <a:srgbClr val="FFFFFF"/>
@@ -6766,7 +7515,19 @@
               </a:defRPr>
             </a:pPr>
             <a:r>
-              <a:t>REST API 接口设计</a:t>
+              <a:t>数据处理流水线</a:t>
+            </a:r>
+          </a:p>
+          <a:p>
+            <a:pPr>
+              <a:defRPr sz="1600">
+                <a:solidFill>
+                  <a:srgbClr val="D1D5DB"/>
+                </a:solidFill>
+              </a:defRPr>
+            </a:pPr>
+            <a:r>
+              <a:t>Prompt 隔离划分 — 防止数据泄露的关键设计</a:t>
             </a:r>
           </a:p>
         </p:txBody>
@@ -6801,7 +7562,7 @@
               </a:defRPr>
             </a:pPr>
             <a:r>
-              <a:t>AES 自动文本评分系统 | 工程实践项目答辩</a:t>
+              <a:t>AES 中英文双语作文评分系统  |  工程实践项目答辩  |  苏州 · 2026</a:t>
             </a:r>
           </a:p>
         </p:txBody>
@@ -6815,16 +7576,18 @@
         <p:spPr>
           <a:xfrm>
             <a:off x="731520" y="1371600"/>
-            <a:ext cx="1097280" cy="457200"/>
+            <a:ext cx="5029200" cy="4754880"/>
           </a:xfrm>
           <a:prstGeom prst="rect">
             <a:avLst/>
           </a:prstGeom>
           <a:solidFill>
-            <a:srgbClr val="10B981"/>
+            <a:srgbClr val="FFFFFF"/>
           </a:solidFill>
-          <a:ln>
-            <a:noFill/>
+          <a:ln w="12700">
+            <a:solidFill>
+              <a:srgbClr val="E5E7EB"/>
+            </a:solidFill>
           </a:ln>
         </p:spPr>
         <p:style>
@@ -6842,111 +7605,148 @@
           </a:fontRef>
         </p:style>
         <p:txBody>
-          <a:bodyPr rtlCol="0" anchor="ctr"/>
+          <a:bodyPr rtlCol="0" anchor="ctr" wrap="square" lIns="274320" rIns="274320" tIns="182880"/>
           <a:lstStyle/>
           <a:p>
             <a:pPr algn="ctr">
-              <a:defRPr sz="1600" b="1">
-                <a:solidFill>
-                  <a:srgbClr val="FFFFFF"/>
-                </a:solidFill>
-              </a:defRPr>
-            </a:pPr>
-            <a:r>
-              <a:t>GET</a:t>
-            </a:r>
-          </a:p>
-        </p:txBody>
-      </p:sp>
-      <p:sp>
-        <p:nvSpPr>
-          <p:cNvPr id="5" name="TextBox 4"/>
-          <p:cNvSpPr txBox="1"/>
+              <a:defRPr sz="1800" b="1">
+                <a:solidFill>
+                  <a:srgbClr val="6366F1"/>
+                </a:solidFill>
+              </a:defRPr>
+            </a:pPr>
+            <a:r>
+              <a:t>英文数据流</a:t>
+            </a:r>
+          </a:p>
+          <a:p>
+            <a:pPr>
+              <a:spcAft>
+                <a:spcPts val="400"/>
+              </a:spcAft>
+              <a:defRPr sz="1400">
+                <a:solidFill>
+                  <a:srgbClr val="1F2937"/>
+                </a:solidFill>
+              </a:defRPr>
+            </a:pPr>
+            <a:r>
+              <a:t>ASAP CSV (12,976 篇, 8 个题目集)</a:t>
+            </a:r>
+          </a:p>
+          <a:p>
+            <a:pPr>
+              <a:spcAft>
+                <a:spcPts val="400"/>
+              </a:spcAft>
+              <a:defRPr sz="1400">
+                <a:solidFill>
+                  <a:srgbClr val="1F2937"/>
+                </a:solidFill>
+              </a:defRPr>
+            </a:pPr>
+            <a:r>
+              <a:t>↓ HTML unescape, URL/@mention 移除</a:t>
+            </a:r>
+          </a:p>
+          <a:p>
+            <a:pPr>
+              <a:spcAft>
+                <a:spcPts val="400"/>
+              </a:spcAft>
+              <a:defRPr sz="1400">
+                <a:solidFill>
+                  <a:srgbClr val="1F2937"/>
+                </a:solidFill>
+              </a:defRPr>
+            </a:pPr>
+            <a:r>
+              <a:t>↓ 空白规范化 (\s+ → 空格)</a:t>
+            </a:r>
+          </a:p>
+          <a:p>
+            <a:pPr>
+              <a:spcAft>
+                <a:spcPts val="400"/>
+              </a:spcAft>
+              <a:defRPr sz="1400">
+                <a:solidFill>
+                  <a:srgbClr val="1F2937"/>
+                </a:solidFill>
+              </a:defRPr>
+            </a:pPr>
+            <a:r>
+              <a:t>↓ 按 essay_set 归一化 [0,1]</a:t>
+            </a:r>
+          </a:p>
+          <a:p>
+            <a:pPr>
+              <a:spcAft>
+                <a:spcPts val="400"/>
+              </a:spcAft>
+              <a:defRPr sz="1400">
+                <a:solidFill>
+                  <a:srgbClr val="1F2937"/>
+                </a:solidFill>
+              </a:defRPr>
+            </a:pPr>
+            <a:r>
+              <a:t>↓ BERT 分词 (max_length=512)</a:t>
+            </a:r>
+          </a:p>
+          <a:p>
+            <a:pPr>
+              <a:spcAft>
+                <a:spcPts val="400"/>
+              </a:spcAft>
+              <a:defRPr sz="1400">
+                <a:solidFill>
+                  <a:srgbClr val="1F2937"/>
+                </a:solidFill>
+              </a:defRPr>
+            </a:pPr>
+            <a:r>
+              <a:t>↓ essay_set 隔离划分 → train/val/test</a:t>
+            </a:r>
+          </a:p>
+          <a:p>
+            <a:pPr>
+              <a:spcAft>
+                <a:spcPts val="400"/>
+              </a:spcAft>
+              <a:defRPr sz="1400">
+                <a:solidFill>
+                  <a:srgbClr val="1F2937"/>
+                </a:solidFill>
+              </a:defRPr>
+            </a:pPr>
+            <a:r>
+              <a:t>↓ 断言验证: train ∩ test = ∅</a:t>
+            </a:r>
+          </a:p>
+        </p:txBody>
+      </p:sp>
+      <p:sp>
+        <p:nvSpPr>
+          <p:cNvPr id="5" name="Rectangle 4"/>
+          <p:cNvSpPr/>
           <p:nvPr/>
         </p:nvSpPr>
         <p:spPr>
           <a:xfrm>
-            <a:off x="2011680" y="1371600"/>
-            <a:ext cx="3200400" cy="457200"/>
-          </a:xfrm>
-          <a:prstGeom prst="rect">
-            <a:avLst/>
-          </a:prstGeom>
-          <a:noFill/>
-        </p:spPr>
-        <p:txBody>
-          <a:bodyPr wrap="none">
-            <a:spAutoFit/>
-          </a:bodyPr>
-          <a:lstStyle/>
-          <a:p>
-            <a:pPr>
-              <a:defRPr sz="1600" b="1">
-                <a:solidFill>
-                  <a:srgbClr val="1F2937"/>
-                </a:solidFill>
-              </a:defRPr>
-            </a:pPr>
-            <a:r>
-              <a:t>/api/v1/health</a:t>
-            </a:r>
-          </a:p>
-        </p:txBody>
-      </p:sp>
-      <p:sp>
-        <p:nvSpPr>
-          <p:cNvPr id="6" name="TextBox 5"/>
-          <p:cNvSpPr txBox="1"/>
-          <p:nvPr/>
-        </p:nvSpPr>
-        <p:spPr>
-          <a:xfrm>
-            <a:off x="5303520" y="1280160"/>
-            <a:ext cx="5943600" cy="1097280"/>
-          </a:xfrm>
-          <a:prstGeom prst="rect">
-            <a:avLst/>
-          </a:prstGeom>
-          <a:noFill/>
-        </p:spPr>
-        <p:txBody>
-          <a:bodyPr wrap="square">
-            <a:spAutoFit/>
-          </a:bodyPr>
-          <a:lstStyle/>
-          <a:p>
-            <a:pPr>
-              <a:defRPr sz="1300">
-                <a:solidFill>
-                  <a:srgbClr val="6B7280"/>
-                </a:solidFill>
-              </a:defRPr>
-            </a:pPr>
-            <a:r>
-              <a:t>健康检查 + 模型加载状态</a:t>
-            </a:r>
-          </a:p>
-        </p:txBody>
-      </p:sp>
-      <p:sp>
-        <p:nvSpPr>
-          <p:cNvPr id="7" name="Rectangle 6"/>
-          <p:cNvSpPr/>
-          <p:nvPr/>
-        </p:nvSpPr>
-        <p:spPr>
-          <a:xfrm>
-            <a:off x="731520" y="2651760"/>
-            <a:ext cx="1097280" cy="457200"/>
+            <a:off x="6858000" y="1371600"/>
+            <a:ext cx="5029200" cy="4754880"/>
           </a:xfrm>
           <a:prstGeom prst="rect">
             <a:avLst/>
           </a:prstGeom>
           <a:solidFill>
-            <a:srgbClr val="10B981"/>
+            <a:srgbClr val="FFFFFF"/>
           </a:solidFill>
-          <a:ln>
-            <a:noFill/>
+          <a:ln w="12700">
+            <a:solidFill>
+              <a:srgbClr val="E5E7EB"/>
+            </a:solidFill>
           </a:ln>
         </p:spPr>
         <p:style>
@@ -6964,344 +7764,123 @@
           </a:fontRef>
         </p:style>
         <p:txBody>
-          <a:bodyPr rtlCol="0" anchor="ctr"/>
+          <a:bodyPr rtlCol="0" anchor="ctr" wrap="square" lIns="274320" rIns="274320" tIns="182880"/>
           <a:lstStyle/>
           <a:p>
             <a:pPr algn="ctr">
-              <a:defRPr sz="1600" b="1">
-                <a:solidFill>
-                  <a:srgbClr val="FFFFFF"/>
-                </a:solidFill>
-              </a:defRPr>
-            </a:pPr>
-            <a:r>
-              <a:t>GET</a:t>
-            </a:r>
-          </a:p>
-        </p:txBody>
-      </p:sp>
-      <p:sp>
-        <p:nvSpPr>
-          <p:cNvPr id="8" name="TextBox 7"/>
-          <p:cNvSpPr txBox="1"/>
-          <p:nvPr/>
-        </p:nvSpPr>
-        <p:spPr>
-          <a:xfrm>
-            <a:off x="2011680" y="2651760"/>
-            <a:ext cx="3200400" cy="457200"/>
-          </a:xfrm>
-          <a:prstGeom prst="rect">
-            <a:avLst/>
-          </a:prstGeom>
-          <a:noFill/>
-        </p:spPr>
-        <p:txBody>
-          <a:bodyPr wrap="none">
-            <a:spAutoFit/>
-          </a:bodyPr>
-          <a:lstStyle/>
-          <a:p>
-            <a:pPr>
-              <a:defRPr sz="1600" b="1">
-                <a:solidFill>
-                  <a:srgbClr val="1F2937"/>
-                </a:solidFill>
-              </a:defRPr>
-            </a:pPr>
-            <a:r>
-              <a:t>/api/v1/models</a:t>
-            </a:r>
-          </a:p>
-        </p:txBody>
-      </p:sp>
-      <p:sp>
-        <p:nvSpPr>
-          <p:cNvPr id="9" name="TextBox 8"/>
-          <p:cNvSpPr txBox="1"/>
-          <p:nvPr/>
-        </p:nvSpPr>
-        <p:spPr>
-          <a:xfrm>
-            <a:off x="5303520" y="2560320"/>
-            <a:ext cx="5943600" cy="1097280"/>
-          </a:xfrm>
-          <a:prstGeom prst="rect">
-            <a:avLst/>
-          </a:prstGeom>
-          <a:noFill/>
-        </p:spPr>
-        <p:txBody>
-          <a:bodyPr wrap="square">
-            <a:spAutoFit/>
-          </a:bodyPr>
-          <a:lstStyle/>
-          <a:p>
-            <a:pPr>
-              <a:defRPr sz="1300">
-                <a:solidFill>
-                  <a:srgbClr val="6B7280"/>
-                </a:solidFill>
-              </a:defRPr>
-            </a:pPr>
-            <a:r>
-              <a:t>模型注册表信息 (名称/语言/版本)</a:t>
-            </a:r>
-          </a:p>
-        </p:txBody>
-      </p:sp>
-      <p:sp>
-        <p:nvSpPr>
-          <p:cNvPr id="10" name="Rectangle 9"/>
-          <p:cNvSpPr/>
-          <p:nvPr/>
-        </p:nvSpPr>
-        <p:spPr>
-          <a:xfrm>
-            <a:off x="731520" y="3931920"/>
-            <a:ext cx="1097280" cy="457200"/>
-          </a:xfrm>
-          <a:prstGeom prst="rect">
-            <a:avLst/>
-          </a:prstGeom>
-          <a:solidFill>
-            <a:srgbClr val="3B82F6"/>
-          </a:solidFill>
-          <a:ln>
-            <a:noFill/>
-          </a:ln>
-        </p:spPr>
-        <p:style>
-          <a:lnRef idx="1">
-            <a:schemeClr val="accent1"/>
-          </a:lnRef>
-          <a:fillRef idx="3">
-            <a:schemeClr val="accent1"/>
-          </a:fillRef>
-          <a:effectRef idx="2">
-            <a:schemeClr val="accent1"/>
-          </a:effectRef>
-          <a:fontRef idx="minor">
-            <a:schemeClr val="lt1"/>
-          </a:fontRef>
-        </p:style>
-        <p:txBody>
-          <a:bodyPr rtlCol="0" anchor="ctr"/>
-          <a:lstStyle/>
-          <a:p>
-            <a:pPr algn="ctr">
-              <a:defRPr sz="1600" b="1">
-                <a:solidFill>
-                  <a:srgbClr val="FFFFFF"/>
-                </a:solidFill>
-              </a:defRPr>
-            </a:pPr>
-            <a:r>
-              <a:t>POST</a:t>
-            </a:r>
-          </a:p>
-        </p:txBody>
-      </p:sp>
-      <p:sp>
-        <p:nvSpPr>
-          <p:cNvPr id="11" name="TextBox 10"/>
-          <p:cNvSpPr txBox="1"/>
-          <p:nvPr/>
-        </p:nvSpPr>
-        <p:spPr>
-          <a:xfrm>
-            <a:off x="2011680" y="3931920"/>
-            <a:ext cx="3200400" cy="457200"/>
-          </a:xfrm>
-          <a:prstGeom prst="rect">
-            <a:avLst/>
-          </a:prstGeom>
-          <a:noFill/>
-        </p:spPr>
-        <p:txBody>
-          <a:bodyPr wrap="none">
-            <a:spAutoFit/>
-          </a:bodyPr>
-          <a:lstStyle/>
-          <a:p>
-            <a:pPr>
-              <a:defRPr sz="1600" b="1">
-                <a:solidFill>
-                  <a:srgbClr val="1F2937"/>
-                </a:solidFill>
-              </a:defRPr>
-            </a:pPr>
-            <a:r>
-              <a:t>/api/v1/score</a:t>
-            </a:r>
-          </a:p>
-        </p:txBody>
-      </p:sp>
-      <p:sp>
-        <p:nvSpPr>
-          <p:cNvPr id="12" name="TextBox 11"/>
-          <p:cNvSpPr txBox="1"/>
-          <p:nvPr/>
-        </p:nvSpPr>
-        <p:spPr>
-          <a:xfrm>
-            <a:off x="5303520" y="3840480"/>
-            <a:ext cx="5943600" cy="1097280"/>
-          </a:xfrm>
-          <a:prstGeom prst="rect">
-            <a:avLst/>
-          </a:prstGeom>
-          <a:noFill/>
-        </p:spPr>
-        <p:txBody>
-          <a:bodyPr wrap="square">
-            <a:spAutoFit/>
-          </a:bodyPr>
-          <a:lstStyle/>
-          <a:p>
-            <a:pPr>
-              <a:defRPr sz="1300">
-                <a:solidFill>
-                  <a:srgbClr val="6B7280"/>
-                </a:solidFill>
-              </a:defRPr>
-            </a:pPr>
-            <a:r>
-              <a:t>单篇评分</a:t>
-            </a:r>
-            <a:br/>
-            <a:r>
-              <a:t>{"text": "...", "language": "auto"}</a:t>
-            </a:r>
-            <a:br/>
-            <a:r>
-              <a:t>→ {score, scores{total/content/structure/language}, feedback{...}}</a:t>
-            </a:r>
-          </a:p>
-        </p:txBody>
-      </p:sp>
-      <p:sp>
-        <p:nvSpPr>
-          <p:cNvPr id="13" name="Rectangle 12"/>
-          <p:cNvSpPr/>
-          <p:nvPr/>
-        </p:nvSpPr>
-        <p:spPr>
-          <a:xfrm>
-            <a:off x="731520" y="5212079"/>
-            <a:ext cx="1097280" cy="457200"/>
-          </a:xfrm>
-          <a:prstGeom prst="rect">
-            <a:avLst/>
-          </a:prstGeom>
-          <a:solidFill>
-            <a:srgbClr val="3B82F6"/>
-          </a:solidFill>
-          <a:ln>
-            <a:noFill/>
-          </a:ln>
-        </p:spPr>
-        <p:style>
-          <a:lnRef idx="1">
-            <a:schemeClr val="accent1"/>
-          </a:lnRef>
-          <a:fillRef idx="3">
-            <a:schemeClr val="accent1"/>
-          </a:fillRef>
-          <a:effectRef idx="2">
-            <a:schemeClr val="accent1"/>
-          </a:effectRef>
-          <a:fontRef idx="minor">
-            <a:schemeClr val="lt1"/>
-          </a:fontRef>
-        </p:style>
-        <p:txBody>
-          <a:bodyPr rtlCol="0" anchor="ctr"/>
-          <a:lstStyle/>
-          <a:p>
-            <a:pPr algn="ctr">
-              <a:defRPr sz="1600" b="1">
-                <a:solidFill>
-                  <a:srgbClr val="FFFFFF"/>
-                </a:solidFill>
-              </a:defRPr>
-            </a:pPr>
-            <a:r>
-              <a:t>POST</a:t>
-            </a:r>
-          </a:p>
-        </p:txBody>
-      </p:sp>
-      <p:sp>
-        <p:nvSpPr>
-          <p:cNvPr id="14" name="TextBox 13"/>
-          <p:cNvSpPr txBox="1"/>
-          <p:nvPr/>
-        </p:nvSpPr>
-        <p:spPr>
-          <a:xfrm>
-            <a:off x="2011680" y="5212079"/>
-            <a:ext cx="3200400" cy="457200"/>
-          </a:xfrm>
-          <a:prstGeom prst="rect">
-            <a:avLst/>
-          </a:prstGeom>
-          <a:noFill/>
-        </p:spPr>
-        <p:txBody>
-          <a:bodyPr wrap="none">
-            <a:spAutoFit/>
-          </a:bodyPr>
-          <a:lstStyle/>
-          <a:p>
-            <a:pPr>
-              <a:defRPr sz="1600" b="1">
-                <a:solidFill>
-                  <a:srgbClr val="1F2937"/>
-                </a:solidFill>
-              </a:defRPr>
-            </a:pPr>
-            <a:r>
-              <a:t>/api/v1/batch</a:t>
-            </a:r>
-          </a:p>
-        </p:txBody>
-      </p:sp>
-      <p:sp>
-        <p:nvSpPr>
-          <p:cNvPr id="15" name="TextBox 14"/>
-          <p:cNvSpPr txBox="1"/>
-          <p:nvPr/>
-        </p:nvSpPr>
-        <p:spPr>
-          <a:xfrm>
-            <a:off x="5303520" y="5120640"/>
-            <a:ext cx="5943600" cy="1097280"/>
-          </a:xfrm>
-          <a:prstGeom prst="rect">
-            <a:avLst/>
-          </a:prstGeom>
-          <a:noFill/>
-        </p:spPr>
-        <p:txBody>
-          <a:bodyPr wrap="square">
-            <a:spAutoFit/>
-          </a:bodyPr>
-          <a:lstStyle/>
-          <a:p>
-            <a:pPr>
-              <a:defRPr sz="1300">
-                <a:solidFill>
-                  <a:srgbClr val="6B7280"/>
-                </a:solidFill>
-              </a:defRPr>
-            </a:pPr>
-            <a:r>
-              <a:t>批量评分 (CSV上传)</a:t>
-            </a:r>
-            <a:br/>
-            <a:r>
-              <a:t>→ {total, results[{id, score, ...}]}</a:t>
+              <a:defRPr sz="1800" b="1">
+                <a:solidFill>
+                  <a:srgbClr val="10B981"/>
+                </a:solidFill>
+              </a:defRPr>
+            </a:pPr>
+            <a:r>
+              <a:t>中文数据流 (差异点)</a:t>
+            </a:r>
+          </a:p>
+          <a:p>
+            <a:pPr>
+              <a:spcAft>
+                <a:spcPts val="400"/>
+              </a:spcAft>
+              <a:defRPr sz="1400">
+                <a:solidFill>
+                  <a:srgbClr val="1F2937"/>
+                </a:solidFill>
+              </a:defRPr>
+            </a:pPr>
+            <a:r>
+              <a:t>ASAP CSV → Google Translate (en→zh)</a:t>
+            </a:r>
+          </a:p>
+          <a:p>
+            <a:pPr>
+              <a:spcAft>
+                <a:spcPts val="400"/>
+              </a:spcAft>
+              <a:defRPr sz="1400">
+                <a:solidFill>
+                  <a:srgbClr val="1F2937"/>
+                </a:solidFill>
+              </a:defRPr>
+            </a:pPr>
+            <a:r>
+              <a:t>↓ 全角转半角, 控制字符移除</a:t>
+            </a:r>
+          </a:p>
+          <a:p>
+            <a:pPr>
+              <a:spcAft>
+                <a:spcPts val="400"/>
+              </a:spcAft>
+              <a:defRPr sz="1400">
+                <a:solidFill>
+                  <a:srgbClr val="1F2937"/>
+                </a:solidFill>
+              </a:defRPr>
+            </a:pPr>
+            <a:r>
+              <a:t>↓ jieba 分词 (词间加空格)</a:t>
+            </a:r>
+          </a:p>
+          <a:p>
+            <a:pPr>
+              <a:spcAft>
+                <a:spcPts val="400"/>
+              </a:spcAft>
+              <a:defRPr sz="1400">
+                <a:solidFill>
+                  <a:srgbClr val="1F2937"/>
+                </a:solidFill>
+              </a:defRPr>
+            </a:pPr>
+            <a:r>
+              <a:t>↓ 按 essay_set 归一化 [0,1]</a:t>
+            </a:r>
+          </a:p>
+          <a:p>
+            <a:pPr>
+              <a:spcAft>
+                <a:spcPts val="400"/>
+              </a:spcAft>
+              <a:defRPr sz="1400">
+                <a:solidFill>
+                  <a:srgbClr val="1F2937"/>
+                </a:solidFill>
+              </a:defRPr>
+            </a:pPr>
+            <a:r>
+              <a:t>↓ BERT 分词 (bert-base-chinese)</a:t>
+            </a:r>
+          </a:p>
+          <a:p>
+            <a:pPr>
+              <a:spcAft>
+                <a:spcPts val="400"/>
+              </a:spcAft>
+              <a:defRPr sz="1400">
+                <a:solidFill>
+                  <a:srgbClr val="1F2937"/>
+                </a:solidFill>
+              </a:defRPr>
+            </a:pPr>
+            <a:r>
+              <a:t>↓ 随机划分 (翻译同源, 隔离无意义)</a:t>
+            </a:r>
+          </a:p>
+          <a:p>
+            <a:pPr>
+              <a:spcAft>
+                <a:spcPts val="400"/>
+              </a:spcAft>
+              <a:defRPr sz="1400">
+                <a:solidFill>
+                  <a:srgbClr val="1F2937"/>
+                </a:solidFill>
+              </a:defRPr>
+            </a:pPr>
+            <a:r>
+              <a:t>↓ 英文 QWK=0.58, 中文 QWK=0.79 ← 差异原因</a:t>
             </a:r>
           </a:p>
         </p:txBody>
@@ -7347,7 +7926,7 @@
             <a:avLst/>
           </a:prstGeom>
           <a:solidFill>
-            <a:srgbClr val="6366F1"/>
+            <a:srgbClr val="1F3864"/>
           </a:solidFill>
           <a:ln>
             <a:noFill/>
@@ -7371,7 +7950,7 @@
           <a:bodyPr rtlCol="0" anchor="ctr" wrap="square" lIns="731520" tIns="274320"/>
           <a:lstStyle/>
           <a:p>
-            <a:pPr algn="l">
+            <a:pPr algn="ctr">
               <a:defRPr sz="3200" b="1">
                 <a:solidFill>
                   <a:srgbClr val="FFFFFF"/>
@@ -7379,11 +7958,11 @@
               </a:defRPr>
             </a:pPr>
             <a:r>
-              <a:t>Web 交互界面</a:t>
-            </a:r>
-          </a:p>
-          <a:p>
-            <a:pPr algn="l">
+              <a:t>Android 版架构</a:t>
+            </a:r>
+          </a:p>
+          <a:p>
+            <a:pPr>
               <a:defRPr sz="1600">
                 <a:solidFill>
                   <a:srgbClr val="D1D5DB"/>
@@ -7391,7 +7970,7 @@
               </a:defRPr>
             </a:pPr>
             <a:r>
-              <a:t>Streamlit + Plotly</a:t>
+              <a:t>Kotlin + Jetpack Compose + PyTorch Mobile · 完全离线</a:t>
             </a:r>
           </a:p>
         </p:txBody>
@@ -7426,7 +8005,7 @@
               </a:defRPr>
             </a:pPr>
             <a:r>
-              <a:t>AES 自动文本评分系统 | 工程实践项目答辩</a:t>
+              <a:t>AES 中英文双语作文评分系统  |  工程实践项目答辩  |  苏州 · 2026</a:t>
             </a:r>
           </a:p>
         </p:txBody>
@@ -7439,8 +8018,8 @@
         </p:nvSpPr>
         <p:spPr>
           <a:xfrm>
-            <a:off x="731520" y="1371600"/>
-            <a:ext cx="3383280" cy="3200400"/>
+            <a:off x="457200" y="1371600"/>
+            <a:ext cx="3474720" cy="2286000"/>
           </a:xfrm>
           <a:prstGeom prst="rect">
             <a:avLst/>
@@ -7480,97 +8059,67 @@
               </a:defRPr>
             </a:pPr>
             <a:r>
-              <a:t>📝 评分页面</a:t>
-            </a:r>
-          </a:p>
-          <a:p>
-            <a:pPr>
-              <a:spcAft>
-                <a:spcPts val="400"/>
-              </a:spcAft>
-              <a:defRPr sz="1400">
-                <a:solidFill>
-                  <a:srgbClr val="1F2937"/>
-                </a:solidFill>
-              </a:defRPr>
-            </a:pPr>
-            <a:r>
-              <a:t>• 中英文自动检测/手动切换</a:t>
-            </a:r>
-          </a:p>
-          <a:p>
-            <a:pPr>
-              <a:spcAft>
-                <a:spcPts val="400"/>
-              </a:spcAft>
-              <a:defRPr sz="1400">
-                <a:solidFill>
-                  <a:srgbClr val="1F2937"/>
-                </a:solidFill>
-              </a:defRPr>
-            </a:pPr>
-            <a:r>
-              <a:t>• 圆形仪表盘 (总分%)</a:t>
-            </a:r>
-          </a:p>
-          <a:p>
-            <a:pPr>
-              <a:spcAft>
-                <a:spcPts val="400"/>
-              </a:spcAft>
-              <a:defRPr sz="1400">
-                <a:solidFill>
-                  <a:srgbClr val="1F2937"/>
-                </a:solidFill>
-              </a:defRPr>
-            </a:pPr>
-            <a:r>
-              <a:t>• 三维度雷达图</a:t>
-            </a:r>
-          </a:p>
-          <a:p>
-            <a:pPr>
-              <a:spcAft>
-                <a:spcPts val="400"/>
-              </a:spcAft>
-              <a:defRPr sz="1400">
-                <a:solidFill>
-                  <a:srgbClr val="1F2937"/>
-                </a:solidFill>
-              </a:defRPr>
-            </a:pPr>
-            <a:r>
-              <a:t>• 彩色反馈卡片</a:t>
-            </a:r>
-          </a:p>
-          <a:p>
-            <a:pPr>
-              <a:spcAft>
-                <a:spcPts val="400"/>
-              </a:spcAft>
-              <a:defRPr sz="1400">
-                <a:solidFill>
-                  <a:srgbClr val="1F2937"/>
-                </a:solidFill>
-              </a:defRPr>
-            </a:pPr>
-            <a:r>
-              <a:t>• 字数/字符数实时统计</a:t>
-            </a:r>
-          </a:p>
-          <a:p>
-            <a:pPr>
-              <a:spcAft>
-                <a:spcPts val="400"/>
-              </a:spcAft>
-              <a:defRPr sz="1400">
-                <a:solidFill>
-                  <a:srgbClr val="1F2937"/>
-                </a:solidFill>
-              </a:defRPr>
-            </a:pPr>
-            <a:r>
-              <a:t>• 清除按钮 (无状态冲突)</a:t>
+              <a:t>UI 层</a:t>
+            </a:r>
+          </a:p>
+          <a:p>
+            <a:pPr>
+              <a:spcAft>
+                <a:spcPts val="400"/>
+              </a:spcAft>
+              <a:defRPr sz="1400">
+                <a:solidFill>
+                  <a:srgbClr val="1F2937"/>
+                </a:solidFill>
+              </a:defRPr>
+            </a:pPr>
+            <a:r>
+              <a:t>Jetpack Compose + Material3</a:t>
+            </a:r>
+          </a:p>
+          <a:p>
+            <a:pPr>
+              <a:spcAft>
+                <a:spcPts val="400"/>
+              </a:spcAft>
+              <a:defRPr sz="1400">
+                <a:solidFill>
+                  <a:srgbClr val="1F2937"/>
+                </a:solidFill>
+              </a:defRPr>
+            </a:pPr>
+            <a:r>
+              <a:t>Bottom Navigation (4 Tab)</a:t>
+            </a:r>
+          </a:p>
+          <a:p>
+            <a:pPr>
+              <a:spcAft>
+                <a:spcPts val="400"/>
+              </a:spcAft>
+              <a:defRPr sz="1400">
+                <a:solidFill>
+                  <a:srgbClr val="1F2937"/>
+                </a:solidFill>
+              </a:defRPr>
+            </a:pPr>
+            <a:r>
+              <a:t>Canvas 自绘雷达图</a:t>
+            </a:r>
+          </a:p>
+          <a:p>
+            <a:pPr>
+              <a:spcAft>
+                <a:spcPts val="400"/>
+              </a:spcAft>
+              <a:defRPr sz="1400">
+                <a:solidFill>
+                  <a:srgbClr val="1F2937"/>
+                </a:solidFill>
+              </a:defRPr>
+            </a:pPr>
+            <a:r>
+              <a:t>评分 / 批量 / 对比 / 设置</a:t>
             </a:r>
           </a:p>
         </p:txBody>
@@ -7583,8 +8132,8 @@
         </p:nvSpPr>
         <p:spPr>
           <a:xfrm>
-            <a:off x="4389120" y="1371600"/>
-            <a:ext cx="3383280" cy="3200400"/>
+            <a:off x="4206240" y="1371600"/>
+            <a:ext cx="3474720" cy="2286000"/>
           </a:xfrm>
           <a:prstGeom prst="rect">
             <a:avLst/>
@@ -7619,87 +8168,72 @@
             <a:pPr algn="ctr">
               <a:defRPr sz="1800" b="1">
                 <a:solidFill>
-                  <a:srgbClr val="3B82F6"/>
-                </a:solidFill>
-              </a:defRPr>
-            </a:pPr>
-            <a:r>
-              <a:t>📊 批量评分</a:t>
-            </a:r>
-          </a:p>
-          <a:p>
-            <a:pPr>
-              <a:spcAft>
-                <a:spcPts val="400"/>
-              </a:spcAft>
-              <a:defRPr sz="1400">
-                <a:solidFill>
-                  <a:srgbClr val="1F2937"/>
-                </a:solidFill>
-              </a:defRPr>
-            </a:pPr>
-            <a:r>
-              <a:t>• CSV 模板下载</a:t>
-            </a:r>
-          </a:p>
-          <a:p>
-            <a:pPr>
-              <a:spcAft>
-                <a:spcPts val="400"/>
-              </a:spcAft>
-              <a:defRPr sz="1400">
-                <a:solidFill>
-                  <a:srgbClr val="1F2937"/>
-                </a:solidFill>
-              </a:defRPr>
-            </a:pPr>
-            <a:r>
-              <a:t>• 文件拖拽上传</a:t>
-            </a:r>
-          </a:p>
-          <a:p>
-            <a:pPr>
-              <a:spcAft>
-                <a:spcPts val="400"/>
-              </a:spcAft>
-              <a:defRPr sz="1400">
-                <a:solidFill>
-                  <a:srgbClr val="1F2937"/>
-                </a:solidFill>
-              </a:defRPr>
-            </a:pPr>
-            <a:r>
-              <a:t>• 批量推理 + 结果表格</a:t>
-            </a:r>
-          </a:p>
-          <a:p>
-            <a:pPr>
-              <a:spcAft>
-                <a:spcPts val="400"/>
-              </a:spcAft>
-              <a:defRPr sz="1400">
-                <a:solidFill>
-                  <a:srgbClr val="1F2937"/>
-                </a:solidFill>
-              </a:defRPr>
-            </a:pPr>
-            <a:r>
-              <a:t>• 一键下载 CSV 结果</a:t>
-            </a:r>
-          </a:p>
-          <a:p>
-            <a:pPr>
-              <a:spcAft>
-                <a:spcPts val="400"/>
-              </a:spcAft>
-              <a:defRPr sz="1400">
-                <a:solidFill>
-                  <a:srgbClr val="1F2937"/>
-                </a:solidFill>
-              </a:defRPr>
-            </a:pPr>
-            <a:r>
-              <a:t>• 进度实时反馈</a:t>
+                  <a:srgbClr val="10B981"/>
+                </a:solidFill>
+              </a:defRPr>
+            </a:pPr>
+            <a:r>
+              <a:t>推理层</a:t>
+            </a:r>
+          </a:p>
+          <a:p>
+            <a:pPr>
+              <a:spcAft>
+                <a:spcPts val="400"/>
+              </a:spcAft>
+              <a:defRPr sz="1400">
+                <a:solidFill>
+                  <a:srgbClr val="1F2937"/>
+                </a:solidFill>
+              </a:defRPr>
+            </a:pPr>
+            <a:r>
+              <a:t>AESPredictor (模型管理)</a:t>
+            </a:r>
+          </a:p>
+          <a:p>
+            <a:pPr>
+              <a:spcAft>
+                <a:spcPts val="400"/>
+              </a:spcAft>
+              <a:defRPr sz="1400">
+                <a:solidFill>
+                  <a:srgbClr val="1F2937"/>
+                </a:solidFill>
+              </a:defRPr>
+            </a:pPr>
+            <a:r>
+              <a:t>BertTokenizer (100行 Kotlin)</a:t>
+            </a:r>
+          </a:p>
+          <a:p>
+            <a:pPr>
+              <a:spcAft>
+                <a:spcPts val="400"/>
+              </a:spcAft>
+              <a:defRPr sz="1400">
+                <a:solidFill>
+                  <a:srgbClr val="1F2937"/>
+                </a:solidFill>
+              </a:defRPr>
+            </a:pPr>
+            <a:r>
+              <a:t>LanguageDetector (字符规则)</a:t>
+            </a:r>
+          </a:p>
+          <a:p>
+            <a:pPr>
+              <a:spcAft>
+                <a:spcPts val="400"/>
+              </a:spcAft>
+              <a:defRPr sz="1400">
+                <a:solidFill>
+                  <a:srgbClr val="1F2937"/>
+                </a:solidFill>
+              </a:defRPr>
+            </a:pPr>
+            <a:r>
+              <a:t>PyTorch Mobile Lite 1.13.1</a:t>
             </a:r>
           </a:p>
         </p:txBody>
@@ -7712,8 +8246,8 @@
         </p:nvSpPr>
         <p:spPr>
           <a:xfrm>
-            <a:off x="8046720" y="1371600"/>
-            <a:ext cx="3383280" cy="3200400"/>
+            <a:off x="7955279" y="1371600"/>
+            <a:ext cx="3474720" cy="2286000"/>
           </a:xfrm>
           <a:prstGeom prst="rect">
             <a:avLst/>
@@ -7748,72 +8282,72 @@
             <a:pPr algn="ctr">
               <a:defRPr sz="1800" b="1">
                 <a:solidFill>
-                  <a:srgbClr val="10B981"/>
-                </a:solidFill>
-              </a:defRPr>
-            </a:pPr>
-            <a:r>
-              <a:t>🔄 中英对比</a:t>
-            </a:r>
-          </a:p>
-          <a:p>
-            <a:pPr>
-              <a:spcAft>
-                <a:spcPts val="400"/>
-              </a:spcAft>
-              <a:defRPr sz="1400">
-                <a:solidFill>
-                  <a:srgbClr val="1F2937"/>
-                </a:solidFill>
-              </a:defRPr>
-            </a:pPr>
-            <a:r>
-              <a:t>• 并排双模型评分</a:t>
-            </a:r>
-          </a:p>
-          <a:p>
-            <a:pPr>
-              <a:spcAft>
-                <a:spcPts val="400"/>
-              </a:spcAft>
-              <a:defRPr sz="1400">
-                <a:solidFill>
-                  <a:srgbClr val="1F2937"/>
-                </a:solidFill>
-              </a:defRPr>
-            </a:pPr>
-            <a:r>
-              <a:t>• 同一文本两种视角</a:t>
-            </a:r>
-          </a:p>
-          <a:p>
-            <a:pPr>
-              <a:spcAft>
-                <a:spcPts val="400"/>
-              </a:spcAft>
-              <a:defRPr sz="1400">
-                <a:solidFill>
-                  <a:srgbClr val="1F2937"/>
-                </a:solidFill>
-              </a:defRPr>
-            </a:pPr>
-            <a:r>
-              <a:t>• 分数对比 + 反馈对比</a:t>
-            </a:r>
-          </a:p>
-          <a:p>
-            <a:pPr>
-              <a:spcAft>
-                <a:spcPts val="400"/>
-              </a:spcAft>
-              <a:defRPr sz="1400">
-                <a:solidFill>
-                  <a:srgbClr val="1F2937"/>
-                </a:solidFill>
-              </a:defRPr>
-            </a:pPr>
-            <a:r>
-              <a:t>• 侧边栏双语切换</a:t>
+                  <a:srgbClr val="F59E0B"/>
+                </a:solidFill>
+              </a:defRPr>
+            </a:pPr>
+            <a:r>
+              <a:t>assets/</a:t>
+            </a:r>
+          </a:p>
+          <a:p>
+            <a:pPr>
+              <a:spcAft>
+                <a:spcPts val="400"/>
+              </a:spcAft>
+              <a:defRPr sz="1400">
+                <a:solidFill>
+                  <a:srgbClr val="1F2937"/>
+                </a:solidFill>
+              </a:defRPr>
+            </a:pPr>
+            <a:r>
+              <a:t>bert_model.pt (418MB)</a:t>
+            </a:r>
+          </a:p>
+          <a:p>
+            <a:pPr>
+              <a:spcAft>
+                <a:spcPts val="400"/>
+              </a:spcAft>
+              <a:defRPr sz="1400">
+                <a:solidFill>
+                  <a:srgbClr val="1F2937"/>
+                </a:solidFill>
+              </a:defRPr>
+            </a:pPr>
+            <a:r>
+              <a:t>zh_model.pt   (391MB)</a:t>
+            </a:r>
+          </a:p>
+          <a:p>
+            <a:pPr>
+              <a:spcAft>
+                <a:spcPts val="400"/>
+              </a:spcAft>
+              <a:defRPr sz="1400">
+                <a:solidFill>
+                  <a:srgbClr val="1F2937"/>
+                </a:solidFill>
+              </a:defRPr>
+            </a:pPr>
+            <a:r>
+              <a:t>vocab.txt     (30,522)</a:t>
+            </a:r>
+          </a:p>
+          <a:p>
+            <a:pPr>
+              <a:spcAft>
+                <a:spcPts val="400"/>
+              </a:spcAft>
+              <a:defRPr sz="1400">
+                <a:solidFill>
+                  <a:srgbClr val="1F2937"/>
+                </a:solidFill>
+              </a:defRPr>
+            </a:pPr>
+            <a:r>
+              <a:t>zh_vocab.txt  (21,128)</a:t>
             </a:r>
           </a:p>
         </p:txBody>
@@ -7826,8 +8360,8 @@
         </p:nvSpPr>
         <p:spPr>
           <a:xfrm>
-            <a:off x="731520" y="4846320"/>
-            <a:ext cx="10698480" cy="1645920"/>
+            <a:off x="457200" y="3931920"/>
+            <a:ext cx="10972800" cy="2560320"/>
           </a:xfrm>
           <a:prstGeom prst="rect">
             <a:avLst/>
@@ -7862,42 +8396,72 @@
             <a:pPr algn="ctr">
               <a:defRPr sz="1800" b="1">
                 <a:solidFill>
-                  <a:srgbClr val="F59E0B"/>
-                </a:solidFill>
-              </a:defRPr>
-            </a:pPr>
-            <a:r>
-              <a:t>🎨 界面特性</a:t>
-            </a:r>
-          </a:p>
-          <a:p>
-            <a:pPr>
-              <a:spcAft>
-                <a:spcPts val="400"/>
-              </a:spcAft>
-              <a:defRPr sz="1400">
-                <a:solidFill>
-                  <a:srgbClr val="1F2937"/>
-                </a:solidFill>
-              </a:defRPr>
-            </a:pPr>
-            <a:r>
-              <a:t>• 完整中英双语文案 (i18n/zh.json + en.json)  •  侧边栏语言实时切换  •  Plotly 雷达图 + 仪表盘</a:t>
-            </a:r>
-          </a:p>
-          <a:p>
-            <a:pPr>
-              <a:spcAft>
-                <a:spcPts val="400"/>
-              </a:spcAft>
-              <a:defRPr sz="1400">
-                <a:solidFill>
-                  <a:srgbClr val="1F2937"/>
-                </a:solidFill>
-              </a:defRPr>
-            </a:pPr>
-            <a:r>
-              <a:t>• 加载状态 (spinner) + 空状态 (placeholder) + 错误状态 (toast)  •  响应式布局</a:t>
+                  <a:srgbClr val="1F3864"/>
+                </a:solidFill>
+              </a:defRPr>
+            </a:pPr>
+            <a:r>
+              <a:t>关键技术决策</a:t>
+            </a:r>
+          </a:p>
+          <a:p>
+            <a:pPr>
+              <a:spcAft>
+                <a:spcPts val="400"/>
+              </a:spcAft>
+              <a:defRPr sz="1400">
+                <a:solidFill>
+                  <a:srgbClr val="1F2937"/>
+                </a:solidFill>
+              </a:defRPr>
+            </a:pPr>
+            <a:r>
+              <a:t>分词器: Kotlin 自实现 WordPiece (贪心最长子词匹配 + ##前缀), 零 Java NLP 依赖</a:t>
+            </a:r>
+          </a:p>
+          <a:p>
+            <a:pPr>
+              <a:spcAft>
+                <a:spcPts val="400"/>
+              </a:spcAft>
+              <a:defRPr sz="1400">
+                <a:solidFill>
+                  <a:srgbClr val="1F2937"/>
+                </a:solidFill>
+              </a:defRPr>
+            </a:pPr>
+            <a:r>
+              <a:t>语言检测: 统计 Unicode 范围 (一-鿿) 中文字符占比 &gt;50% → zh, 零外部库</a:t>
+            </a:r>
+          </a:p>
+          <a:p>
+            <a:pPr>
+              <a:spcAft>
+                <a:spcPts val="400"/>
+              </a:spcAft>
+              <a:defRPr sz="1400">
+                <a:solidFill>
+                  <a:srgbClr val="1F2937"/>
+                </a:solidFill>
+              </a:defRPr>
+            </a:pPr>
+            <a:r>
+              <a:t>雷达图: Compose Canvas 自绘 (网格 + 轴线 + 数据多边形 + 标签), 无第三方图表库</a:t>
+            </a:r>
+          </a:p>
+          <a:p>
+            <a:pPr>
+              <a:spcAft>
+                <a:spcPts val="400"/>
+              </a:spcAft>
+              <a:defRPr sz="1400">
+                <a:solidFill>
+                  <a:srgbClr val="1F2937"/>
+                </a:solidFill>
+              </a:defRPr>
+            </a:pPr>
+            <a:r>
+              <a:t>状态管理: remember + mutableStateOf, Coroutines(Default) 推理, withContext(Main) 更新 UI</a:t>
             </a:r>
           </a:p>
         </p:txBody>
@@ -7943,7 +8507,7 @@
             <a:avLst/>
           </a:prstGeom>
           <a:solidFill>
-            <a:srgbClr val="6366F1"/>
+            <a:srgbClr val="1F3864"/>
           </a:solidFill>
           <a:ln>
             <a:noFill/>
@@ -7967,7 +8531,7 @@
           <a:bodyPr rtlCol="0" anchor="ctr" wrap="square" lIns="731520" tIns="274320"/>
           <a:lstStyle/>
           <a:p>
-            <a:pPr algn="l">
+            <a:pPr algn="ctr">
               <a:defRPr sz="3200" b="1">
                 <a:solidFill>
                   <a:srgbClr val="FFFFFF"/>
@@ -7975,11 +8539,11 @@
               </a:defRPr>
             </a:pPr>
             <a:r>
-              <a:t>智能反馈生成</a:t>
-            </a:r>
-          </a:p>
-          <a:p>
-            <a:pPr algn="l">
+              <a:t>Android 界面展示</a:t>
+            </a:r>
+          </a:p>
+          <a:p>
+            <a:pPr>
               <a:defRPr sz="1600">
                 <a:solidFill>
                   <a:srgbClr val="D1D5DB"/>
@@ -7987,7 +8551,7 @@
               </a:defRPr>
             </a:pPr>
             <a:r>
-              <a:t>基于维度分数的模板化评语</a:t>
+              <a:t>4 个 Tab · 中文 UI</a:t>
             </a:r>
           </a:p>
         </p:txBody>
@@ -8022,185 +8586,21 @@
               </a:defRPr>
             </a:pPr>
             <a:r>
-              <a:t>AES 自动文本评分系统 | 工程实践项目答辩</a:t>
-            </a:r>
-          </a:p>
-        </p:txBody>
-      </p:sp>
-      <p:sp>
-        <p:nvSpPr>
-          <p:cNvPr id="4" name="TextBox 3"/>
-          <p:cNvSpPr txBox="1"/>
+              <a:t>AES 中英文双语作文评分系统  |  工程实践项目答辩  |  苏州 · 2026</a:t>
+            </a:r>
+          </a:p>
+        </p:txBody>
+      </p:sp>
+      <p:sp>
+        <p:nvSpPr>
+          <p:cNvPr id="4" name="Rectangle 3"/>
+          <p:cNvSpPr/>
           <p:nvPr/>
         </p:nvSpPr>
         <p:spPr>
           <a:xfrm>
-            <a:off x="731520" y="1371600"/>
-            <a:ext cx="5029200" cy="4572000"/>
-          </a:xfrm>
-          <a:prstGeom prst="rect">
-            <a:avLst/>
-          </a:prstGeom>
-          <a:noFill/>
-        </p:spPr>
-        <p:txBody>
-          <a:bodyPr wrap="square">
-            <a:spAutoFit/>
-          </a:bodyPr>
-          <a:lstStyle/>
-          <a:p>
-            <a:pPr>
-              <a:spcAft>
-                <a:spcPts val="800"/>
-              </a:spcAft>
-              <a:defRPr sz="1600">
-                <a:solidFill>
-                  <a:srgbClr val="1F2937"/>
-                </a:solidFill>
-              </a:defRPr>
-            </a:pPr>
-            <a:r>
-              <a:t>📋 反馈生成流程</a:t>
-            </a:r>
-          </a:p>
-          <a:p>
-            <a:pPr>
-              <a:spcAft>
-                <a:spcPts val="800"/>
-              </a:spcAft>
-              <a:defRPr sz="1600">
-                <a:solidFill>
-                  <a:srgbClr val="1F2937"/>
-                </a:solidFill>
-              </a:defRPr>
-            </a:pPr>
-          </a:p>
-          <a:p>
-            <a:pPr>
-              <a:spcAft>
-                <a:spcPts val="800"/>
-              </a:spcAft>
-              <a:defRPr sz="1600">
-                <a:solidFill>
-                  <a:srgbClr val="1F2937"/>
-                </a:solidFill>
-              </a:defRPr>
-            </a:pPr>
-            <a:r>
-              <a:t>维度分数 → 等级判断 → 模板映射 → 评语文字</a:t>
-            </a:r>
-          </a:p>
-          <a:p>
-            <a:pPr>
-              <a:spcAft>
-                <a:spcPts val="800"/>
-              </a:spcAft>
-              <a:defRPr sz="1600">
-                <a:solidFill>
-                  <a:srgbClr val="1F2937"/>
-                </a:solidFill>
-              </a:defRPr>
-            </a:pPr>
-          </a:p>
-          <a:p>
-            <a:pPr>
-              <a:spcAft>
-                <a:spcPts val="800"/>
-              </a:spcAft>
-              <a:defRPr sz="1600">
-                <a:solidFill>
-                  <a:srgbClr val="1F2937"/>
-                </a:solidFill>
-              </a:defRPr>
-            </a:pPr>
-            <a:r>
-              <a:t>等级阈值:  ≥0.7 → 优秀 | ≥0.4 → 中等 | &lt;0.4 → 待提升</a:t>
-            </a:r>
-          </a:p>
-          <a:p>
-            <a:pPr>
-              <a:spcAft>
-                <a:spcPts val="800"/>
-              </a:spcAft>
-              <a:defRPr sz="1600">
-                <a:solidFill>
-                  <a:srgbClr val="1F2937"/>
-                </a:solidFill>
-              </a:defRPr>
-            </a:pPr>
-          </a:p>
-          <a:p>
-            <a:pPr>
-              <a:spcAft>
-                <a:spcPts val="800"/>
-              </a:spcAft>
-              <a:defRPr sz="1600">
-                <a:solidFill>
-                  <a:srgbClr val="1F2937"/>
-                </a:solidFill>
-              </a:defRPr>
-            </a:pPr>
-            <a:r>
-              <a:t>模板规模:</a:t>
-            </a:r>
-          </a:p>
-          <a:p>
-            <a:pPr>
-              <a:spcAft>
-                <a:spcPts val="800"/>
-              </a:spcAft>
-              <a:defRPr sz="1600">
-                <a:solidFill>
-                  <a:srgbClr val="1F2937"/>
-                </a:solidFill>
-              </a:defRPr>
-            </a:pPr>
-            <a:r>
-              <a:t>• 英文: 3维度 × 3等级 = 9条维度模板 + 3条总评</a:t>
-            </a:r>
-          </a:p>
-          <a:p>
-            <a:pPr>
-              <a:spcAft>
-                <a:spcPts val="800"/>
-              </a:spcAft>
-              <a:defRPr sz="1600">
-                <a:solidFill>
-                  <a:srgbClr val="1F2937"/>
-                </a:solidFill>
-              </a:defRPr>
-            </a:pPr>
-            <a:r>
-              <a:t>• 中文: 同上，完整中文翻译</a:t>
-            </a:r>
-          </a:p>
-          <a:p>
-            <a:pPr>
-              <a:spcAft>
-                <a:spcPts val="800"/>
-              </a:spcAft>
-              <a:defRPr sz="1600">
-                <a:solidFill>
-                  <a:srgbClr val="1F2937"/>
-                </a:solidFill>
-              </a:defRPr>
-            </a:pPr>
-            <a:r>
-              <a:t>• 总计 24 条模板覆盖全部评分区间</a:t>
-            </a:r>
-          </a:p>
-        </p:txBody>
-      </p:sp>
-      <p:sp>
-        <p:nvSpPr>
-          <p:cNvPr id="5" name="Rectangle 4"/>
-          <p:cNvSpPr/>
-          <p:nvPr/>
-        </p:nvSpPr>
-        <p:spPr>
-          <a:xfrm>
-            <a:off x="6858000" y="1371600"/>
-            <a:ext cx="4572000" cy="2286000"/>
+            <a:off x="457200" y="1371600"/>
+            <a:ext cx="3474720" cy="2743200"/>
           </a:xfrm>
           <a:prstGeom prst="rect">
             <a:avLst/>
@@ -8235,86 +8635,101 @@
             <a:pPr algn="ctr">
               <a:defRPr sz="1800" b="1">
                 <a:solidFill>
-                  <a:srgbClr val="10B981"/>
-                </a:solidFill>
-              </a:defRPr>
-            </a:pPr>
-            <a:r>
-              <a:t>🇨🇳 中文反馈示例</a:t>
-            </a:r>
-          </a:p>
-          <a:p>
-            <a:pPr>
-              <a:spcAft>
-                <a:spcPts val="400"/>
-              </a:spcAft>
-              <a:defRPr sz="1400">
-                <a:solidFill>
-                  <a:srgbClr val="1F2937"/>
-                </a:solidFill>
-              </a:defRPr>
-            </a:pPr>
-            <a:r>
-              <a:t>内容: "论点明确，论证充分，举例恰当。"</a:t>
-            </a:r>
-          </a:p>
-          <a:p>
-            <a:pPr>
-              <a:spcAft>
-                <a:spcPts val="400"/>
-              </a:spcAft>
-              <a:defRPr sz="1400">
-                <a:solidFill>
-                  <a:srgbClr val="1F2937"/>
-                </a:solidFill>
-              </a:defRPr>
-            </a:pPr>
-            <a:r>
-              <a:t>结构: "结构完整，层次分明，段落衔接自然。"</a:t>
-            </a:r>
-          </a:p>
-          <a:p>
-            <a:pPr>
-              <a:spcAft>
-                <a:spcPts val="400"/>
-              </a:spcAft>
-              <a:defRPr sz="1400">
-                <a:solidFill>
-                  <a:srgbClr val="1F2937"/>
-                </a:solidFill>
-              </a:defRPr>
-            </a:pPr>
-            <a:r>
-              <a:t>语言: "语言表达流畅，词汇丰富，句式多样。"</a:t>
-            </a:r>
-          </a:p>
-          <a:p>
-            <a:pPr>
-              <a:spcAft>
-                <a:spcPts val="400"/>
-              </a:spcAft>
-              <a:defRPr sz="1400">
-                <a:solidFill>
-                  <a:srgbClr val="1F2937"/>
-                </a:solidFill>
-              </a:defRPr>
-            </a:pPr>
-            <a:r>
-              <a:t>总评: "总分表现优秀(85.2分)..."</a:t>
-            </a:r>
-          </a:p>
-        </p:txBody>
-      </p:sp>
-      <p:sp>
-        <p:nvSpPr>
-          <p:cNvPr id="6" name="Rectangle 5"/>
+                  <a:srgbClr val="6366F1"/>
+                </a:solidFill>
+              </a:defRPr>
+            </a:pPr>
+            <a:r>
+              <a:t>评分 Tab</a:t>
+            </a:r>
+          </a:p>
+          <a:p>
+            <a:pPr>
+              <a:spcAft>
+                <a:spcPts val="400"/>
+              </a:spcAft>
+              <a:defRPr sz="1400">
+                <a:solidFill>
+                  <a:srgbClr val="1F2937"/>
+                </a:solidFill>
+              </a:defRPr>
+            </a:pPr>
+            <a:r>
+              <a:t>语言 Chip: 自动/英文/中文</a:t>
+            </a:r>
+          </a:p>
+          <a:p>
+            <a:pPr>
+              <a:spcAft>
+                <a:spcPts val="400"/>
+              </a:spcAft>
+              <a:defRPr sz="1400">
+                <a:solidFill>
+                  <a:srgbClr val="1F2937"/>
+                </a:solidFill>
+              </a:defRPr>
+            </a:pPr>
+            <a:r>
+              <a:t>文本输入 (≤10000 字符)</a:t>
+            </a:r>
+          </a:p>
+          <a:p>
+            <a:pPr>
+              <a:spcAft>
+                <a:spcPts val="400"/>
+              </a:spcAft>
+              <a:defRPr sz="1400">
+                <a:solidFill>
+                  <a:srgbClr val="1F2937"/>
+                </a:solidFill>
+              </a:defRPr>
+            </a:pPr>
+            <a:r>
+              <a:t>实数字符/词数/语言统计</a:t>
+            </a:r>
+          </a:p>
+          <a:p>
+            <a:pPr>
+              <a:spcAft>
+                <a:spcPts val="400"/>
+              </a:spcAft>
+              <a:defRPr sz="1400">
+                <a:solidFill>
+                  <a:srgbClr val="1F2937"/>
+                </a:solidFill>
+              </a:defRPr>
+            </a:pPr>
+            <a:r>
+              <a:t>总分仪表盘 + 渐变进度条</a:t>
+            </a:r>
+          </a:p>
+          <a:p>
+            <a:pPr>
+              <a:spcAft>
+                <a:spcPts val="400"/>
+              </a:spcAft>
+              <a:defRPr sz="1400">
+                <a:solidFill>
+                  <a:srgbClr val="1F2937"/>
+                </a:solidFill>
+              </a:defRPr>
+            </a:pPr>
+            <a:r>
+              <a:t>三维度卡片 + 雷达图 + 评语</a:t>
+            </a:r>
+          </a:p>
+        </p:txBody>
+      </p:sp>
+      <p:sp>
+        <p:nvSpPr>
+          <p:cNvPr id="5" name="Rectangle 4"/>
           <p:cNvSpPr/>
           <p:nvPr/>
         </p:nvSpPr>
         <p:spPr>
           <a:xfrm>
-            <a:off x="6858000" y="3931920"/>
-            <a:ext cx="4572000" cy="2286000"/>
+            <a:off x="4206240" y="1371600"/>
+            <a:ext cx="3474720" cy="2743200"/>
           </a:xfrm>
           <a:prstGeom prst="rect">
             <a:avLst/>
@@ -8349,72 +8764,239 @@
             <a:pPr algn="ctr">
               <a:defRPr sz="1800" b="1">
                 <a:solidFill>
-                  <a:srgbClr val="6366F1"/>
-                </a:solidFill>
-              </a:defRPr>
-            </a:pPr>
-            <a:r>
-              <a:t>🇬🇧 English Feedback</a:t>
-            </a:r>
-          </a:p>
-          <a:p>
-            <a:pPr>
-              <a:spcAft>
-                <a:spcPts val="400"/>
-              </a:spcAft>
-              <a:defRPr sz="1400">
-                <a:solidFill>
-                  <a:srgbClr val="1F2937"/>
-                </a:solidFill>
-              </a:defRPr>
-            </a:pPr>
-            <a:r>
-              <a:t>Content: "Your arguments are clear..."</a:t>
-            </a:r>
-          </a:p>
-          <a:p>
-            <a:pPr>
-              <a:spcAft>
-                <a:spcPts val="400"/>
-              </a:spcAft>
-              <a:defRPr sz="1400">
-                <a:solidFill>
-                  <a:srgbClr val="1F2937"/>
-                </a:solidFill>
-              </a:defRPr>
-            </a:pPr>
-            <a:r>
-              <a:t>Structure: "Excellent essay structure..."</a:t>
-            </a:r>
-          </a:p>
-          <a:p>
-            <a:pPr>
-              <a:spcAft>
-                <a:spcPts val="400"/>
-              </a:spcAft>
-              <a:defRPr sz="1400">
-                <a:solidFill>
-                  <a:srgbClr val="1F2937"/>
-                </a:solidFill>
-              </a:defRPr>
-            </a:pPr>
-            <a:r>
-              <a:t>Language: "Strong command of language..."</a:t>
-            </a:r>
-          </a:p>
-          <a:p>
-            <a:pPr>
-              <a:spcAft>
-                <a:spcPts val="400"/>
-              </a:spcAft>
-              <a:defRPr sz="1400">
-                <a:solidFill>
-                  <a:srgbClr val="1F2937"/>
-                </a:solidFill>
-              </a:defRPr>
-            </a:pPr>
-            <a:r>
-              <a:t>Overall: "Overall score is strong..."</a:t>
+                  <a:srgbClr val="2E75B6"/>
+                </a:solidFill>
+              </a:defRPr>
+            </a:pPr>
+            <a:r>
+              <a:t>批量 Tab</a:t>
+            </a:r>
+          </a:p>
+          <a:p>
+            <a:pPr>
+              <a:spcAft>
+                <a:spcPts val="400"/>
+              </a:spcAft>
+              <a:defRPr sz="1400">
+                <a:solidFill>
+                  <a:srgbClr val="1F2937"/>
+                </a:solidFill>
+              </a:defRPr>
+            </a:pPr>
+            <a:r>
+              <a:t>CSV 文件选择器</a:t>
+            </a:r>
+          </a:p>
+          <a:p>
+            <a:pPr>
+              <a:spcAft>
+                <a:spcPts val="400"/>
+              </a:spcAft>
+              <a:defRPr sz="1400">
+                <a:solidFill>
+                  <a:srgbClr val="1F2937"/>
+                </a:solidFill>
+              </a:defRPr>
+            </a:pPr>
+            <a:r>
+              <a:t>逐条推理 + 进度条</a:t>
+            </a:r>
+          </a:p>
+          <a:p>
+            <a:pPr>
+              <a:spcAft>
+                <a:spcPts val="400"/>
+              </a:spcAft>
+              <a:defRPr sz="1400">
+                <a:solidFill>
+                  <a:srgbClr val="1F2937"/>
+                </a:solidFill>
+              </a:defRPr>
+            </a:pPr>
+            <a:r>
+              <a:t>LazyColumn 结果列表</a:t>
+            </a:r>
+          </a:p>
+          <a:p>
+            <a:pPr>
+              <a:spcAft>
+                <a:spcPts val="400"/>
+              </a:spcAft>
+              <a:defRPr sz="1400">
+                <a:solidFill>
+                  <a:srgbClr val="1F2937"/>
+                </a:solidFill>
+              </a:defRPr>
+            </a:pPr>
+            <a:r>
+              <a:t>显示 id/分数/状态</a:t>
+            </a:r>
+          </a:p>
+        </p:txBody>
+      </p:sp>
+      <p:sp>
+        <p:nvSpPr>
+          <p:cNvPr id="6" name="Rectangle 5"/>
+          <p:cNvSpPr/>
+          <p:nvPr/>
+        </p:nvSpPr>
+        <p:spPr>
+          <a:xfrm>
+            <a:off x="7955279" y="1371600"/>
+            <a:ext cx="3474720" cy="2743200"/>
+          </a:xfrm>
+          <a:prstGeom prst="rect">
+            <a:avLst/>
+          </a:prstGeom>
+          <a:solidFill>
+            <a:srgbClr val="FFFFFF"/>
+          </a:solidFill>
+          <a:ln w="12700">
+            <a:solidFill>
+              <a:srgbClr val="E5E7EB"/>
+            </a:solidFill>
+          </a:ln>
+        </p:spPr>
+        <p:style>
+          <a:lnRef idx="1">
+            <a:schemeClr val="accent1"/>
+          </a:lnRef>
+          <a:fillRef idx="3">
+            <a:schemeClr val="accent1"/>
+          </a:fillRef>
+          <a:effectRef idx="2">
+            <a:schemeClr val="accent1"/>
+          </a:effectRef>
+          <a:fontRef idx="minor">
+            <a:schemeClr val="lt1"/>
+          </a:fontRef>
+        </p:style>
+        <p:txBody>
+          <a:bodyPr rtlCol="0" anchor="ctr" wrap="square" lIns="274320" rIns="274320" tIns="182880"/>
+          <a:lstStyle/>
+          <a:p>
+            <a:pPr algn="ctr">
+              <a:defRPr sz="1800" b="1">
+                <a:solidFill>
+                  <a:srgbClr val="10B981"/>
+                </a:solidFill>
+              </a:defRPr>
+            </a:pPr>
+            <a:r>
+              <a:t>对比 + 设置</a:t>
+            </a:r>
+          </a:p>
+          <a:p>
+            <a:pPr>
+              <a:spcAft>
+                <a:spcPts val="400"/>
+              </a:spcAft>
+              <a:defRPr sz="1400">
+                <a:solidFill>
+                  <a:srgbClr val="1F2937"/>
+                </a:solidFill>
+              </a:defRPr>
+            </a:pPr>
+            <a:r>
+              <a:t>中英双模型 → 左右并排</a:t>
+            </a:r>
+          </a:p>
+          <a:p>
+            <a:pPr>
+              <a:spcAft>
+                <a:spcPts val="400"/>
+              </a:spcAft>
+              <a:defRPr sz="1400">
+                <a:solidFill>
+                  <a:srgbClr val="1F2937"/>
+                </a:solidFill>
+              </a:defRPr>
+            </a:pPr>
+            <a:r>
+              <a:t>总分 + 三维度差值对比</a:t>
+            </a:r>
+          </a:p>
+          <a:p>
+            <a:pPr>
+              <a:spcAft>
+                <a:spcPts val="400"/>
+              </a:spcAft>
+              <a:defRPr sz="1400">
+                <a:solidFill>
+                  <a:srgbClr val="1F2937"/>
+                </a:solidFill>
+              </a:defRPr>
+            </a:pPr>
+            <a:r>
+              <a:t>模型状态卡片 (✅/❌)</a:t>
+            </a:r>
+          </a:p>
+          <a:p>
+            <a:pPr>
+              <a:spcAft>
+                <a:spcPts val="400"/>
+              </a:spcAft>
+              <a:defRPr sz="1400">
+                <a:solidFill>
+                  <a:srgbClr val="1F2937"/>
+                </a:solidFill>
+              </a:defRPr>
+            </a:pPr>
+            <a:r>
+              <a:t>QWK 信息 · 重新加载按钮</a:t>
+            </a:r>
+          </a:p>
+        </p:txBody>
+      </p:sp>
+      <p:sp>
+        <p:nvSpPr>
+          <p:cNvPr id="7" name="TextBox 6"/>
+          <p:cNvSpPr txBox="1"/>
+          <p:nvPr/>
+        </p:nvSpPr>
+        <p:spPr>
+          <a:xfrm>
+            <a:off x="457200" y="4389120"/>
+            <a:ext cx="10972800" cy="2286000"/>
+          </a:xfrm>
+          <a:prstGeom prst="rect">
+            <a:avLst/>
+          </a:prstGeom>
+          <a:noFill/>
+        </p:spPr>
+        <p:txBody>
+          <a:bodyPr wrap="square">
+            <a:spAutoFit/>
+          </a:bodyPr>
+          <a:lstStyle/>
+          <a:p>
+            <a:pPr>
+              <a:spcAft>
+                <a:spcPts val="800"/>
+              </a:spcAft>
+              <a:defRPr sz="1600">
+                <a:solidFill>
+                  <a:srgbClr val="1F2937"/>
+                </a:solidFill>
+              </a:defRPr>
+            </a:pPr>
+            <a:r>
+              <a:t>所有组件自主实现: RadarChart (Canvas) / ScoreGauge (渐变进度条) / FeedbackCard (彩色边框)</a:t>
+            </a:r>
+          </a:p>
+          <a:p>
+            <a:pPr>
+              <a:spcAft>
+                <a:spcPts val="800"/>
+              </a:spcAft>
+              <a:defRPr sz="1600">
+                <a:solidFill>
+                  <a:srgbClr val="1F2937"/>
+                </a:solidFill>
+              </a:defRPr>
+            </a:pPr>
+            <a:r>
+              <a:t>总计约 800 行 Kotlin · 最低 SDK 29 (Android 10) · Compose Navigation 单 Activity 架构</a:t>
             </a:r>
           </a:p>
         </p:txBody>
@@ -8460,7 +9042,7 @@
             <a:avLst/>
           </a:prstGeom>
           <a:solidFill>
-            <a:srgbClr val="6366F1"/>
+            <a:srgbClr val="1F3864"/>
           </a:solidFill>
           <a:ln>
             <a:noFill/>
@@ -8484,7 +9066,7 @@
           <a:bodyPr rtlCol="0" anchor="ctr" wrap="square" lIns="731520" tIns="274320"/>
           <a:lstStyle/>
           <a:p>
-            <a:pPr algn="l">
+            <a:pPr algn="ctr">
               <a:defRPr sz="3200" b="1">
                 <a:solidFill>
                   <a:srgbClr val="FFFFFF"/>
@@ -8492,7 +9074,19 @@
               </a:defRPr>
             </a:pPr>
             <a:r>
-              <a:t>测试与质量保证</a:t>
+              <a:t>Kotlin BERT 分词器</a:t>
+            </a:r>
+          </a:p>
+          <a:p>
+            <a:pPr>
+              <a:defRPr sz="1600">
+                <a:solidFill>
+                  <a:srgbClr val="D1D5DB"/>
+                </a:solidFill>
+              </a:defRPr>
+            </a:pPr>
+            <a:r>
+              <a:t>100 行代码 · 零外部 NLP 库 · 自主实现</a:t>
             </a:r>
           </a:p>
         </p:txBody>
@@ -8527,21 +9121,275 @@
               </a:defRPr>
             </a:pPr>
             <a:r>
-              <a:t>AES 自动文本评分系统 | 工程实践项目答辩</a:t>
-            </a:r>
-          </a:p>
-        </p:txBody>
-      </p:sp>
-      <p:sp>
-        <p:nvSpPr>
-          <p:cNvPr id="4" name="Rectangle 3"/>
-          <p:cNvSpPr/>
+              <a:t>AES 中英文双语作文评分系统  |  工程实践项目答辩  |  苏州 · 2026</a:t>
+            </a:r>
+          </a:p>
+        </p:txBody>
+      </p:sp>
+      <p:sp>
+        <p:nvSpPr>
+          <p:cNvPr id="4" name="TextBox 3"/>
+          <p:cNvSpPr txBox="1"/>
           <p:nvPr/>
         </p:nvSpPr>
         <p:spPr>
           <a:xfrm>
             <a:off x="731520" y="1371600"/>
-            <a:ext cx="5029200" cy="2286000"/>
+            <a:ext cx="5486400" cy="4572000"/>
+          </a:xfrm>
+          <a:prstGeom prst="rect">
+            <a:avLst/>
+          </a:prstGeom>
+          <a:noFill/>
+        </p:spPr>
+        <p:txBody>
+          <a:bodyPr wrap="square">
+            <a:spAutoFit/>
+          </a:bodyPr>
+          <a:lstStyle/>
+          <a:p>
+            <a:pPr>
+              <a:spcAft>
+                <a:spcPts val="800"/>
+              </a:spcAft>
+              <a:defRPr sz="1600">
+                <a:solidFill>
+                  <a:srgbClr val="1F2937"/>
+                </a:solidFill>
+              </a:defRPr>
+            </a:pPr>
+            <a:r>
+              <a:t>▸ 词表加载: 从 assets/vocab.txt 读取 → HashMap&lt;String, Int&gt;</a:t>
+            </a:r>
+          </a:p>
+          <a:p>
+            <a:pPr>
+              <a:spcAft>
+                <a:spcPts val="800"/>
+              </a:spcAft>
+              <a:defRPr sz="1600">
+                <a:solidFill>
+                  <a:srgbClr val="1F2937"/>
+                </a:solidFill>
+              </a:defRPr>
+            </a:pPr>
+            <a:r>
+              <a:t>    英文: 30,522 tokens (bert-base-uncased)</a:t>
+            </a:r>
+          </a:p>
+          <a:p>
+            <a:pPr>
+              <a:spcAft>
+                <a:spcPts val="800"/>
+              </a:spcAft>
+              <a:defRPr sz="1600">
+                <a:solidFill>
+                  <a:srgbClr val="1F2937"/>
+                </a:solidFill>
+              </a:defRPr>
+            </a:pPr>
+            <a:r>
+              <a:t>    中文: 21,128 tokens (bert-base-chinese)</a:t>
+            </a:r>
+          </a:p>
+          <a:p>
+            <a:pPr>
+              <a:spcAft>
+                <a:spcPts val="800"/>
+              </a:spcAft>
+              <a:defRPr sz="1600">
+                <a:solidFill>
+                  <a:srgbClr val="1F2937"/>
+                </a:solidFill>
+              </a:defRPr>
+            </a:pPr>
+          </a:p>
+          <a:p>
+            <a:pPr>
+              <a:spcAft>
+                <a:spcPts val="800"/>
+              </a:spcAft>
+              <a:defRPr sz="1600">
+                <a:solidFill>
+                  <a:srgbClr val="1F2937"/>
+                </a:solidFill>
+              </a:defRPr>
+            </a:pPr>
+            <a:r>
+              <a:t>▸ basicTokenize: 基础分词</a:t>
+            </a:r>
+          </a:p>
+          <a:p>
+            <a:pPr>
+              <a:spcAft>
+                <a:spcPts val="800"/>
+              </a:spcAft>
+              <a:defRPr sz="1600">
+                <a:solidFill>
+                  <a:srgbClr val="1F2937"/>
+                </a:solidFill>
+              </a:defRPr>
+            </a:pPr>
+            <a:r>
+              <a:t>    中文: 逐字切分 (Unicode 范围 一-鿿)</a:t>
+            </a:r>
+          </a:p>
+          <a:p>
+            <a:pPr>
+              <a:spcAft>
+                <a:spcPts val="800"/>
+              </a:spcAft>
+              <a:defRPr sz="1600">
+                <a:solidFill>
+                  <a:srgbClr val="1F2937"/>
+                </a:solidFill>
+              </a:defRPr>
+            </a:pPr>
+            <a:r>
+              <a:t>    英文: 按空格/标点拆分 + 小写化</a:t>
+            </a:r>
+          </a:p>
+          <a:p>
+            <a:pPr>
+              <a:spcAft>
+                <a:spcPts val="800"/>
+              </a:spcAft>
+              <a:defRPr sz="1600">
+                <a:solidFill>
+                  <a:srgbClr val="1F2937"/>
+                </a:solidFill>
+              </a:defRPr>
+            </a:pPr>
+          </a:p>
+          <a:p>
+            <a:pPr>
+              <a:spcAft>
+                <a:spcPts val="800"/>
+              </a:spcAft>
+              <a:defRPr sz="1600">
+                <a:solidFill>
+                  <a:srgbClr val="1F2937"/>
+                </a:solidFill>
+              </a:defRPr>
+            </a:pPr>
+            <a:r>
+              <a:t>▸ wordPieceTokenize: 子词匹配</a:t>
+            </a:r>
+          </a:p>
+          <a:p>
+            <a:pPr>
+              <a:spcAft>
+                <a:spcPts val="800"/>
+              </a:spcAft>
+              <a:defRPr sz="1600">
+                <a:solidFill>
+                  <a:srgbClr val="1F2937"/>
+                </a:solidFill>
+              </a:defRPr>
+            </a:pPr>
+            <a:r>
+              <a:t>    贪心最长匹配: 从词尾向前搜索</a:t>
+            </a:r>
+          </a:p>
+          <a:p>
+            <a:pPr>
+              <a:spcAft>
+                <a:spcPts val="800"/>
+              </a:spcAft>
+              <a:defRPr sz="1600">
+                <a:solidFill>
+                  <a:srgbClr val="1F2937"/>
+                </a:solidFill>
+              </a:defRPr>
+            </a:pPr>
+            <a:r>
+              <a:t>    首次不加前缀, 后续加 ## 前缀</a:t>
+            </a:r>
+          </a:p>
+          <a:p>
+            <a:pPr>
+              <a:spcAft>
+                <a:spcPts val="800"/>
+              </a:spcAft>
+              <a:defRPr sz="1600">
+                <a:solidFill>
+                  <a:srgbClr val="1F2937"/>
+                </a:solidFill>
+              </a:defRPr>
+            </a:pPr>
+            <a:r>
+              <a:t>    未匹配 → 使用 [UNK] 回退</a:t>
+            </a:r>
+          </a:p>
+          <a:p>
+            <a:pPr>
+              <a:spcAft>
+                <a:spcPts val="800"/>
+              </a:spcAft>
+              <a:defRPr sz="1600">
+                <a:solidFill>
+                  <a:srgbClr val="1F2937"/>
+                </a:solidFill>
+              </a:defRPr>
+            </a:pPr>
+          </a:p>
+          <a:p>
+            <a:pPr>
+              <a:spcAft>
+                <a:spcPts val="800"/>
+              </a:spcAft>
+              <a:defRPr sz="1600">
+                <a:solidFill>
+                  <a:srgbClr val="1F2937"/>
+                </a:solidFill>
+              </a:defRPr>
+            </a:pPr>
+            <a:r>
+              <a:t>▸ tokenize: 完整流程</a:t>
+            </a:r>
+          </a:p>
+          <a:p>
+            <a:pPr>
+              <a:spcAft>
+                <a:spcPts val="800"/>
+              </a:spcAft>
+              <a:defRPr sz="1600">
+                <a:solidFill>
+                  <a:srgbClr val="1F2937"/>
+                </a:solidFill>
+              </a:defRPr>
+            </a:pPr>
+            <a:r>
+              <a:t>    文本 → basicTokenize → wordPieceTokenize</a:t>
+            </a:r>
+          </a:p>
+          <a:p>
+            <a:pPr>
+              <a:spcAft>
+                <a:spcPts val="800"/>
+              </a:spcAft>
+              <a:defRPr sz="1600">
+                <a:solidFill>
+                  <a:srgbClr val="1F2937"/>
+                </a:solidFill>
+              </a:defRPr>
+            </a:pPr>
+            <a:r>
+              <a:t>    → [CLS] + tokens + [SEP] → LongArray(512) 填充</a:t>
+            </a:r>
+          </a:p>
+        </p:txBody>
+      </p:sp>
+      <p:sp>
+        <p:nvSpPr>
+          <p:cNvPr id="5" name="Rectangle 4"/>
+          <p:cNvSpPr/>
+          <p:nvPr/>
+        </p:nvSpPr>
+        <p:spPr>
+          <a:xfrm>
+            <a:off x="6858000" y="1371600"/>
+            <a:ext cx="4572000" cy="5029200"/>
           </a:xfrm>
           <a:prstGeom prst="rect">
             <a:avLst/>
@@ -8576,315 +9424,279 @@
             <a:pPr algn="ctr">
               <a:defRPr sz="1800" b="1">
                 <a:solidFill>
-                  <a:srgbClr val="6366F1"/>
-                </a:solidFill>
-              </a:defRPr>
-            </a:pPr>
-            <a:r>
-              <a:t>🧪 单元测试 (17项)</a:t>
-            </a:r>
-          </a:p>
-          <a:p>
-            <a:pPr>
-              <a:spcAft>
-                <a:spcPts val="400"/>
-              </a:spcAft>
-              <a:defRPr sz="1400">
-                <a:solidFill>
-                  <a:srgbClr val="1F2937"/>
-                </a:solidFill>
-              </a:defRPr>
-            </a:pPr>
-            <a:r>
-              <a:t>• 数据预处理: 文本清洗、分数归一化、Prompt划分</a:t>
-            </a:r>
-          </a:p>
-          <a:p>
-            <a:pPr>
-              <a:spcAft>
-                <a:spcPts val="400"/>
-              </a:spcAft>
-              <a:defRPr sz="1400">
-                <a:solidFill>
-                  <a:srgbClr val="1F2937"/>
-                </a:solidFill>
-              </a:defRPr>
-            </a:pPr>
-            <a:r>
-              <a:t>• API 端点: Health、Score (错误路径)、404</a:t>
-            </a:r>
-          </a:p>
-          <a:p>
-            <a:pPr>
-              <a:spcAft>
-                <a:spcPts val="400"/>
-              </a:spcAft>
-              <a:defRPr sz="1400">
-                <a:solidFill>
-                  <a:srgbClr val="1F2937"/>
-                </a:solidFill>
-              </a:defRPr>
-            </a:pPr>
-            <a:r>
-              <a:t>• 评估指标: QWK、MAE、Pearson 正确性验证</a:t>
-            </a:r>
-          </a:p>
-          <a:p>
-            <a:pPr>
-              <a:spcAft>
-                <a:spcPts val="400"/>
-              </a:spcAft>
-              <a:defRPr sz="1400">
-                <a:solidFill>
-                  <a:srgbClr val="1F2937"/>
-                </a:solidFill>
-              </a:defRPr>
-            </a:pPr>
-            <a:r>
-              <a:t>• 工具: pytest (17/17 通过, 3.99s)</a:t>
-            </a:r>
-          </a:p>
-        </p:txBody>
-      </p:sp>
-      <p:sp>
-        <p:nvSpPr>
-          <p:cNvPr id="5" name="Rectangle 4"/>
-          <p:cNvSpPr/>
-          <p:nvPr/>
-        </p:nvSpPr>
-        <p:spPr>
-          <a:xfrm>
-            <a:off x="6217920" y="1371600"/>
-            <a:ext cx="5029200" cy="2286000"/>
-          </a:xfrm>
-          <a:prstGeom prst="rect">
-            <a:avLst/>
-          </a:prstGeom>
-          <a:solidFill>
-            <a:srgbClr val="FFFFFF"/>
-          </a:solidFill>
-          <a:ln w="12700">
-            <a:solidFill>
-              <a:srgbClr val="E5E7EB"/>
-            </a:solidFill>
-          </a:ln>
-        </p:spPr>
-        <p:style>
-          <a:lnRef idx="1">
-            <a:schemeClr val="accent1"/>
-          </a:lnRef>
-          <a:fillRef idx="3">
-            <a:schemeClr val="accent1"/>
-          </a:fillRef>
-          <a:effectRef idx="2">
-            <a:schemeClr val="accent1"/>
-          </a:effectRef>
-          <a:fontRef idx="minor">
-            <a:schemeClr val="lt1"/>
-          </a:fontRef>
-        </p:style>
-        <p:txBody>
-          <a:bodyPr rtlCol="0" anchor="ctr" wrap="square" lIns="274320" rIns="274320" tIns="182880"/>
-          <a:lstStyle/>
-          <a:p>
-            <a:pPr algn="ctr">
-              <a:defRPr sz="1800" b="1">
-                <a:solidFill>
-                  <a:srgbClr val="10B981"/>
-                </a:solidFill>
-              </a:defRPr>
-            </a:pPr>
-            <a:r>
-              <a:t>🌐 E2E 测试 (41项)</a:t>
-            </a:r>
-          </a:p>
-          <a:p>
-            <a:pPr>
-              <a:spcAft>
-                <a:spcPts val="400"/>
-              </a:spcAft>
-              <a:defRPr sz="1400">
-                <a:solidFill>
-                  <a:srgbClr val="1F2937"/>
-                </a:solidFill>
-              </a:defRPr>
-            </a:pPr>
-            <a:r>
-              <a:t>• API: Health/Score(ZH/EN)/Batch/Models/Errors</a:t>
-            </a:r>
-          </a:p>
-          <a:p>
-            <a:pPr>
-              <a:spcAft>
-                <a:spcPts val="400"/>
-              </a:spcAft>
-              <a:defRPr sz="1400">
-                <a:solidFill>
-                  <a:srgbClr val="1F2937"/>
-                </a:solidFill>
-              </a:defRPr>
-            </a:pPr>
-            <a:r>
-              <a:t>• UI: 首页/空提交/清除/评分流程/批量页/对比页</a:t>
-            </a:r>
-          </a:p>
-          <a:p>
-            <a:pPr>
-              <a:spcAft>
-                <a:spcPts val="400"/>
-              </a:spcAft>
-              <a:defRPr sz="1400">
-                <a:solidFill>
-                  <a:srgbClr val="1F2937"/>
-                </a:solidFill>
-              </a:defRPr>
-            </a:pPr>
-            <a:r>
-              <a:t>• 范文: 中英文高分范文评分验证</a:t>
-            </a:r>
-          </a:p>
-          <a:p>
-            <a:pPr>
-              <a:spcAft>
-                <a:spcPts val="400"/>
-              </a:spcAft>
-              <a:defRPr sz="1400">
-                <a:solidFill>
-                  <a:srgbClr val="1F2937"/>
-                </a:solidFill>
-              </a:defRPr>
-            </a:pPr>
-            <a:r>
-              <a:t>• 工具: Playwright + Chromium (41/41 通过)</a:t>
-            </a:r>
-          </a:p>
-        </p:txBody>
-      </p:sp>
-      <p:sp>
-        <p:nvSpPr>
-          <p:cNvPr id="6" name="Rectangle 5"/>
-          <p:cNvSpPr/>
-          <p:nvPr/>
-        </p:nvSpPr>
-        <p:spPr>
-          <a:xfrm>
-            <a:off x="731520" y="3931920"/>
-            <a:ext cx="10698480" cy="2560320"/>
-          </a:xfrm>
-          <a:prstGeom prst="rect">
-            <a:avLst/>
-          </a:prstGeom>
-          <a:solidFill>
-            <a:srgbClr val="FFFFFF"/>
-          </a:solidFill>
-          <a:ln w="12700">
-            <a:solidFill>
-              <a:srgbClr val="E5E7EB"/>
-            </a:solidFill>
-          </a:ln>
-        </p:spPr>
-        <p:style>
-          <a:lnRef idx="1">
-            <a:schemeClr val="accent1"/>
-          </a:lnRef>
-          <a:fillRef idx="3">
-            <a:schemeClr val="accent1"/>
-          </a:fillRef>
-          <a:effectRef idx="2">
-            <a:schemeClr val="accent1"/>
-          </a:effectRef>
-          <a:fontRef idx="minor">
-            <a:schemeClr val="lt1"/>
-          </a:fontRef>
-        </p:style>
-        <p:txBody>
-          <a:bodyPr rtlCol="0" anchor="ctr" wrap="square" lIns="274320" rIns="274320" tIns="182880"/>
-          <a:lstStyle/>
-          <a:p>
-            <a:pPr algn="ctr">
-              <a:defRPr sz="1800" b="1">
-                <a:solidFill>
-                  <a:srgbClr val="F59E0B"/>
-                </a:solidFill>
-              </a:defRPr>
-            </a:pPr>
-            <a:r>
-              <a:t>📊 测试覆盖矩阵</a:t>
-            </a:r>
-          </a:p>
-          <a:p>
-            <a:pPr>
-              <a:spcAft>
-                <a:spcPts val="400"/>
-              </a:spcAft>
-              <a:defRPr sz="1400">
-                <a:solidFill>
-                  <a:srgbClr val="1F2937"/>
-                </a:solidFill>
-              </a:defRPr>
-            </a:pPr>
-            <a:r>
-              <a:t>层级        工具        测试数    状态    覆盖范围</a:t>
-            </a:r>
-          </a:p>
-          <a:p>
-            <a:pPr>
-              <a:spcAft>
-                <a:spcPts val="400"/>
-              </a:spcAft>
-              <a:defRPr sz="1400">
-                <a:solidFill>
-                  <a:srgbClr val="1F2937"/>
-                </a:solidFill>
-              </a:defRPr>
-            </a:pPr>
-            <a:r>
-              <a:t>─────────────────────────────────────────────────</a:t>
-            </a:r>
-          </a:p>
-          <a:p>
-            <a:pPr>
-              <a:spcAft>
-                <a:spcPts val="400"/>
-              </a:spcAft>
-              <a:defRPr sz="1400">
-                <a:solidFill>
-                  <a:srgbClr val="1F2937"/>
-                </a:solidFill>
-              </a:defRPr>
-            </a:pPr>
-            <a:r>
-              <a:t>单元测试    pytest       17       ✅    数据流水线 + API端点 + 评估指标</a:t>
-            </a:r>
-          </a:p>
-          <a:p>
-            <a:pPr>
-              <a:spcAft>
-                <a:spcPts val="400"/>
-              </a:spcAft>
-              <a:defRPr sz="1400">
-                <a:solidFill>
-                  <a:srgbClr val="1F2937"/>
-                </a:solidFill>
-              </a:defRPr>
-            </a:pPr>
-            <a:r>
-              <a:t>E2E测试    Playwright   41       ✅    API全端点 + UI全页面 + 范文验证</a:t>
-            </a:r>
-          </a:p>
-          <a:p>
-            <a:pPr>
-              <a:spcAft>
-                <a:spcPts val="400"/>
-              </a:spcAft>
-              <a:defRPr sz="1400">
-                <a:solidFill>
-                  <a:srgbClr val="1F2937"/>
-                </a:solidFill>
-              </a:defRPr>
-            </a:pPr>
-            <a:r>
-              <a:t>模型测试    (手动)        —       —     前向传播、输出形状、值域、NaN保护</a:t>
+                  <a:srgbClr val="1F3864"/>
+                </a:solidFill>
+              </a:defRPr>
+            </a:pPr>
+            <a:r>
+              <a:t>关键代码 (~20行核心)</a:t>
+            </a:r>
+          </a:p>
+          <a:p>
+            <a:pPr>
+              <a:spcAft>
+                <a:spcPts val="400"/>
+              </a:spcAft>
+              <a:defRPr sz="1400">
+                <a:solidFill>
+                  <a:srgbClr val="1F2937"/>
+                </a:solidFill>
+              </a:defRPr>
+            </a:pPr>
+            <a:r>
+              <a:t>fun wordPieceTokenize(word): List&lt;Int&gt; {</a:t>
+            </a:r>
+          </a:p>
+          <a:p>
+            <a:pPr>
+              <a:spcAft>
+                <a:spcPts val="400"/>
+              </a:spcAft>
+              <a:defRPr sz="1400">
+                <a:solidFill>
+                  <a:srgbClr val="1F2937"/>
+                </a:solidFill>
+              </a:defRPr>
+            </a:pPr>
+            <a:r>
+              <a:t>  var remaining = word, isFirst = true</a:t>
+            </a:r>
+          </a:p>
+          <a:p>
+            <a:pPr>
+              <a:spcAft>
+                <a:spcPts val="400"/>
+              </a:spcAft>
+              <a:defRPr sz="1400">
+                <a:solidFill>
+                  <a:srgbClr val="1F2937"/>
+                </a:solidFill>
+              </a:defRPr>
+            </a:pPr>
+            <a:r>
+              <a:t>  while (remaining.isNotEmpty()) {</a:t>
+            </a:r>
+          </a:p>
+          <a:p>
+            <a:pPr>
+              <a:spcAft>
+                <a:spcPts val="400"/>
+              </a:spcAft>
+              <a:defRPr sz="1400">
+                <a:solidFill>
+                  <a:srgbClr val="1F2937"/>
+                </a:solidFill>
+              </a:defRPr>
+            </a:pPr>
+            <a:r>
+              <a:t>    prefix = if (isFirst) '' else '##'</a:t>
+            </a:r>
+          </a:p>
+          <a:p>
+            <a:pPr>
+              <a:spcAft>
+                <a:spcPts val="400"/>
+              </a:spcAft>
+              <a:defRPr sz="1400">
+                <a:solidFill>
+                  <a:srgbClr val="1F2937"/>
+                </a:solidFill>
+              </a:defRPr>
+            </a:pPr>
+            <a:r>
+              <a:t>    // 从最长匹配递减搜索</a:t>
+            </a:r>
+          </a:p>
+          <a:p>
+            <a:pPr>
+              <a:spcAft>
+                <a:spcPts val="400"/>
+              </a:spcAft>
+              <a:defRPr sz="1400">
+                <a:solidFill>
+                  <a:srgbClr val="1F2937"/>
+                </a:solidFill>
+              </a:defRPr>
+            </a:pPr>
+            <a:r>
+              <a:t>    for (end in remaining.length downTo 1) {</a:t>
+            </a:r>
+          </a:p>
+          <a:p>
+            <a:pPr>
+              <a:spcAft>
+                <a:spcPts val="400"/>
+              </a:spcAft>
+              <a:defRPr sz="1400">
+                <a:solidFill>
+                  <a:srgbClr val="1F2937"/>
+                </a:solidFill>
+              </a:defRPr>
+            </a:pPr>
+            <a:r>
+              <a:t>      id = vocab[prefix+remaining[0:end]]</a:t>
+            </a:r>
+          </a:p>
+          <a:p>
+            <a:pPr>
+              <a:spcAft>
+                <a:spcPts val="400"/>
+              </a:spcAft>
+              <a:defRPr sz="1400">
+                <a:solidFill>
+                  <a:srgbClr val="1F2937"/>
+                </a:solidFill>
+              </a:defRPr>
+            </a:pPr>
+            <a:r>
+              <a:t>      if (id != null) { tokens.add(id); break }</a:t>
+            </a:r>
+          </a:p>
+          <a:p>
+            <a:pPr>
+              <a:spcAft>
+                <a:spcPts val="400"/>
+              </a:spcAft>
+              <a:defRPr sz="1400">
+                <a:solidFill>
+                  <a:srgbClr val="1F2937"/>
+                </a:solidFill>
+              </a:defRPr>
+            </a:pPr>
+            <a:r>
+              <a:t>    }</a:t>
+            </a:r>
+          </a:p>
+          <a:p>
+            <a:pPr>
+              <a:spcAft>
+                <a:spcPts val="400"/>
+              </a:spcAft>
+              <a:defRPr sz="1400">
+                <a:solidFill>
+                  <a:srgbClr val="1F2937"/>
+                </a:solidFill>
+              </a:defRPr>
+            </a:pPr>
+            <a:r>
+              <a:t>    if (!found) { tokens.add([UNK]); break }</a:t>
+            </a:r>
+          </a:p>
+          <a:p>
+            <a:pPr>
+              <a:spcAft>
+                <a:spcPts val="400"/>
+              </a:spcAft>
+              <a:defRPr sz="1400">
+                <a:solidFill>
+                  <a:srgbClr val="1F2937"/>
+                </a:solidFill>
+              </a:defRPr>
+            </a:pPr>
+            <a:r>
+              <a:t>    isFirst = false</a:t>
+            </a:r>
+          </a:p>
+          <a:p>
+            <a:pPr>
+              <a:spcAft>
+                <a:spcPts val="400"/>
+              </a:spcAft>
+              <a:defRPr sz="1400">
+                <a:solidFill>
+                  <a:srgbClr val="1F2937"/>
+                </a:solidFill>
+              </a:defRPr>
+            </a:pPr>
+            <a:r>
+              <a:t>  }</a:t>
+            </a:r>
+          </a:p>
+          <a:p>
+            <a:pPr>
+              <a:spcAft>
+                <a:spcPts val="400"/>
+              </a:spcAft>
+              <a:defRPr sz="1400">
+                <a:solidFill>
+                  <a:srgbClr val="1F2937"/>
+                </a:solidFill>
+              </a:defRPr>
+            </a:pPr>
+            <a:r>
+              <a:t>}</a:t>
+            </a:r>
+          </a:p>
+          <a:p>
+            <a:pPr>
+              <a:spcAft>
+                <a:spcPts val="400"/>
+              </a:spcAft>
+              <a:defRPr sz="1400">
+                <a:solidFill>
+                  <a:srgbClr val="1F2937"/>
+                </a:solidFill>
+              </a:defRPr>
+            </a:pPr>
+          </a:p>
+          <a:p>
+            <a:pPr>
+              <a:spcAft>
+                <a:spcPts val="400"/>
+              </a:spcAft>
+              <a:defRPr sz="1400">
+                <a:solidFill>
+                  <a:srgbClr val="1F2937"/>
+                </a:solidFill>
+              </a:defRPr>
+            </a:pPr>
+            <a:r>
+              <a:t>为什么自实现？</a:t>
+            </a:r>
+          </a:p>
+          <a:p>
+            <a:pPr>
+              <a:spcAft>
+                <a:spcPts val="400"/>
+              </a:spcAft>
+              <a:defRPr sz="1400">
+                <a:solidFill>
+                  <a:srgbClr val="1F2937"/>
+                </a:solidFill>
+              </a:defRPr>
+            </a:pPr>
+            <a:r>
+              <a:t>• HuggingFace Tokenizers 无 Android 版</a:t>
+            </a:r>
+          </a:p>
+          <a:p>
+            <a:pPr>
+              <a:spcAft>
+                <a:spcPts val="400"/>
+              </a:spcAft>
+              <a:defRPr sz="1400">
+                <a:solidFill>
+                  <a:srgbClr val="1F2937"/>
+                </a:solidFill>
+              </a:defRPr>
+            </a:pPr>
+            <a:r>
+              <a:t>• Java NLP 库 (DJL) 体积大、依赖多</a:t>
+            </a:r>
+          </a:p>
+          <a:p>
+            <a:pPr>
+              <a:spcAft>
+                <a:spcPts val="400"/>
+              </a:spcAft>
+              <a:defRPr sz="1400">
+                <a:solidFill>
+                  <a:srgbClr val="1F2937"/>
+                </a:solidFill>
+              </a:defRPr>
+            </a:pPr>
+            <a:r>
+              <a:t>• 100 行代码完全可控，便于调试修改</a:t>
             </a:r>
           </a:p>
         </p:txBody>
